--- a/slides/sources/J5-integration-projet.pptx
+++ b/slides/sources/J5-integration-projet.pptx
@@ -1658,7 +1658,7 @@
     <p:bg>
       <p:bgPr>
         <a:solidFill>
-          <a:srgbClr val="0D3325"/>
+          <a:srgbClr val="0A2E1A"/>
         </a:solidFill>
       </p:bgPr>
     </p:bg>
@@ -1691,7 +1691,7 @@
             <a:avLst/>
           </a:prstGeom>
           <a:solidFill>
-            <a:srgbClr val="14563C"/>
+            <a:srgbClr val="0E7A3D"/>
           </a:solidFill>
           <a:ln/>
         </p:spPr>
@@ -1711,8 +1711,8 @@
             <a:avLst/>
           </a:prstGeom>
           <a:solidFill>
-            <a:srgbClr val="C9A227">
-              <a:alpha val="45000"/>
+            <a:srgbClr val="FCD116">
+              <a:alpha val="55000"/>
             </a:srgbClr>
           </a:solidFill>
           <a:ln/>
@@ -1733,8 +1733,8 @@
             <a:avLst/>
           </a:prstGeom>
           <a:solidFill>
-            <a:srgbClr val="1E7A50">
-              <a:alpha val="60000"/>
+            <a:srgbClr val="CE1126">
+              <a:alpha val="65000"/>
             </a:srgbClr>
           </a:solidFill>
           <a:ln/>
@@ -1742,7 +1742,53 @@
       </p:sp>
       <p:sp>
         <p:nvSpPr>
-          <p:cNvPr id="5" name="Text 3"/>
+          <p:cNvPr id="5" name="Shape 3"/>
+          <p:cNvSpPr/>
+          <p:nvPr/>
+        </p:nvSpPr>
+        <p:spPr>
+          <a:xfrm>
+            <a:off x="9464040" y="502920"/>
+            <a:ext cx="2148840" cy="1828800"/>
+          </a:xfrm>
+          <a:prstGeom prst="roundRect">
+            <a:avLst>
+              <a:gd name="adj" fmla="val 6000"/>
+            </a:avLst>
+          </a:prstGeom>
+          <a:solidFill>
+            <a:srgbClr val="FFFFFF"/>
+          </a:solidFill>
+          <a:ln/>
+        </p:spPr>
+      </p:sp>
+      <p:pic>
+        <p:nvPicPr>
+          <p:cNvPr id="6" name="Image 0" descr="logo-dgi.png">    </p:cNvPr>
+          <p:cNvPicPr>
+            <a:picLocks noChangeAspect="1"/>
+          </p:cNvPicPr>
+          <p:nvPr/>
+        </p:nvPicPr>
+        <p:blipFill>
+          <a:blip r:embed="rId1"/>
+          <a:stretch>
+            <a:fillRect/>
+          </a:stretch>
+        </p:blipFill>
+        <p:spPr>
+          <a:xfrm>
+            <a:off x="9646920" y="740664"/>
+            <a:ext cx="1783080" cy="1353312"/>
+          </a:xfrm>
+          <a:prstGeom prst="rect">
+            <a:avLst/>
+          </a:prstGeom>
+        </p:spPr>
+      </p:pic>
+      <p:sp>
+        <p:nvSpPr>
+          <p:cNvPr id="7" name="Text 4"/>
           <p:cNvSpPr/>
           <p:nvPr/>
         </p:nvSpPr>
@@ -1767,7 +1813,7 @@
             <a:r>
               <a:rPr lang="en-US" sz="1500" b="1" spc="300" kern="0" dirty="0">
                 <a:solidFill>
-                  <a:srgbClr val="C9A227"/>
+                  <a:srgbClr val="FCD116"/>
                 </a:solidFill>
                 <a:latin typeface="Calibri" pitchFamily="34" charset="0"/>
                 <a:ea typeface="Calibri" pitchFamily="34" charset="-122"/>
@@ -1781,7 +1827,7 @@
       </p:sp>
       <p:sp>
         <p:nvSpPr>
-          <p:cNvPr id="6" name="Text 4"/>
+          <p:cNvPr id="8" name="Text 5"/>
           <p:cNvSpPr/>
           <p:nvPr/>
         </p:nvSpPr>
@@ -1820,7 +1866,7 @@
       </p:sp>
       <p:sp>
         <p:nvSpPr>
-          <p:cNvPr id="7" name="Text 5"/>
+          <p:cNvPr id="9" name="Text 6"/>
           <p:cNvSpPr/>
           <p:nvPr/>
         </p:nvSpPr>
@@ -1845,7 +1891,7 @@
             <a:r>
               <a:rPr lang="en-US" sz="3500" b="1" dirty="0">
                 <a:solidFill>
-                  <a:srgbClr val="E8D48A"/>
+                  <a:srgbClr val="FCD116"/>
                 </a:solidFill>
                 <a:latin typeface="Cambria" pitchFamily="34" charset="0"/>
                 <a:ea typeface="Cambria" pitchFamily="34" charset="-122"/>
@@ -1859,7 +1905,7 @@
       </p:sp>
       <p:sp>
         <p:nvSpPr>
-          <p:cNvPr id="8" name="Text 6"/>
+          <p:cNvPr id="10" name="Text 7"/>
           <p:cNvSpPr/>
           <p:nvPr/>
         </p:nvSpPr>
@@ -1921,7 +1967,7 @@
       </p:sp>
       <p:sp>
         <p:nvSpPr>
-          <p:cNvPr id="9" name="Shape 7"/>
+          <p:cNvPr id="11" name="Shape 8"/>
           <p:cNvSpPr/>
           <p:nvPr/>
         </p:nvSpPr>
@@ -1936,14 +1982,14 @@
             </a:avLst>
           </a:prstGeom>
           <a:solidFill>
-            <a:srgbClr val="14563C"/>
+            <a:srgbClr val="0E7A3D"/>
           </a:solidFill>
           <a:ln/>
         </p:spPr>
       </p:sp>
       <p:sp>
         <p:nvSpPr>
-          <p:cNvPr id="10" name="Text 8"/>
+          <p:cNvPr id="12" name="Text 9"/>
           <p:cNvSpPr/>
           <p:nvPr/>
         </p:nvSpPr>
@@ -1982,7 +2028,7 @@
       </p:sp>
       <p:sp>
         <p:nvSpPr>
-          <p:cNvPr id="11" name="Shape 9"/>
+          <p:cNvPr id="13" name="Shape 10"/>
           <p:cNvSpPr/>
           <p:nvPr/>
         </p:nvSpPr>
@@ -1997,14 +2043,14 @@
             </a:avLst>
           </a:prstGeom>
           <a:solidFill>
-            <a:srgbClr val="14563C"/>
+            <a:srgbClr val="0E7A3D"/>
           </a:solidFill>
           <a:ln/>
         </p:spPr>
       </p:sp>
       <p:sp>
         <p:nvSpPr>
-          <p:cNvPr id="12" name="Text 10"/>
+          <p:cNvPr id="14" name="Text 11"/>
           <p:cNvSpPr/>
           <p:nvPr/>
         </p:nvSpPr>
@@ -2043,7 +2089,7 @@
       </p:sp>
       <p:sp>
         <p:nvSpPr>
-          <p:cNvPr id="13" name="Text 11"/>
+          <p:cNvPr id="15" name="Text 12"/>
           <p:cNvSpPr/>
           <p:nvPr/>
         </p:nvSpPr>
@@ -2074,7 +2120,7 @@
                 <a:ea typeface="Calibri" pitchFamily="34" charset="-122"/>
                 <a:cs typeface="Calibri" pitchFamily="34" charset="-120"/>
               </a:rPr>
-              <a:t>Python, Fondamentaux et Analyse de Données  ·  contexte administration fiscale</a:t>
+              <a:t>DGI — Direction Générale des Impôts · Guinée-Bissau · données pédagogiques fictives</a:t>
             </a:r>
             <a:endParaRPr lang="en-US" sz="1200" dirty="0"/>
           </a:p>
@@ -2094,7 +2140,7 @@
     <p:bg>
       <p:bgPr>
         <a:solidFill>
-          <a:srgbClr val="0D3325"/>
+          <a:srgbClr val="0A2E1A"/>
         </a:solidFill>
       </p:bgPr>
     </p:bg>
@@ -2127,14 +2173,36 @@
             <a:avLst/>
           </a:prstGeom>
           <a:solidFill>
-            <a:srgbClr val="14563C"/>
+            <a:srgbClr val="0E7A3D"/>
           </a:solidFill>
           <a:ln/>
         </p:spPr>
       </p:sp>
       <p:sp>
         <p:nvSpPr>
-          <p:cNvPr id="3" name="Text 1"/>
+          <p:cNvPr id="3" name="Shape 1"/>
+          <p:cNvSpPr/>
+          <p:nvPr/>
+        </p:nvSpPr>
+        <p:spPr>
+          <a:xfrm>
+            <a:off x="11430000" y="5394960"/>
+            <a:ext cx="2011680" cy="2011680"/>
+          </a:xfrm>
+          <a:prstGeom prst="ellipse">
+            <a:avLst/>
+          </a:prstGeom>
+          <a:solidFill>
+            <a:srgbClr val="CE1126">
+              <a:alpha val="60000"/>
+            </a:srgbClr>
+          </a:solidFill>
+          <a:ln/>
+        </p:spPr>
+      </p:sp>
+      <p:sp>
+        <p:nvSpPr>
+          <p:cNvPr id="4" name="Text 2"/>
           <p:cNvSpPr/>
           <p:nvPr/>
         </p:nvSpPr>
@@ -2159,7 +2227,7 @@
             <a:r>
               <a:rPr lang="en-US" sz="1300" b="1" spc="200" kern="0" dirty="0">
                 <a:solidFill>
-                  <a:srgbClr val="C9A227"/>
+                  <a:srgbClr val="C79100"/>
                 </a:solidFill>
                 <a:latin typeface="Calibri" pitchFamily="34" charset="0"/>
                 <a:ea typeface="Calibri" pitchFamily="34" charset="-122"/>
@@ -2173,7 +2241,7 @@
       </p:sp>
       <p:sp>
         <p:nvSpPr>
-          <p:cNvPr id="4" name="Text 2"/>
+          <p:cNvPr id="5" name="Text 3"/>
           <p:cNvSpPr/>
           <p:nvPr/>
         </p:nvSpPr>
@@ -2212,7 +2280,7 @@
       </p:sp>
       <p:sp>
         <p:nvSpPr>
-          <p:cNvPr id="5" name="Shape 3"/>
+          <p:cNvPr id="6" name="Shape 4"/>
           <p:cNvSpPr/>
           <p:nvPr/>
         </p:nvSpPr>
@@ -2225,14 +2293,14 @@
             <a:avLst/>
           </a:prstGeom>
           <a:solidFill>
-            <a:srgbClr val="1E7A50"/>
+            <a:srgbClr val="2E9E4F"/>
           </a:solidFill>
           <a:ln/>
         </p:spPr>
       </p:sp>
       <p:pic>
         <p:nvPicPr>
-          <p:cNvPr id="6" name="Image 0" descr="icons/check.png">    </p:cNvPr>
+          <p:cNvPr id="7" name="Image 0" descr="icons/check.png">    </p:cNvPr>
           <p:cNvPicPr>
             <a:picLocks noChangeAspect="1"/>
           </p:cNvPicPr>
@@ -2256,7 +2324,7 @@
       </p:pic>
       <p:sp>
         <p:nvSpPr>
-          <p:cNvPr id="7" name="Text 4"/>
+          <p:cNvPr id="8" name="Text 5"/>
           <p:cNvSpPr/>
           <p:nvPr/>
         </p:nvSpPr>
@@ -2309,7 +2377,7 @@
       </p:sp>
       <p:sp>
         <p:nvSpPr>
-          <p:cNvPr id="8" name="Shape 5"/>
+          <p:cNvPr id="9" name="Shape 6"/>
           <p:cNvSpPr/>
           <p:nvPr/>
         </p:nvSpPr>
@@ -2322,14 +2390,14 @@
             <a:avLst/>
           </a:prstGeom>
           <a:solidFill>
-            <a:srgbClr val="1E7A50"/>
+            <a:srgbClr val="2E9E4F"/>
           </a:solidFill>
           <a:ln/>
         </p:spPr>
       </p:sp>
       <p:pic>
         <p:nvPicPr>
-          <p:cNvPr id="9" name="Image 1" descr="icons/check.png">    </p:cNvPr>
+          <p:cNvPr id="10" name="Image 1" descr="icons/check.png">    </p:cNvPr>
           <p:cNvPicPr>
             <a:picLocks noChangeAspect="1"/>
           </p:cNvPicPr>
@@ -2353,7 +2421,7 @@
       </p:pic>
       <p:sp>
         <p:nvSpPr>
-          <p:cNvPr id="10" name="Text 6"/>
+          <p:cNvPr id="11" name="Text 7"/>
           <p:cNvSpPr/>
           <p:nvPr/>
         </p:nvSpPr>
@@ -2406,7 +2474,7 @@
       </p:sp>
       <p:sp>
         <p:nvSpPr>
-          <p:cNvPr id="11" name="Shape 7"/>
+          <p:cNvPr id="12" name="Shape 8"/>
           <p:cNvSpPr/>
           <p:nvPr/>
         </p:nvSpPr>
@@ -2419,14 +2487,14 @@
             <a:avLst/>
           </a:prstGeom>
           <a:solidFill>
-            <a:srgbClr val="1E7A50"/>
+            <a:srgbClr val="2E9E4F"/>
           </a:solidFill>
           <a:ln/>
         </p:spPr>
       </p:sp>
       <p:pic>
         <p:nvPicPr>
-          <p:cNvPr id="12" name="Image 2" descr="icons/check.png">    </p:cNvPr>
+          <p:cNvPr id="13" name="Image 2" descr="icons/check.png">    </p:cNvPr>
           <p:cNvPicPr>
             <a:picLocks noChangeAspect="1"/>
           </p:cNvPicPr>
@@ -2450,7 +2518,7 @@
       </p:pic>
       <p:sp>
         <p:nvSpPr>
-          <p:cNvPr id="13" name="Text 8"/>
+          <p:cNvPr id="14" name="Text 9"/>
           <p:cNvSpPr/>
           <p:nvPr/>
         </p:nvSpPr>
@@ -2503,7 +2571,7 @@
       </p:sp>
       <p:sp>
         <p:nvSpPr>
-          <p:cNvPr id="14" name="Shape 9"/>
+          <p:cNvPr id="15" name="Shape 10"/>
           <p:cNvSpPr/>
           <p:nvPr/>
         </p:nvSpPr>
@@ -2516,14 +2584,14 @@
             <a:avLst/>
           </a:prstGeom>
           <a:solidFill>
-            <a:srgbClr val="1E7A50"/>
+            <a:srgbClr val="2E9E4F"/>
           </a:solidFill>
           <a:ln/>
         </p:spPr>
       </p:sp>
       <p:pic>
         <p:nvPicPr>
-          <p:cNvPr id="15" name="Image 3" descr="icons/check.png">    </p:cNvPr>
+          <p:cNvPr id="16" name="Image 3" descr="icons/check.png">    </p:cNvPr>
           <p:cNvPicPr>
             <a:picLocks noChangeAspect="1"/>
           </p:cNvPicPr>
@@ -2547,7 +2615,7 @@
       </p:pic>
       <p:sp>
         <p:nvSpPr>
-          <p:cNvPr id="16" name="Text 10"/>
+          <p:cNvPr id="17" name="Text 11"/>
           <p:cNvSpPr/>
           <p:nvPr/>
         </p:nvSpPr>
@@ -2600,7 +2668,7 @@
       </p:sp>
       <p:sp>
         <p:nvSpPr>
-          <p:cNvPr id="17" name="Shape 11"/>
+          <p:cNvPr id="18" name="Shape 12"/>
           <p:cNvSpPr/>
           <p:nvPr/>
         </p:nvSpPr>
@@ -2613,14 +2681,14 @@
             <a:avLst/>
           </a:prstGeom>
           <a:solidFill>
-            <a:srgbClr val="1E7A50"/>
+            <a:srgbClr val="2E9E4F"/>
           </a:solidFill>
           <a:ln/>
         </p:spPr>
       </p:sp>
       <p:pic>
         <p:nvPicPr>
-          <p:cNvPr id="18" name="Image 4" descr="icons/check.png">    </p:cNvPr>
+          <p:cNvPr id="19" name="Image 4" descr="icons/check.png">    </p:cNvPr>
           <p:cNvPicPr>
             <a:picLocks noChangeAspect="1"/>
           </p:cNvPicPr>
@@ -2644,7 +2712,7 @@
       </p:pic>
       <p:sp>
         <p:nvSpPr>
-          <p:cNvPr id="19" name="Text 12"/>
+          <p:cNvPr id="20" name="Text 13"/>
           <p:cNvSpPr/>
           <p:nvPr/>
         </p:nvSpPr>
@@ -2697,7 +2765,7 @@
       </p:sp>
       <p:sp>
         <p:nvSpPr>
-          <p:cNvPr id="20" name="Shape 13"/>
+          <p:cNvPr id="21" name="Shape 14"/>
           <p:cNvSpPr/>
           <p:nvPr/>
         </p:nvSpPr>
@@ -2712,14 +2780,14 @@
             </a:avLst>
           </a:prstGeom>
           <a:solidFill>
-            <a:srgbClr val="14563C"/>
+            <a:srgbClr val="0E7A3D"/>
           </a:solidFill>
           <a:ln/>
         </p:spPr>
       </p:sp>
       <p:sp>
         <p:nvSpPr>
-          <p:cNvPr id="21" name="Shape 14"/>
+          <p:cNvPr id="22" name="Shape 15"/>
           <p:cNvSpPr/>
           <p:nvPr/>
         </p:nvSpPr>
@@ -2732,14 +2800,14 @@
             <a:avLst/>
           </a:prstGeom>
           <a:solidFill>
-            <a:srgbClr val="C9A227"/>
+            <a:srgbClr val="C79100"/>
           </a:solidFill>
           <a:ln/>
         </p:spPr>
       </p:sp>
       <p:pic>
         <p:nvPicPr>
-          <p:cNvPr id="22" name="Image 5" descr="icons/rocket.png">    </p:cNvPr>
+          <p:cNvPr id="23" name="Image 5" descr="icons/rocket.png">    </p:cNvPr>
           <p:cNvPicPr>
             <a:picLocks noChangeAspect="1"/>
           </p:cNvPicPr>
@@ -2763,7 +2831,7 @@
       </p:pic>
       <p:sp>
         <p:nvSpPr>
-          <p:cNvPr id="23" name="Text 15"/>
+          <p:cNvPr id="24" name="Text 16"/>
           <p:cNvSpPr/>
           <p:nvPr/>
         </p:nvSpPr>
@@ -2802,7 +2870,7 @@
       </p:sp>
       <p:sp>
         <p:nvSpPr>
-          <p:cNvPr id="24" name="Text 16"/>
+          <p:cNvPr id="25" name="Text 17"/>
           <p:cNvSpPr/>
           <p:nvPr/>
         </p:nvSpPr>
@@ -2880,7 +2948,7 @@
         <p:spPr>
           <a:xfrm>
             <a:off x="548640" y="384048"/>
-            <a:ext cx="10972800" cy="320040"/>
+            <a:ext cx="9601200" cy="320040"/>
           </a:xfrm>
           <a:prstGeom prst="rect">
             <a:avLst/>
@@ -2898,7 +2966,7 @@
             <a:r>
               <a:rPr lang="en-US" sz="1300" b="1" spc="200" kern="0" dirty="0">
                 <a:solidFill>
-                  <a:srgbClr val="C9A227"/>
+                  <a:srgbClr val="C79100"/>
                 </a:solidFill>
                 <a:latin typeface="Calibri" pitchFamily="34" charset="0"/>
                 <a:ea typeface="Calibri" pitchFamily="34" charset="-122"/>
@@ -2919,7 +2987,7 @@
         <p:spPr>
           <a:xfrm>
             <a:off x="548640" y="658368"/>
-            <a:ext cx="11064240" cy="731520"/>
+            <a:ext cx="9966960" cy="731520"/>
           </a:xfrm>
           <a:prstGeom prst="rect">
             <a:avLst/>
@@ -2937,7 +3005,7 @@
             <a:r>
               <a:rPr lang="en-US" sz="3400" b="1" dirty="0">
                 <a:solidFill>
-                  <a:srgbClr val="14563C"/>
+                  <a:srgbClr val="0E7A3D"/>
                 </a:solidFill>
                 <a:latin typeface="Cambria" pitchFamily="34" charset="0"/>
                 <a:ea typeface="Cambria" pitchFamily="34" charset="-122"/>
@@ -2949,29 +3017,9 @@
           </a:p>
         </p:txBody>
       </p:sp>
-      <p:sp>
-        <p:nvSpPr>
-          <p:cNvPr id="4" name="Shape 2"/>
-          <p:cNvSpPr/>
-          <p:nvPr/>
-        </p:nvSpPr>
-        <p:spPr>
-          <a:xfrm>
-            <a:off x="640080" y="1783080"/>
-            <a:ext cx="566928" cy="566928"/>
-          </a:xfrm>
-          <a:prstGeom prst="ellipse">
-            <a:avLst/>
-          </a:prstGeom>
-          <a:solidFill>
-            <a:srgbClr val="14563C"/>
-          </a:solidFill>
-          <a:ln/>
-        </p:spPr>
-      </p:sp>
       <p:pic>
         <p:nvPicPr>
-          <p:cNvPr id="5" name="Image 0" descr="icons/flow.png">    </p:cNvPr>
+          <p:cNvPr id="4" name="Image 0" descr="logo-dgi.png">    </p:cNvPr>
           <p:cNvPicPr>
             <a:picLocks noChangeAspect="1"/>
           </p:cNvPicPr>
@@ -2985,8 +3033,8 @@
         </p:blipFill>
         <p:spPr>
           <a:xfrm>
-            <a:off x="787481" y="1930481"/>
-            <a:ext cx="272125" cy="272125"/>
+            <a:off x="10744200" y="384048"/>
+            <a:ext cx="1051560" cy="795528"/>
           </a:xfrm>
           <a:prstGeom prst="rect">
             <a:avLst/>
@@ -2995,105 +3043,27 @@
       </p:pic>
       <p:sp>
         <p:nvSpPr>
-          <p:cNvPr id="6" name="Text 3"/>
-          <p:cNvSpPr/>
-          <p:nvPr/>
-        </p:nvSpPr>
-        <p:spPr>
-          <a:xfrm>
-            <a:off x="1417320" y="1728216"/>
-            <a:ext cx="5852160" cy="365760"/>
-          </a:xfrm>
-          <a:prstGeom prst="rect">
-            <a:avLst/>
-          </a:prstGeom>
-          <a:noFill/>
-          <a:ln/>
-        </p:spPr>
-        <p:txBody>
-          <a:bodyPr wrap="square" lIns="0" tIns="0" rIns="0" bIns="0" rtlCol="0" anchor="ctr"/>
-          <a:lstStyle/>
-          <a:p>
-            <a:pPr indent="0" marL="0">
-              <a:buNone/>
-            </a:pPr>
-            <a:r>
-              <a:rPr lang="en-US" sz="1650" b="1" dirty="0">
-                <a:solidFill>
-                  <a:srgbClr val="1C2A24"/>
-                </a:solidFill>
-                <a:latin typeface="Calibri" pitchFamily="34" charset="0"/>
-                <a:ea typeface="Calibri" pitchFamily="34" charset="-122"/>
-                <a:cs typeface="Calibri" pitchFamily="34" charset="-120"/>
-              </a:rPr>
-              <a:t>La chaîne complète</a:t>
-            </a:r>
-            <a:endParaRPr lang="en-US" sz="1650" dirty="0"/>
-          </a:p>
-        </p:txBody>
-      </p:sp>
-      <p:sp>
-        <p:nvSpPr>
-          <p:cNvPr id="7" name="Text 4"/>
-          <p:cNvSpPr/>
-          <p:nvPr/>
-        </p:nvSpPr>
-        <p:spPr>
-          <a:xfrm>
-            <a:off x="1417320" y="2057400"/>
-            <a:ext cx="5852160" cy="502920"/>
-          </a:xfrm>
-          <a:prstGeom prst="rect">
-            <a:avLst/>
-          </a:prstGeom>
-          <a:noFill/>
-          <a:ln/>
-        </p:spPr>
-        <p:txBody>
-          <a:bodyPr wrap="square" lIns="0" tIns="0" rIns="0" bIns="0" rtlCol="0" anchor="ctr"/>
-          <a:lstStyle/>
-          <a:p>
-            <a:pPr indent="0" marL="0">
-              <a:buNone/>
-            </a:pPr>
-            <a:r>
-              <a:rPr lang="en-US" sz="1300" dirty="0">
-                <a:solidFill>
-                  <a:srgbClr val="5C6B63"/>
-                </a:solidFill>
-                <a:latin typeface="Calibri" pitchFamily="34" charset="0"/>
-                <a:ea typeface="Calibri" pitchFamily="34" charset="-122"/>
-                <a:cs typeface="Calibri" pitchFamily="34" charset="-120"/>
-              </a:rPr>
-              <a:t>lecture → validation → traitement → restitution : le modèle fourni.</a:t>
-            </a:r>
-            <a:endParaRPr lang="en-US" sz="1300" dirty="0"/>
-          </a:p>
-        </p:txBody>
-      </p:sp>
-      <p:sp>
-        <p:nvSpPr>
-          <p:cNvPr id="8" name="Shape 5"/>
-          <p:cNvSpPr/>
-          <p:nvPr/>
-        </p:nvSpPr>
-        <p:spPr>
-          <a:xfrm>
-            <a:off x="640080" y="2807208"/>
+          <p:cNvPr id="5" name="Shape 2"/>
+          <p:cNvSpPr/>
+          <p:nvPr/>
+        </p:nvSpPr>
+        <p:spPr>
+          <a:xfrm>
+            <a:off x="640080" y="1783080"/>
             <a:ext cx="566928" cy="566928"/>
           </a:xfrm>
           <a:prstGeom prst="ellipse">
             <a:avLst/>
           </a:prstGeom>
           <a:solidFill>
-            <a:srgbClr val="1E7A50"/>
+            <a:srgbClr val="0E7A3D"/>
           </a:solidFill>
           <a:ln/>
         </p:spPr>
       </p:sp>
       <p:pic>
         <p:nvPicPr>
-          <p:cNvPr id="9" name="Image 1" descr="icons/terminal.png">    </p:cNvPr>
+          <p:cNvPr id="6" name="Image 1" descr="icons/flow.png">    </p:cNvPr>
           <p:cNvPicPr>
             <a:picLocks noChangeAspect="1"/>
           </p:cNvPicPr>
@@ -3107,7 +3077,7 @@
         </p:blipFill>
         <p:spPr>
           <a:xfrm>
-            <a:off x="787481" y="2954609"/>
+            <a:off x="787481" y="1930481"/>
             <a:ext cx="272125" cy="272125"/>
           </a:xfrm>
           <a:prstGeom prst="rect">
@@ -3117,13 +3087,13 @@
       </p:pic>
       <p:sp>
         <p:nvSpPr>
-          <p:cNvPr id="10" name="Text 6"/>
-          <p:cNvSpPr/>
-          <p:nvPr/>
-        </p:nvSpPr>
-        <p:spPr>
-          <a:xfrm>
-            <a:off x="1417320" y="2752344"/>
+          <p:cNvPr id="7" name="Text 3"/>
+          <p:cNvSpPr/>
+          <p:nvPr/>
+        </p:nvSpPr>
+        <p:spPr>
+          <a:xfrm>
+            <a:off x="1417320" y="1728216"/>
             <a:ext cx="5852160" cy="365760"/>
           </a:xfrm>
           <a:prstGeom prst="rect">
@@ -3148,7 +3118,7 @@
                 <a:ea typeface="Calibri" pitchFamily="34" charset="-122"/>
                 <a:cs typeface="Calibri" pitchFamily="34" charset="-120"/>
               </a:rPr>
-              <a:t>Une seule commande</a:t>
+              <a:t>La chaîne complète</a:t>
             </a:r>
             <a:endParaRPr lang="en-US" sz="1650" dirty="0"/>
           </a:p>
@@ -3156,13 +3126,13 @@
       </p:sp>
       <p:sp>
         <p:nvSpPr>
-          <p:cNvPr id="11" name="Text 7"/>
-          <p:cNvSpPr/>
-          <p:nvPr/>
-        </p:nvSpPr>
-        <p:spPr>
-          <a:xfrm>
-            <a:off x="1417320" y="3081528"/>
+          <p:cNvPr id="8" name="Text 4"/>
+          <p:cNvSpPr/>
+          <p:nvPr/>
+        </p:nvSpPr>
+        <p:spPr>
+          <a:xfrm>
+            <a:off x="1417320" y="2057400"/>
             <a:ext cx="5852160" cy="502920"/>
           </a:xfrm>
           <a:prstGeom prst="rect">
@@ -3187,7 +3157,7 @@
                 <a:ea typeface="Calibri" pitchFamily="34" charset="-122"/>
                 <a:cs typeface="Calibri" pitchFamily="34" charset="-120"/>
               </a:rPr>
-              <a:t>argparse : options propres, aide automatique, échec explicite.</a:t>
+              <a:t>lecture → validation → traitement → restitution : le modèle fourni.</a:t>
             </a:r>
             <a:endParaRPr lang="en-US" sz="1300" dirty="0"/>
           </a:p>
@@ -3195,27 +3165,27 @@
       </p:sp>
       <p:sp>
         <p:nvSpPr>
-          <p:cNvPr id="12" name="Shape 8"/>
-          <p:cNvSpPr/>
-          <p:nvPr/>
-        </p:nvSpPr>
-        <p:spPr>
-          <a:xfrm>
-            <a:off x="640080" y="3831336"/>
+          <p:cNvPr id="9" name="Shape 5"/>
+          <p:cNvSpPr/>
+          <p:nvPr/>
+        </p:nvSpPr>
+        <p:spPr>
+          <a:xfrm>
+            <a:off x="640080" y="2807208"/>
             <a:ext cx="566928" cy="566928"/>
           </a:xfrm>
           <a:prstGeom prst="ellipse">
             <a:avLst/>
           </a:prstGeom>
           <a:solidFill>
-            <a:srgbClr val="C9A227"/>
+            <a:srgbClr val="2E9E4F"/>
           </a:solidFill>
           <a:ln/>
         </p:spPr>
       </p:sp>
       <p:pic>
         <p:nvPicPr>
-          <p:cNvPr id="13" name="Image 2" descr="icons/flag.png">    </p:cNvPr>
+          <p:cNvPr id="10" name="Image 2" descr="icons/terminal.png">    </p:cNvPr>
           <p:cNvPicPr>
             <a:picLocks noChangeAspect="1"/>
           </p:cNvPicPr>
@@ -3229,7 +3199,7 @@
         </p:blipFill>
         <p:spPr>
           <a:xfrm>
-            <a:off x="787481" y="3978737"/>
+            <a:off x="787481" y="2954609"/>
             <a:ext cx="272125" cy="272125"/>
           </a:xfrm>
           <a:prstGeom prst="rect">
@@ -3239,13 +3209,13 @@
       </p:pic>
       <p:sp>
         <p:nvSpPr>
-          <p:cNvPr id="14" name="Text 9"/>
-          <p:cNvSpPr/>
-          <p:nvPr/>
-        </p:nvSpPr>
-        <p:spPr>
-          <a:xfrm>
-            <a:off x="1417320" y="3776472"/>
+          <p:cNvPr id="11" name="Text 6"/>
+          <p:cNvSpPr/>
+          <p:nvPr/>
+        </p:nvSpPr>
+        <p:spPr>
+          <a:xfrm>
+            <a:off x="1417320" y="2752344"/>
             <a:ext cx="5852160" cy="365760"/>
           </a:xfrm>
           <a:prstGeom prst="rect">
@@ -3270,7 +3240,7 @@
                 <a:ea typeface="Calibri" pitchFamily="34" charset="-122"/>
                 <a:cs typeface="Calibri" pitchFamily="34" charset="-120"/>
               </a:rPr>
-              <a:t>Finir le projet</a:t>
+              <a:t>Une seule commande</a:t>
             </a:r>
             <a:endParaRPr lang="en-US" sz="1650" dirty="0"/>
           </a:p>
@@ -3278,13 +3248,13 @@
       </p:sp>
       <p:sp>
         <p:nvSpPr>
-          <p:cNvPr id="15" name="Text 10"/>
-          <p:cNvSpPr/>
-          <p:nvPr/>
-        </p:nvSpPr>
-        <p:spPr>
-          <a:xfrm>
-            <a:off x="1417320" y="4105656"/>
+          <p:cNvPr id="12" name="Text 7"/>
+          <p:cNvSpPr/>
+          <p:nvPr/>
+        </p:nvSpPr>
+        <p:spPr>
+          <a:xfrm>
+            <a:off x="1417320" y="3081528"/>
             <a:ext cx="5852160" cy="502920"/>
           </a:xfrm>
           <a:prstGeom prst="rect">
@@ -3309,7 +3279,7 @@
                 <a:ea typeface="Calibri" pitchFamily="34" charset="-122"/>
                 <a:cs typeface="Calibri" pitchFamily="34" charset="-120"/>
               </a:rPr>
-              <a:t>Matinée : dernier jalon. La chaîne tourne de bout en bout.</a:t>
+              <a:t>argparse : options propres, aide automatique, échec explicite.</a:t>
             </a:r>
             <a:endParaRPr lang="en-US" sz="1300" dirty="0"/>
           </a:p>
@@ -3317,27 +3287,27 @@
       </p:sp>
       <p:sp>
         <p:nvSpPr>
-          <p:cNvPr id="16" name="Shape 11"/>
-          <p:cNvSpPr/>
-          <p:nvPr/>
-        </p:nvSpPr>
-        <p:spPr>
-          <a:xfrm>
-            <a:off x="640080" y="4855464"/>
+          <p:cNvPr id="13" name="Shape 8"/>
+          <p:cNvSpPr/>
+          <p:nvPr/>
+        </p:nvSpPr>
+        <p:spPr>
+          <a:xfrm>
+            <a:off x="640080" y="3831336"/>
             <a:ext cx="566928" cy="566928"/>
           </a:xfrm>
           <a:prstGeom prst="ellipse">
             <a:avLst/>
           </a:prstGeom>
           <a:solidFill>
-            <a:srgbClr val="14563C"/>
+            <a:srgbClr val="C79100"/>
           </a:solidFill>
           <a:ln/>
         </p:spPr>
       </p:sp>
       <p:pic>
         <p:nvPicPr>
-          <p:cNvPr id="17" name="Image 3" descr="icons/comments.png">    </p:cNvPr>
+          <p:cNvPr id="14" name="Image 3" descr="icons/flag.png">    </p:cNvPr>
           <p:cNvPicPr>
             <a:picLocks noChangeAspect="1"/>
           </p:cNvPicPr>
@@ -3351,7 +3321,7 @@
         </p:blipFill>
         <p:spPr>
           <a:xfrm>
-            <a:off x="787481" y="5002865"/>
+            <a:off x="787481" y="3978737"/>
             <a:ext cx="272125" cy="272125"/>
           </a:xfrm>
           <a:prstGeom prst="rect">
@@ -3361,13 +3331,13 @@
       </p:pic>
       <p:sp>
         <p:nvSpPr>
-          <p:cNvPr id="18" name="Text 12"/>
-          <p:cNvSpPr/>
-          <p:nvPr/>
-        </p:nvSpPr>
-        <p:spPr>
-          <a:xfrm>
-            <a:off x="1417320" y="4800600"/>
+          <p:cNvPr id="15" name="Text 9"/>
+          <p:cNvSpPr/>
+          <p:nvPr/>
+        </p:nvSpPr>
+        <p:spPr>
+          <a:xfrm>
+            <a:off x="1417320" y="3776472"/>
             <a:ext cx="5852160" cy="365760"/>
           </a:xfrm>
           <a:prstGeom prst="rect">
@@ -3392,7 +3362,7 @@
                 <a:ea typeface="Calibri" pitchFamily="34" charset="-122"/>
                 <a:cs typeface="Calibri" pitchFamily="34" charset="-120"/>
               </a:rPr>
-              <a:t>Soutenir</a:t>
+              <a:t>Finir le projet</a:t>
             </a:r>
             <a:endParaRPr lang="en-US" sz="1650" dirty="0"/>
           </a:p>
@@ -3400,13 +3370,13 @@
       </p:sp>
       <p:sp>
         <p:nvSpPr>
-          <p:cNvPr id="19" name="Text 13"/>
-          <p:cNvSpPr/>
-          <p:nvPr/>
-        </p:nvSpPr>
-        <p:spPr>
-          <a:xfrm>
-            <a:off x="1417320" y="5129784"/>
+          <p:cNvPr id="16" name="Text 10"/>
+          <p:cNvSpPr/>
+          <p:nvPr/>
+        </p:nvSpPr>
+        <p:spPr>
+          <a:xfrm>
+            <a:off x="1417320" y="4105656"/>
             <a:ext cx="5852160" cy="502920"/>
           </a:xfrm>
           <a:prstGeom prst="rect">
@@ -3431,6 +3401,128 @@
                 <a:ea typeface="Calibri" pitchFamily="34" charset="-122"/>
                 <a:cs typeface="Calibri" pitchFamily="34" charset="-120"/>
               </a:rPr>
+              <a:t>Matinée : dernier jalon. La chaîne tourne de bout en bout.</a:t>
+            </a:r>
+            <a:endParaRPr lang="en-US" sz="1300" dirty="0"/>
+          </a:p>
+        </p:txBody>
+      </p:sp>
+      <p:sp>
+        <p:nvSpPr>
+          <p:cNvPr id="17" name="Shape 11"/>
+          <p:cNvSpPr/>
+          <p:nvPr/>
+        </p:nvSpPr>
+        <p:spPr>
+          <a:xfrm>
+            <a:off x="640080" y="4855464"/>
+            <a:ext cx="566928" cy="566928"/>
+          </a:xfrm>
+          <a:prstGeom prst="ellipse">
+            <a:avLst/>
+          </a:prstGeom>
+          <a:solidFill>
+            <a:srgbClr val="0E7A3D"/>
+          </a:solidFill>
+          <a:ln/>
+        </p:spPr>
+      </p:sp>
+      <p:pic>
+        <p:nvPicPr>
+          <p:cNvPr id="18" name="Image 4" descr="icons/comments.png">    </p:cNvPr>
+          <p:cNvPicPr>
+            <a:picLocks noChangeAspect="1"/>
+          </p:cNvPicPr>
+          <p:nvPr/>
+        </p:nvPicPr>
+        <p:blipFill>
+          <a:blip r:embed="rId5"/>
+          <a:stretch>
+            <a:fillRect/>
+          </a:stretch>
+        </p:blipFill>
+        <p:spPr>
+          <a:xfrm>
+            <a:off x="787481" y="5002865"/>
+            <a:ext cx="272125" cy="272125"/>
+          </a:xfrm>
+          <a:prstGeom prst="rect">
+            <a:avLst/>
+          </a:prstGeom>
+        </p:spPr>
+      </p:pic>
+      <p:sp>
+        <p:nvSpPr>
+          <p:cNvPr id="19" name="Text 12"/>
+          <p:cNvSpPr/>
+          <p:nvPr/>
+        </p:nvSpPr>
+        <p:spPr>
+          <a:xfrm>
+            <a:off x="1417320" y="4800600"/>
+            <a:ext cx="5852160" cy="365760"/>
+          </a:xfrm>
+          <a:prstGeom prst="rect">
+            <a:avLst/>
+          </a:prstGeom>
+          <a:noFill/>
+          <a:ln/>
+        </p:spPr>
+        <p:txBody>
+          <a:bodyPr wrap="square" lIns="0" tIns="0" rIns="0" bIns="0" rtlCol="0" anchor="ctr"/>
+          <a:lstStyle/>
+          <a:p>
+            <a:pPr indent="0" marL="0">
+              <a:buNone/>
+            </a:pPr>
+            <a:r>
+              <a:rPr lang="en-US" sz="1650" b="1" dirty="0">
+                <a:solidFill>
+                  <a:srgbClr val="1C2A24"/>
+                </a:solidFill>
+                <a:latin typeface="Calibri" pitchFamily="34" charset="0"/>
+                <a:ea typeface="Calibri" pitchFamily="34" charset="-122"/>
+                <a:cs typeface="Calibri" pitchFamily="34" charset="-120"/>
+              </a:rPr>
+              <a:t>Soutenir</a:t>
+            </a:r>
+            <a:endParaRPr lang="en-US" sz="1650" dirty="0"/>
+          </a:p>
+        </p:txBody>
+      </p:sp>
+      <p:sp>
+        <p:nvSpPr>
+          <p:cNvPr id="20" name="Text 13"/>
+          <p:cNvSpPr/>
+          <p:nvPr/>
+        </p:nvSpPr>
+        <p:spPr>
+          <a:xfrm>
+            <a:off x="1417320" y="5129784"/>
+            <a:ext cx="5852160" cy="502920"/>
+          </a:xfrm>
+          <a:prstGeom prst="rect">
+            <a:avLst/>
+          </a:prstGeom>
+          <a:noFill/>
+          <a:ln/>
+        </p:spPr>
+        <p:txBody>
+          <a:bodyPr wrap="square" lIns="0" tIns="0" rIns="0" bIns="0" rtlCol="0" anchor="ctr"/>
+          <a:lstStyle/>
+          <a:p>
+            <a:pPr indent="0" marL="0">
+              <a:buNone/>
+            </a:pPr>
+            <a:r>
+              <a:rPr lang="en-US" sz="1300" dirty="0">
+                <a:solidFill>
+                  <a:srgbClr val="5C6B63"/>
+                </a:solidFill>
+                <a:latin typeface="Calibri" pitchFamily="34" charset="0"/>
+                <a:ea typeface="Calibri" pitchFamily="34" charset="-122"/>
+                <a:cs typeface="Calibri" pitchFamily="34" charset="-120"/>
+              </a:rPr>
               <a:t>10 minutes de démonstration, 5 de questions — par groupe.</a:t>
             </a:r>
             <a:endParaRPr lang="en-US" sz="1300" dirty="0"/>
@@ -3439,7 +3531,7 @@
       </p:sp>
       <p:sp>
         <p:nvSpPr>
-          <p:cNvPr id="20" name="Shape 14"/>
+          <p:cNvPr id="21" name="Shape 14"/>
           <p:cNvSpPr/>
           <p:nvPr/>
         </p:nvSpPr>
@@ -3454,14 +3546,14 @@
             </a:avLst>
           </a:prstGeom>
           <a:solidFill>
-            <a:srgbClr val="0D3325"/>
+            <a:srgbClr val="0A2E1A"/>
           </a:solidFill>
           <a:ln/>
         </p:spPr>
       </p:sp>
       <p:sp>
         <p:nvSpPr>
-          <p:cNvPr id="21" name="Text 15"/>
+          <p:cNvPr id="22" name="Text 15"/>
           <p:cNvSpPr/>
           <p:nvPr/>
         </p:nvSpPr>
@@ -3486,7 +3578,7 @@
             <a:r>
               <a:rPr lang="en-US" sz="1150" b="1" spc="200" kern="0" dirty="0">
                 <a:solidFill>
-                  <a:srgbClr val="C9A227"/>
+                  <a:srgbClr val="C79100"/>
                 </a:solidFill>
                 <a:latin typeface="Calibri" pitchFamily="34" charset="0"/>
                 <a:ea typeface="Calibri" pitchFamily="34" charset="-122"/>
@@ -3500,7 +3592,7 @@
       </p:sp>
       <p:sp>
         <p:nvSpPr>
-          <p:cNvPr id="22" name="Shape 16"/>
+          <p:cNvPr id="23" name="Shape 16"/>
           <p:cNvSpPr/>
           <p:nvPr/>
         </p:nvSpPr>
@@ -3513,14 +3605,14 @@
             <a:avLst/>
           </a:prstGeom>
           <a:solidFill>
-            <a:srgbClr val="14563C"/>
+            <a:srgbClr val="0E7A3D"/>
           </a:solidFill>
           <a:ln/>
         </p:spPr>
       </p:sp>
       <p:sp>
         <p:nvSpPr>
-          <p:cNvPr id="23" name="Text 17"/>
+          <p:cNvPr id="24" name="Text 17"/>
           <p:cNvSpPr/>
           <p:nvPr/>
         </p:nvSpPr>
@@ -3559,7 +3651,7 @@
       </p:sp>
       <p:sp>
         <p:nvSpPr>
-          <p:cNvPr id="24" name="Text 18"/>
+          <p:cNvPr id="25" name="Text 18"/>
           <p:cNvSpPr/>
           <p:nvPr/>
         </p:nvSpPr>
@@ -3598,7 +3690,7 @@
       </p:sp>
       <p:sp>
         <p:nvSpPr>
-          <p:cNvPr id="25" name="Shape 19"/>
+          <p:cNvPr id="26" name="Shape 19"/>
           <p:cNvSpPr/>
           <p:nvPr/>
         </p:nvSpPr>
@@ -3611,14 +3703,14 @@
             <a:avLst/>
           </a:prstGeom>
           <a:solidFill>
-            <a:srgbClr val="14563C"/>
+            <a:srgbClr val="0E7A3D"/>
           </a:solidFill>
           <a:ln/>
         </p:spPr>
       </p:sp>
       <p:sp>
         <p:nvSpPr>
-          <p:cNvPr id="26" name="Text 20"/>
+          <p:cNvPr id="27" name="Text 20"/>
           <p:cNvSpPr/>
           <p:nvPr/>
         </p:nvSpPr>
@@ -3657,7 +3749,7 @@
       </p:sp>
       <p:sp>
         <p:nvSpPr>
-          <p:cNvPr id="27" name="Text 21"/>
+          <p:cNvPr id="28" name="Text 21"/>
           <p:cNvSpPr/>
           <p:nvPr/>
         </p:nvSpPr>
@@ -3696,7 +3788,7 @@
       </p:sp>
       <p:sp>
         <p:nvSpPr>
-          <p:cNvPr id="28" name="Shape 22"/>
+          <p:cNvPr id="29" name="Shape 22"/>
           <p:cNvSpPr/>
           <p:nvPr/>
         </p:nvSpPr>
@@ -3709,14 +3801,14 @@
             <a:avLst/>
           </a:prstGeom>
           <a:solidFill>
-            <a:srgbClr val="14563C"/>
+            <a:srgbClr val="0E7A3D"/>
           </a:solidFill>
           <a:ln/>
         </p:spPr>
       </p:sp>
       <p:sp>
         <p:nvSpPr>
-          <p:cNvPr id="29" name="Text 23"/>
+          <p:cNvPr id="30" name="Text 23"/>
           <p:cNvSpPr/>
           <p:nvPr/>
         </p:nvSpPr>
@@ -3755,7 +3847,7 @@
       </p:sp>
       <p:sp>
         <p:nvSpPr>
-          <p:cNvPr id="30" name="Text 24"/>
+          <p:cNvPr id="31" name="Text 24"/>
           <p:cNvSpPr/>
           <p:nvPr/>
         </p:nvSpPr>
@@ -3794,7 +3886,7 @@
       </p:sp>
       <p:sp>
         <p:nvSpPr>
-          <p:cNvPr id="31" name="Shape 25"/>
+          <p:cNvPr id="32" name="Shape 25"/>
           <p:cNvSpPr/>
           <p:nvPr/>
         </p:nvSpPr>
@@ -3807,14 +3899,14 @@
             <a:avLst/>
           </a:prstGeom>
           <a:solidFill>
-            <a:srgbClr val="14563C"/>
+            <a:srgbClr val="0E7A3D"/>
           </a:solidFill>
           <a:ln/>
         </p:spPr>
       </p:sp>
       <p:sp>
         <p:nvSpPr>
-          <p:cNvPr id="32" name="Text 26"/>
+          <p:cNvPr id="33" name="Text 26"/>
           <p:cNvSpPr/>
           <p:nvPr/>
         </p:nvSpPr>
@@ -3853,7 +3945,7 @@
       </p:sp>
       <p:sp>
         <p:nvSpPr>
-          <p:cNvPr id="33" name="Text 27"/>
+          <p:cNvPr id="34" name="Text 27"/>
           <p:cNvSpPr/>
           <p:nvPr/>
         </p:nvSpPr>
@@ -3892,7 +3984,7 @@
       </p:sp>
       <p:sp>
         <p:nvSpPr>
-          <p:cNvPr id="34" name="Shape 28"/>
+          <p:cNvPr id="35" name="Shape 28"/>
           <p:cNvSpPr/>
           <p:nvPr/>
         </p:nvSpPr>
@@ -3905,14 +3997,14 @@
             <a:avLst/>
           </a:prstGeom>
           <a:solidFill>
-            <a:srgbClr val="C9A227"/>
+            <a:srgbClr val="C79100"/>
           </a:solidFill>
           <a:ln/>
         </p:spPr>
       </p:sp>
       <p:sp>
         <p:nvSpPr>
-          <p:cNvPr id="35" name="Text 29"/>
+          <p:cNvPr id="36" name="Text 29"/>
           <p:cNvSpPr/>
           <p:nvPr/>
         </p:nvSpPr>
@@ -3937,7 +4029,7 @@
             <a:r>
               <a:rPr lang="en-US" sz="1250" b="1" dirty="0">
                 <a:solidFill>
-                  <a:srgbClr val="0D3325"/>
+                  <a:srgbClr val="0A2E1A"/>
                 </a:solidFill>
                 <a:latin typeface="Calibri" pitchFamily="34" charset="0"/>
                 <a:ea typeface="Calibri" pitchFamily="34" charset="-122"/>
@@ -3951,7 +4043,7 @@
       </p:sp>
       <p:sp>
         <p:nvSpPr>
-          <p:cNvPr id="36" name="Text 30"/>
+          <p:cNvPr id="37" name="Text 30"/>
           <p:cNvSpPr/>
           <p:nvPr/>
         </p:nvSpPr>
@@ -3990,7 +4082,7 @@
       </p:sp>
       <p:sp>
         <p:nvSpPr>
-          <p:cNvPr id="37" name="Text 31"/>
+          <p:cNvPr id="38" name="Text 31"/>
           <p:cNvSpPr/>
           <p:nvPr/>
         </p:nvSpPr>
@@ -4015,7 +4107,7 @@
             <a:r>
               <a:rPr lang="en-US" sz="1050" i="1" dirty="0">
                 <a:solidFill>
-                  <a:srgbClr val="E8D48A"/>
+                  <a:srgbClr val="FCD116"/>
                 </a:solidFill>
                 <a:latin typeface="Calibri" pitchFamily="34" charset="0"/>
                 <a:ea typeface="Calibri" pitchFamily="34" charset="-122"/>
@@ -4068,7 +4160,7 @@
         <p:spPr>
           <a:xfrm>
             <a:off x="548640" y="384048"/>
-            <a:ext cx="10972800" cy="320040"/>
+            <a:ext cx="9601200" cy="320040"/>
           </a:xfrm>
           <a:prstGeom prst="rect">
             <a:avLst/>
@@ -4086,7 +4178,7 @@
             <a:r>
               <a:rPr lang="en-US" sz="1300" b="1" spc="200" kern="0" dirty="0">
                 <a:solidFill>
-                  <a:srgbClr val="C9A227"/>
+                  <a:srgbClr val="C79100"/>
                 </a:solidFill>
                 <a:latin typeface="Calibri" pitchFamily="34" charset="0"/>
                 <a:ea typeface="Calibri" pitchFamily="34" charset="-122"/>
@@ -4107,7 +4199,7 @@
         <p:spPr>
           <a:xfrm>
             <a:off x="548640" y="658368"/>
-            <a:ext cx="11064240" cy="731520"/>
+            <a:ext cx="9966960" cy="731520"/>
           </a:xfrm>
           <a:prstGeom prst="rect">
             <a:avLst/>
@@ -4125,7 +4217,7 @@
             <a:r>
               <a:rPr lang="en-US" sz="3400" b="1" dirty="0">
                 <a:solidFill>
-                  <a:srgbClr val="14563C"/>
+                  <a:srgbClr val="0E7A3D"/>
                 </a:solidFill>
                 <a:latin typeface="Cambria" pitchFamily="34" charset="0"/>
                 <a:ea typeface="Cambria" pitchFamily="34" charset="-122"/>
@@ -4137,51 +4229,9 @@
           </a:p>
         </p:txBody>
       </p:sp>
-      <p:sp>
-        <p:nvSpPr>
-          <p:cNvPr id="4" name="Shape 2"/>
-          <p:cNvSpPr/>
-          <p:nvPr/>
-        </p:nvSpPr>
-        <p:spPr>
-          <a:xfrm>
-            <a:off x="640080" y="1920240"/>
-            <a:ext cx="2468880" cy="2651760"/>
-          </a:xfrm>
-          <a:prstGeom prst="roundRect">
-            <a:avLst>
-              <a:gd name="adj" fmla="val 3704"/>
-            </a:avLst>
-          </a:prstGeom>
-          <a:solidFill>
-            <a:srgbClr val="EEF4F0"/>
-          </a:solidFill>
-          <a:ln/>
-        </p:spPr>
-      </p:sp>
-      <p:sp>
-        <p:nvSpPr>
-          <p:cNvPr id="5" name="Shape 3"/>
-          <p:cNvSpPr/>
-          <p:nvPr/>
-        </p:nvSpPr>
-        <p:spPr>
-          <a:xfrm>
-            <a:off x="877824" y="2157984"/>
-            <a:ext cx="493776" cy="493776"/>
-          </a:xfrm>
-          <a:prstGeom prst="ellipse">
-            <a:avLst/>
-          </a:prstGeom>
-          <a:solidFill>
-            <a:srgbClr val="14563C"/>
-          </a:solidFill>
-          <a:ln/>
-        </p:spPr>
-      </p:sp>
       <p:pic>
         <p:nvPicPr>
-          <p:cNvPr id="6" name="Image 0" descr="icons/folder.png">    </p:cNvPr>
+          <p:cNvPr id="4" name="Image 0" descr="logo-dgi.png">    </p:cNvPr>
           <p:cNvPicPr>
             <a:picLocks noChangeAspect="1"/>
           </p:cNvPicPr>
@@ -4195,8 +4245,8 @@
         </p:blipFill>
         <p:spPr>
           <a:xfrm>
-            <a:off x="1006206" y="2286366"/>
-            <a:ext cx="237012" cy="237012"/>
+            <a:off x="10744200" y="384048"/>
+            <a:ext cx="1051560" cy="795528"/>
           </a:xfrm>
           <a:prstGeom prst="rect">
             <a:avLst/>
@@ -4205,134 +4255,13 @@
       </p:pic>
       <p:sp>
         <p:nvSpPr>
-          <p:cNvPr id="7" name="Text 4"/>
-          <p:cNvSpPr/>
-          <p:nvPr/>
-        </p:nvSpPr>
-        <p:spPr>
-          <a:xfrm>
-            <a:off x="877824" y="2834640"/>
-            <a:ext cx="2011680" cy="365760"/>
-          </a:xfrm>
-          <a:prstGeom prst="rect">
-            <a:avLst/>
-          </a:prstGeom>
-          <a:noFill/>
-          <a:ln/>
-        </p:spPr>
-        <p:txBody>
-          <a:bodyPr wrap="square" lIns="0" tIns="0" rIns="0" bIns="0" rtlCol="0" anchor="ctr"/>
-          <a:lstStyle/>
-          <a:p>
-            <a:pPr indent="0" marL="0">
-              <a:buNone/>
-            </a:pPr>
-            <a:r>
-              <a:rPr lang="en-US" sz="1500" b="1" dirty="0">
-                <a:solidFill>
-                  <a:srgbClr val="14563C"/>
-                </a:solidFill>
-                <a:latin typeface="Calibri" pitchFamily="34" charset="0"/>
-                <a:ea typeface="Calibri" pitchFamily="34" charset="-122"/>
-                <a:cs typeface="Calibri" pitchFamily="34" charset="-120"/>
-              </a:rPr>
-              <a:t>1 · Lecture</a:t>
-            </a:r>
-            <a:endParaRPr lang="en-US" sz="1500" dirty="0"/>
-          </a:p>
-        </p:txBody>
-      </p:sp>
-      <p:sp>
-        <p:nvSpPr>
-          <p:cNvPr id="8" name="Text 5"/>
-          <p:cNvSpPr/>
-          <p:nvPr/>
-        </p:nvSpPr>
-        <p:spPr>
-          <a:xfrm>
-            <a:off x="877824" y="3218688"/>
-            <a:ext cx="2011680" cy="1188720"/>
-          </a:xfrm>
-          <a:prstGeom prst="rect">
-            <a:avLst/>
-          </a:prstGeom>
-          <a:noFill/>
-          <a:ln/>
-        </p:spPr>
-        <p:txBody>
-          <a:bodyPr wrap="square" lIns="0" tIns="0" rIns="0" bIns="0" rtlCol="0" anchor="t"/>
-          <a:lstStyle/>
-          <a:p>
-            <a:pPr indent="0" marL="0">
-              <a:lnSpc>
-                <a:spcPct val="110000"/>
-              </a:lnSpc>
-              <a:buNone/>
-            </a:pPr>
-            <a:r>
-              <a:rPr lang="en-US" sz="1200" b="1" dirty="0">
-                <a:solidFill>
-                  <a:srgbClr val="1C2A24"/>
-                </a:solidFill>
-                <a:latin typeface="Courier New" pitchFamily="34" charset="0"/>
-                <a:ea typeface="Courier New" pitchFamily="34" charset="-122"/>
-                <a:cs typeface="Courier New" pitchFamily="34" charset="-120"/>
-              </a:rPr>
-              <a:t>charger()</a:t>
-            </a:r>
-            <a:endParaRPr lang="en-US" sz="1200" dirty="0"/>
-          </a:p>
-          <a:p>
-            <a:pPr indent="0" marL="0">
-              <a:lnSpc>
-                <a:spcPct val="110000"/>
-              </a:lnSpc>
-              <a:buNone/>
-            </a:pPr>
-            <a:r>
-              <a:rPr lang="en-US" sz="1150" dirty="0">
-                <a:solidFill>
-                  <a:srgbClr val="5C6B63"/>
-                </a:solidFill>
-                <a:latin typeface="Calibri" pitchFamily="34" charset="0"/>
-                <a:ea typeface="Calibri" pitchFamily="34" charset="-122"/>
-                <a:cs typeface="Calibri" pitchFamily="34" charset="-120"/>
-              </a:rPr>
-              <a:t>les CSV, ou échouer avec un message clair</a:t>
-            </a:r>
-            <a:endParaRPr lang="en-US" sz="1200" dirty="0"/>
-          </a:p>
-        </p:txBody>
-      </p:sp>
-      <p:sp>
-        <p:nvSpPr>
-          <p:cNvPr id="9" name="Shape 6"/>
-          <p:cNvSpPr/>
-          <p:nvPr/>
-        </p:nvSpPr>
-        <p:spPr>
-          <a:xfrm>
-            <a:off x="3127248" y="3017520"/>
-            <a:ext cx="384048" cy="384048"/>
-          </a:xfrm>
-          <a:prstGeom prst="rightArrow">
-            <a:avLst/>
-          </a:prstGeom>
-          <a:solidFill>
-            <a:srgbClr val="C9A227"/>
-          </a:solidFill>
-          <a:ln/>
-        </p:spPr>
-      </p:sp>
-      <p:sp>
-        <p:nvSpPr>
-          <p:cNvPr id="10" name="Shape 7"/>
-          <p:cNvSpPr/>
-          <p:nvPr/>
-        </p:nvSpPr>
-        <p:spPr>
-          <a:xfrm>
-            <a:off x="3529584" y="1920240"/>
+          <p:cNvPr id="5" name="Shape 2"/>
+          <p:cNvSpPr/>
+          <p:nvPr/>
+        </p:nvSpPr>
+        <p:spPr>
+          <a:xfrm>
+            <a:off x="640080" y="1920240"/>
             <a:ext cx="2468880" cy="2651760"/>
           </a:xfrm>
           <a:prstGeom prst="roundRect">
@@ -4341,34 +4270,34 @@
             </a:avLst>
           </a:prstGeom>
           <a:solidFill>
-            <a:srgbClr val="EEF4F0"/>
+            <a:srgbClr val="EEF5EF"/>
           </a:solidFill>
           <a:ln/>
         </p:spPr>
       </p:sp>
       <p:sp>
         <p:nvSpPr>
-          <p:cNvPr id="11" name="Shape 8"/>
-          <p:cNvSpPr/>
-          <p:nvPr/>
-        </p:nvSpPr>
-        <p:spPr>
-          <a:xfrm>
-            <a:off x="3767328" y="2157984"/>
+          <p:cNvPr id="6" name="Shape 3"/>
+          <p:cNvSpPr/>
+          <p:nvPr/>
+        </p:nvSpPr>
+        <p:spPr>
+          <a:xfrm>
+            <a:off x="877824" y="2157984"/>
             <a:ext cx="493776" cy="493776"/>
           </a:xfrm>
           <a:prstGeom prst="ellipse">
             <a:avLst/>
           </a:prstGeom>
           <a:solidFill>
-            <a:srgbClr val="1E7A50"/>
+            <a:srgbClr val="0E7A3D"/>
           </a:solidFill>
           <a:ln/>
         </p:spPr>
       </p:sp>
       <p:pic>
         <p:nvPicPr>
-          <p:cNvPr id="12" name="Image 1" descr="icons/shield.png">    </p:cNvPr>
+          <p:cNvPr id="7" name="Image 1" descr="icons/folder.png">    </p:cNvPr>
           <p:cNvPicPr>
             <a:picLocks noChangeAspect="1"/>
           </p:cNvPicPr>
@@ -4382,7 +4311,7 @@
         </p:blipFill>
         <p:spPr>
           <a:xfrm>
-            <a:off x="3895710" y="2286366"/>
+            <a:off x="1006206" y="2286366"/>
             <a:ext cx="237012" cy="237012"/>
           </a:xfrm>
           <a:prstGeom prst="rect">
@@ -4392,13 +4321,13 @@
       </p:pic>
       <p:sp>
         <p:nvSpPr>
-          <p:cNvPr id="13" name="Text 9"/>
-          <p:cNvSpPr/>
-          <p:nvPr/>
-        </p:nvSpPr>
-        <p:spPr>
-          <a:xfrm>
-            <a:off x="3767328" y="2834640"/>
+          <p:cNvPr id="8" name="Text 4"/>
+          <p:cNvSpPr/>
+          <p:nvPr/>
+        </p:nvSpPr>
+        <p:spPr>
+          <a:xfrm>
+            <a:off x="877824" y="2834640"/>
             <a:ext cx="2011680" cy="365760"/>
           </a:xfrm>
           <a:prstGeom prst="rect">
@@ -4417,13 +4346,13 @@
             <a:r>
               <a:rPr lang="en-US" sz="1500" b="1" dirty="0">
                 <a:solidFill>
-                  <a:srgbClr val="14563C"/>
+                  <a:srgbClr val="0E7A3D"/>
                 </a:solidFill>
                 <a:latin typeface="Calibri" pitchFamily="34" charset="0"/>
                 <a:ea typeface="Calibri" pitchFamily="34" charset="-122"/>
                 <a:cs typeface="Calibri" pitchFamily="34" charset="-120"/>
               </a:rPr>
-              <a:t>2 · Validation</a:t>
+              <a:t>1 · Lecture</a:t>
             </a:r>
             <a:endParaRPr lang="en-US" sz="1500" dirty="0"/>
           </a:p>
@@ -4431,13 +4360,13 @@
       </p:sp>
       <p:sp>
         <p:nvSpPr>
-          <p:cNvPr id="14" name="Text 10"/>
-          <p:cNvSpPr/>
-          <p:nvPr/>
-        </p:nvSpPr>
-        <p:spPr>
-          <a:xfrm>
-            <a:off x="3767328" y="3218688"/>
+          <p:cNvPr id="9" name="Text 5"/>
+          <p:cNvSpPr/>
+          <p:nvPr/>
+        </p:nvSpPr>
+        <p:spPr>
+          <a:xfrm>
+            <a:off x="877824" y="3218688"/>
             <a:ext cx="2011680" cy="1188720"/>
           </a:xfrm>
           <a:prstGeom prst="rect">
@@ -4465,7 +4394,7 @@
                 <a:ea typeface="Courier New" pitchFamily="34" charset="-122"/>
                 <a:cs typeface="Courier New" pitchFamily="34" charset="-120"/>
               </a:rPr>
-              <a:t>valider()</a:t>
+              <a:t>charger()</a:t>
             </a:r>
             <a:endParaRPr lang="en-US" sz="1200" dirty="0"/>
           </a:p>
@@ -4485,7 +4414,7 @@
                 <a:ea typeface="Calibri" pitchFamily="34" charset="-122"/>
                 <a:cs typeface="Calibri" pitchFamily="34" charset="-120"/>
               </a:rPr>
-              <a:t>écarter l’invalide en le comptant</a:t>
+              <a:t>les CSV, ou échouer avec un message clair</a:t>
             </a:r>
             <a:endParaRPr lang="en-US" sz="1200" dirty="0"/>
           </a:p>
@@ -4493,33 +4422,33 @@
       </p:sp>
       <p:sp>
         <p:nvSpPr>
-          <p:cNvPr id="15" name="Shape 11"/>
-          <p:cNvSpPr/>
-          <p:nvPr/>
-        </p:nvSpPr>
-        <p:spPr>
-          <a:xfrm>
-            <a:off x="6016752" y="3017520"/>
+          <p:cNvPr id="10" name="Shape 6"/>
+          <p:cNvSpPr/>
+          <p:nvPr/>
+        </p:nvSpPr>
+        <p:spPr>
+          <a:xfrm>
+            <a:off x="3127248" y="3017520"/>
             <a:ext cx="384048" cy="384048"/>
           </a:xfrm>
           <a:prstGeom prst="rightArrow">
             <a:avLst/>
           </a:prstGeom>
           <a:solidFill>
-            <a:srgbClr val="C9A227"/>
+            <a:srgbClr val="C79100"/>
           </a:solidFill>
           <a:ln/>
         </p:spPr>
       </p:sp>
       <p:sp>
         <p:nvSpPr>
-          <p:cNvPr id="16" name="Shape 12"/>
-          <p:cNvSpPr/>
-          <p:nvPr/>
-        </p:nvSpPr>
-        <p:spPr>
-          <a:xfrm>
-            <a:off x="6419088" y="1920240"/>
+          <p:cNvPr id="11" name="Shape 7"/>
+          <p:cNvSpPr/>
+          <p:nvPr/>
+        </p:nvSpPr>
+        <p:spPr>
+          <a:xfrm>
+            <a:off x="3529584" y="1920240"/>
             <a:ext cx="2468880" cy="2651760"/>
           </a:xfrm>
           <a:prstGeom prst="roundRect">
@@ -4528,34 +4457,34 @@
             </a:avLst>
           </a:prstGeom>
           <a:solidFill>
-            <a:srgbClr val="EEF4F0"/>
+            <a:srgbClr val="EEF5EF"/>
           </a:solidFill>
           <a:ln/>
         </p:spPr>
       </p:sp>
       <p:sp>
         <p:nvSpPr>
-          <p:cNvPr id="17" name="Shape 13"/>
-          <p:cNvSpPr/>
-          <p:nvPr/>
-        </p:nvSpPr>
-        <p:spPr>
-          <a:xfrm>
-            <a:off x="6656832" y="2157984"/>
+          <p:cNvPr id="12" name="Shape 8"/>
+          <p:cNvSpPr/>
+          <p:nvPr/>
+        </p:nvSpPr>
+        <p:spPr>
+          <a:xfrm>
+            <a:off x="3767328" y="2157984"/>
             <a:ext cx="493776" cy="493776"/>
           </a:xfrm>
           <a:prstGeom prst="ellipse">
             <a:avLst/>
           </a:prstGeom>
           <a:solidFill>
-            <a:srgbClr val="C9A227"/>
+            <a:srgbClr val="2E9E4F"/>
           </a:solidFill>
           <a:ln/>
         </p:spPr>
       </p:sp>
       <p:pic>
         <p:nvPicPr>
-          <p:cNvPr id="18" name="Image 2" descr="icons/cogs.png">    </p:cNvPr>
+          <p:cNvPr id="13" name="Image 2" descr="icons/shield.png">    </p:cNvPr>
           <p:cNvPicPr>
             <a:picLocks noChangeAspect="1"/>
           </p:cNvPicPr>
@@ -4569,7 +4498,7 @@
         </p:blipFill>
         <p:spPr>
           <a:xfrm>
-            <a:off x="6785214" y="2286366"/>
+            <a:off x="3895710" y="2286366"/>
             <a:ext cx="237012" cy="237012"/>
           </a:xfrm>
           <a:prstGeom prst="rect">
@@ -4579,13 +4508,13 @@
       </p:pic>
       <p:sp>
         <p:nvSpPr>
-          <p:cNvPr id="19" name="Text 14"/>
-          <p:cNvSpPr/>
-          <p:nvPr/>
-        </p:nvSpPr>
-        <p:spPr>
-          <a:xfrm>
-            <a:off x="6656832" y="2834640"/>
+          <p:cNvPr id="14" name="Text 9"/>
+          <p:cNvSpPr/>
+          <p:nvPr/>
+        </p:nvSpPr>
+        <p:spPr>
+          <a:xfrm>
+            <a:off x="3767328" y="2834640"/>
             <a:ext cx="2011680" cy="365760"/>
           </a:xfrm>
           <a:prstGeom prst="rect">
@@ -4604,13 +4533,13 @@
             <a:r>
               <a:rPr lang="en-US" sz="1500" b="1" dirty="0">
                 <a:solidFill>
-                  <a:srgbClr val="14563C"/>
+                  <a:srgbClr val="0E7A3D"/>
                 </a:solidFill>
                 <a:latin typeface="Calibri" pitchFamily="34" charset="0"/>
                 <a:ea typeface="Calibri" pitchFamily="34" charset="-122"/>
                 <a:cs typeface="Calibri" pitchFamily="34" charset="-120"/>
               </a:rPr>
-              <a:t>3 · Traitement</a:t>
+              <a:t>2 · Validation</a:t>
             </a:r>
             <a:endParaRPr lang="en-US" sz="1500" dirty="0"/>
           </a:p>
@@ -4618,13 +4547,13 @@
       </p:sp>
       <p:sp>
         <p:nvSpPr>
-          <p:cNvPr id="20" name="Text 15"/>
-          <p:cNvSpPr/>
-          <p:nvPr/>
-        </p:nvSpPr>
-        <p:spPr>
-          <a:xfrm>
-            <a:off x="6656832" y="3218688"/>
+          <p:cNvPr id="15" name="Text 10"/>
+          <p:cNvSpPr/>
+          <p:nvPr/>
+        </p:nvSpPr>
+        <p:spPr>
+          <a:xfrm>
+            <a:off x="3767328" y="3218688"/>
             <a:ext cx="2011680" cy="1188720"/>
           </a:xfrm>
           <a:prstGeom prst="rect">
@@ -4652,7 +4581,7 @@
                 <a:ea typeface="Courier New" pitchFamily="34" charset="-122"/>
                 <a:cs typeface="Courier New" pitchFamily="34" charset="-120"/>
               </a:rPr>
-              <a:t>construire()</a:t>
+              <a:t>valider()</a:t>
             </a:r>
             <a:endParaRPr lang="en-US" sz="1200" dirty="0"/>
           </a:p>
@@ -4672,7 +4601,7 @@
                 <a:ea typeface="Calibri" pitchFamily="34" charset="-122"/>
                 <a:cs typeface="Calibri" pitchFamily="34" charset="-120"/>
               </a:rPr>
-              <a:t>nettoyer, calculer, joindre</a:t>
+              <a:t>écarter l’invalide en le comptant</a:t>
             </a:r>
             <a:endParaRPr lang="en-US" sz="1200" dirty="0"/>
           </a:p>
@@ -4680,33 +4609,33 @@
       </p:sp>
       <p:sp>
         <p:nvSpPr>
-          <p:cNvPr id="21" name="Shape 16"/>
-          <p:cNvSpPr/>
-          <p:nvPr/>
-        </p:nvSpPr>
-        <p:spPr>
-          <a:xfrm>
-            <a:off x="8906256" y="3017520"/>
+          <p:cNvPr id="16" name="Shape 11"/>
+          <p:cNvSpPr/>
+          <p:nvPr/>
+        </p:nvSpPr>
+        <p:spPr>
+          <a:xfrm>
+            <a:off x="6016752" y="3017520"/>
             <a:ext cx="384048" cy="384048"/>
           </a:xfrm>
           <a:prstGeom prst="rightArrow">
             <a:avLst/>
           </a:prstGeom>
           <a:solidFill>
-            <a:srgbClr val="C9A227"/>
+            <a:srgbClr val="C79100"/>
           </a:solidFill>
           <a:ln/>
         </p:spPr>
       </p:sp>
       <p:sp>
         <p:nvSpPr>
-          <p:cNvPr id="22" name="Shape 17"/>
-          <p:cNvSpPr/>
-          <p:nvPr/>
-        </p:nvSpPr>
-        <p:spPr>
-          <a:xfrm>
-            <a:off x="9308592" y="1920240"/>
+          <p:cNvPr id="17" name="Shape 12"/>
+          <p:cNvSpPr/>
+          <p:nvPr/>
+        </p:nvSpPr>
+        <p:spPr>
+          <a:xfrm>
+            <a:off x="6419088" y="1920240"/>
             <a:ext cx="2468880" cy="2651760"/>
           </a:xfrm>
           <a:prstGeom prst="roundRect">
@@ -4715,34 +4644,34 @@
             </a:avLst>
           </a:prstGeom>
           <a:solidFill>
-            <a:srgbClr val="EEF4F0"/>
+            <a:srgbClr val="EEF5EF"/>
           </a:solidFill>
           <a:ln/>
         </p:spPr>
       </p:sp>
       <p:sp>
         <p:nvSpPr>
-          <p:cNvPr id="23" name="Shape 18"/>
-          <p:cNvSpPr/>
-          <p:nvPr/>
-        </p:nvSpPr>
-        <p:spPr>
-          <a:xfrm>
-            <a:off x="9546336" y="2157984"/>
+          <p:cNvPr id="18" name="Shape 13"/>
+          <p:cNvSpPr/>
+          <p:nvPr/>
+        </p:nvSpPr>
+        <p:spPr>
+          <a:xfrm>
+            <a:off x="6656832" y="2157984"/>
             <a:ext cx="493776" cy="493776"/>
           </a:xfrm>
           <a:prstGeom prst="ellipse">
             <a:avLst/>
           </a:prstGeom>
           <a:solidFill>
-            <a:srgbClr val="0D3325"/>
+            <a:srgbClr val="C79100"/>
           </a:solidFill>
           <a:ln/>
         </p:spPr>
       </p:sp>
       <p:pic>
         <p:nvPicPr>
-          <p:cNvPr id="24" name="Image 3" descr="icons/chart.png">    </p:cNvPr>
+          <p:cNvPr id="19" name="Image 3" descr="icons/cogs.png">    </p:cNvPr>
           <p:cNvPicPr>
             <a:picLocks noChangeAspect="1"/>
           </p:cNvPicPr>
@@ -4756,7 +4685,7 @@
         </p:blipFill>
         <p:spPr>
           <a:xfrm>
-            <a:off x="9674718" y="2286366"/>
+            <a:off x="6785214" y="2286366"/>
             <a:ext cx="237012" cy="237012"/>
           </a:xfrm>
           <a:prstGeom prst="rect">
@@ -4766,13 +4695,13 @@
       </p:pic>
       <p:sp>
         <p:nvSpPr>
-          <p:cNvPr id="25" name="Text 19"/>
-          <p:cNvSpPr/>
-          <p:nvPr/>
-        </p:nvSpPr>
-        <p:spPr>
-          <a:xfrm>
-            <a:off x="9546336" y="2834640"/>
+          <p:cNvPr id="20" name="Text 14"/>
+          <p:cNvSpPr/>
+          <p:nvPr/>
+        </p:nvSpPr>
+        <p:spPr>
+          <a:xfrm>
+            <a:off x="6656832" y="2834640"/>
             <a:ext cx="2011680" cy="365760"/>
           </a:xfrm>
           <a:prstGeom prst="rect">
@@ -4791,13 +4720,13 @@
             <a:r>
               <a:rPr lang="en-US" sz="1500" b="1" dirty="0">
                 <a:solidFill>
-                  <a:srgbClr val="14563C"/>
+                  <a:srgbClr val="0E7A3D"/>
                 </a:solidFill>
                 <a:latin typeface="Calibri" pitchFamily="34" charset="0"/>
                 <a:ea typeface="Calibri" pitchFamily="34" charset="-122"/>
                 <a:cs typeface="Calibri" pitchFamily="34" charset="-120"/>
               </a:rPr>
-              <a:t>4 · Restitution</a:t>
+              <a:t>3 · Traitement</a:t>
             </a:r>
             <a:endParaRPr lang="en-US" sz="1500" dirty="0"/>
           </a:p>
@@ -4805,13 +4734,13 @@
       </p:sp>
       <p:sp>
         <p:nvSpPr>
-          <p:cNvPr id="26" name="Text 20"/>
-          <p:cNvSpPr/>
-          <p:nvPr/>
-        </p:nvSpPr>
-        <p:spPr>
-          <a:xfrm>
-            <a:off x="9546336" y="3218688"/>
+          <p:cNvPr id="21" name="Text 15"/>
+          <p:cNvSpPr/>
+          <p:nvPr/>
+        </p:nvSpPr>
+        <p:spPr>
+          <a:xfrm>
+            <a:off x="6656832" y="3218688"/>
             <a:ext cx="2011680" cy="1188720"/>
           </a:xfrm>
           <a:prstGeom prst="rect">
@@ -4839,7 +4768,7 @@
                 <a:ea typeface="Courier New" pitchFamily="34" charset="-122"/>
                 <a:cs typeface="Courier New" pitchFamily="34" charset="-120"/>
               </a:rPr>
-              <a:t>rapport()</a:t>
+              <a:t>construire()</a:t>
             </a:r>
             <a:endParaRPr lang="en-US" sz="1200" dirty="0"/>
           </a:p>
@@ -4859,7 +4788,7 @@
                 <a:ea typeface="Calibri" pitchFamily="34" charset="-122"/>
                 <a:cs typeface="Calibri" pitchFamily="34" charset="-120"/>
               </a:rPr>
-              <a:t>afficher l’essentiel, exporter</a:t>
+              <a:t>nettoyer, calculer, joindre</a:t>
             </a:r>
             <a:endParaRPr lang="en-US" sz="1200" dirty="0"/>
           </a:p>
@@ -4867,14 +4796,100 @@
       </p:sp>
       <p:sp>
         <p:nvSpPr>
-          <p:cNvPr id="27" name="Text 21"/>
-          <p:cNvSpPr/>
-          <p:nvPr/>
-        </p:nvSpPr>
-        <p:spPr>
-          <a:xfrm>
-            <a:off x="640080" y="4983480"/>
-            <a:ext cx="11155680" cy="548640"/>
+          <p:cNvPr id="22" name="Shape 16"/>
+          <p:cNvSpPr/>
+          <p:nvPr/>
+        </p:nvSpPr>
+        <p:spPr>
+          <a:xfrm>
+            <a:off x="8906256" y="3017520"/>
+            <a:ext cx="384048" cy="384048"/>
+          </a:xfrm>
+          <a:prstGeom prst="rightArrow">
+            <a:avLst/>
+          </a:prstGeom>
+          <a:solidFill>
+            <a:srgbClr val="C79100"/>
+          </a:solidFill>
+          <a:ln/>
+        </p:spPr>
+      </p:sp>
+      <p:sp>
+        <p:nvSpPr>
+          <p:cNvPr id="23" name="Shape 17"/>
+          <p:cNvSpPr/>
+          <p:nvPr/>
+        </p:nvSpPr>
+        <p:spPr>
+          <a:xfrm>
+            <a:off x="9308592" y="1920240"/>
+            <a:ext cx="2468880" cy="2651760"/>
+          </a:xfrm>
+          <a:prstGeom prst="roundRect">
+            <a:avLst>
+              <a:gd name="adj" fmla="val 3704"/>
+            </a:avLst>
+          </a:prstGeom>
+          <a:solidFill>
+            <a:srgbClr val="EEF5EF"/>
+          </a:solidFill>
+          <a:ln/>
+        </p:spPr>
+      </p:sp>
+      <p:sp>
+        <p:nvSpPr>
+          <p:cNvPr id="24" name="Shape 18"/>
+          <p:cNvSpPr/>
+          <p:nvPr/>
+        </p:nvSpPr>
+        <p:spPr>
+          <a:xfrm>
+            <a:off x="9546336" y="2157984"/>
+            <a:ext cx="493776" cy="493776"/>
+          </a:xfrm>
+          <a:prstGeom prst="ellipse">
+            <a:avLst/>
+          </a:prstGeom>
+          <a:solidFill>
+            <a:srgbClr val="0A2E1A"/>
+          </a:solidFill>
+          <a:ln/>
+        </p:spPr>
+      </p:sp>
+      <p:pic>
+        <p:nvPicPr>
+          <p:cNvPr id="25" name="Image 4" descr="icons/chart.png">    </p:cNvPr>
+          <p:cNvPicPr>
+            <a:picLocks noChangeAspect="1"/>
+          </p:cNvPicPr>
+          <p:nvPr/>
+        </p:nvPicPr>
+        <p:blipFill>
+          <a:blip r:embed="rId5"/>
+          <a:stretch>
+            <a:fillRect/>
+          </a:stretch>
+        </p:blipFill>
+        <p:spPr>
+          <a:xfrm>
+            <a:off x="9674718" y="2286366"/>
+            <a:ext cx="237012" cy="237012"/>
+          </a:xfrm>
+          <a:prstGeom prst="rect">
+            <a:avLst/>
+          </a:prstGeom>
+        </p:spPr>
+      </p:pic>
+      <p:sp>
+        <p:nvSpPr>
+          <p:cNvPr id="26" name="Text 19"/>
+          <p:cNvSpPr/>
+          <p:nvPr/>
+        </p:nvSpPr>
+        <p:spPr>
+          <a:xfrm>
+            <a:off x="9546336" y="2834640"/>
+            <a:ext cx="2011680" cy="365760"/>
           </a:xfrm>
           <a:prstGeom prst="rect">
             <a:avLst/>
@@ -4890,21 +4905,69 @@
               <a:buNone/>
             </a:pPr>
             <a:r>
-              <a:rPr lang="en-US" sz="1400" b="1" dirty="0">
-                <a:solidFill>
-                  <a:srgbClr val="14563C"/>
+              <a:rPr lang="en-US" sz="1500" b="1" dirty="0">
+                <a:solidFill>
+                  <a:srgbClr val="0E7A3D"/>
+                </a:solidFill>
+                <a:latin typeface="Calibri" pitchFamily="34" charset="0"/>
+                <a:ea typeface="Calibri" pitchFamily="34" charset="-122"/>
+                <a:cs typeface="Calibri" pitchFamily="34" charset="-120"/>
+              </a:rPr>
+              <a:t>4 · Restitution</a:t>
+            </a:r>
+            <a:endParaRPr lang="en-US" sz="1500" dirty="0"/>
+          </a:p>
+        </p:txBody>
+      </p:sp>
+      <p:sp>
+        <p:nvSpPr>
+          <p:cNvPr id="27" name="Text 20"/>
+          <p:cNvSpPr/>
+          <p:nvPr/>
+        </p:nvSpPr>
+        <p:spPr>
+          <a:xfrm>
+            <a:off x="9546336" y="3218688"/>
+            <a:ext cx="2011680" cy="1188720"/>
+          </a:xfrm>
+          <a:prstGeom prst="rect">
+            <a:avLst/>
+          </a:prstGeom>
+          <a:noFill/>
+          <a:ln/>
+        </p:spPr>
+        <p:txBody>
+          <a:bodyPr wrap="square" lIns="0" tIns="0" rIns="0" bIns="0" rtlCol="0" anchor="t"/>
+          <a:lstStyle/>
+          <a:p>
+            <a:pPr indent="0" marL="0">
+              <a:lnSpc>
+                <a:spcPct val="110000"/>
+              </a:lnSpc>
+              <a:buNone/>
+            </a:pPr>
+            <a:r>
+              <a:rPr lang="en-US" sz="1200" b="1" dirty="0">
+                <a:solidFill>
+                  <a:srgbClr val="1C2A24"/>
                 </a:solidFill>
                 <a:latin typeface="Courier New" pitchFamily="34" charset="0"/>
                 <a:ea typeface="Courier New" pitchFamily="34" charset="-122"/>
                 <a:cs typeface="Courier New" pitchFamily="34" charset="-120"/>
               </a:rPr>
-              <a:t>10-integration/pipeline.py</a:t>
-            </a:r>
-            <a:pPr indent="0" marL="0">
-              <a:buNone/>
-            </a:pPr>
-            <a:r>
-              <a:rPr lang="en-US" sz="1400" dirty="0">
+              <a:t>rapport()</a:t>
+            </a:r>
+            <a:endParaRPr lang="en-US" sz="1200" dirty="0"/>
+          </a:p>
+          <a:p>
+            <a:pPr indent="0" marL="0">
+              <a:lnSpc>
+                <a:spcPct val="110000"/>
+              </a:lnSpc>
+              <a:buNone/>
+            </a:pPr>
+            <a:r>
+              <a:rPr lang="en-US" sz="1150" dirty="0">
                 <a:solidFill>
                   <a:srgbClr val="5C6B63"/>
                 </a:solidFill>
@@ -4912,6 +4975,59 @@
                 <a:ea typeface="Calibri" pitchFamily="34" charset="-122"/>
                 <a:cs typeface="Calibri" pitchFamily="34" charset="-120"/>
               </a:rPr>
+              <a:t>afficher l’essentiel, exporter</a:t>
+            </a:r>
+            <a:endParaRPr lang="en-US" sz="1200" dirty="0"/>
+          </a:p>
+        </p:txBody>
+      </p:sp>
+      <p:sp>
+        <p:nvSpPr>
+          <p:cNvPr id="28" name="Text 21"/>
+          <p:cNvSpPr/>
+          <p:nvPr/>
+        </p:nvSpPr>
+        <p:spPr>
+          <a:xfrm>
+            <a:off x="640080" y="4983480"/>
+            <a:ext cx="11155680" cy="548640"/>
+          </a:xfrm>
+          <a:prstGeom prst="rect">
+            <a:avLst/>
+          </a:prstGeom>
+          <a:noFill/>
+          <a:ln/>
+        </p:spPr>
+        <p:txBody>
+          <a:bodyPr wrap="square" lIns="0" tIns="0" rIns="0" bIns="0" rtlCol="0" anchor="ctr"/>
+          <a:lstStyle/>
+          <a:p>
+            <a:pPr indent="0" marL="0">
+              <a:buNone/>
+            </a:pPr>
+            <a:r>
+              <a:rPr lang="en-US" sz="1400" b="1" dirty="0">
+                <a:solidFill>
+                  <a:srgbClr val="0E7A3D"/>
+                </a:solidFill>
+                <a:latin typeface="Courier New" pitchFamily="34" charset="0"/>
+                <a:ea typeface="Courier New" pitchFamily="34" charset="-122"/>
+                <a:cs typeface="Courier New" pitchFamily="34" charset="-120"/>
+              </a:rPr>
+              <a:t>10-integration/pipeline.py</a:t>
+            </a:r>
+            <a:pPr indent="0" marL="0">
+              <a:buNone/>
+            </a:pPr>
+            <a:r>
+              <a:rPr lang="en-US" sz="1400" dirty="0">
+                <a:solidFill>
+                  <a:srgbClr val="5C6B63"/>
+                </a:solidFill>
+                <a:latin typeface="Calibri" pitchFamily="34" charset="0"/>
+                <a:ea typeface="Calibri" pitchFamily="34" charset="-122"/>
+                <a:cs typeface="Calibri" pitchFamily="34" charset="-120"/>
+              </a:rPr>
               <a:t> est entièrement rédigé et commenté : c’est le MODÈLE du projet. Lisez-le, exécutez-le, imitez-le.</a:t>
             </a:r>
             <a:endParaRPr lang="en-US" sz="1400" dirty="0"/>
@@ -4920,7 +5036,7 @@
       </p:sp>
       <p:sp>
         <p:nvSpPr>
-          <p:cNvPr id="28" name="Shape 22"/>
+          <p:cNvPr id="29" name="Shape 22"/>
           <p:cNvSpPr/>
           <p:nvPr/>
         </p:nvSpPr>
@@ -4935,14 +5051,14 @@
             </a:avLst>
           </a:prstGeom>
           <a:solidFill>
-            <a:srgbClr val="10241B"/>
+            <a:srgbClr val="0F2418"/>
           </a:solidFill>
           <a:ln/>
         </p:spPr>
       </p:sp>
       <p:sp>
         <p:nvSpPr>
-          <p:cNvPr id="29" name="Shape 23"/>
+          <p:cNvPr id="30" name="Shape 23"/>
           <p:cNvSpPr/>
           <p:nvPr/>
         </p:nvSpPr>
@@ -4962,7 +5078,7 @@
       </p:sp>
       <p:sp>
         <p:nvSpPr>
-          <p:cNvPr id="30" name="Shape 24"/>
+          <p:cNvPr id="31" name="Shape 24"/>
           <p:cNvSpPr/>
           <p:nvPr/>
         </p:nvSpPr>
@@ -4975,14 +5091,14 @@
             <a:avLst/>
           </a:prstGeom>
           <a:solidFill>
-            <a:srgbClr val="C9A227"/>
+            <a:srgbClr val="C79100"/>
           </a:solidFill>
           <a:ln/>
         </p:spPr>
       </p:sp>
       <p:sp>
         <p:nvSpPr>
-          <p:cNvPr id="31" name="Shape 25"/>
+          <p:cNvPr id="32" name="Shape 25"/>
           <p:cNvSpPr/>
           <p:nvPr/>
         </p:nvSpPr>
@@ -5002,7 +5118,7 @@
       </p:sp>
       <p:sp>
         <p:nvSpPr>
-          <p:cNvPr id="32" name="Text 26"/>
+          <p:cNvPr id="33" name="Text 26"/>
           <p:cNvSpPr/>
           <p:nvPr/>
         </p:nvSpPr>
@@ -5036,7 +5152,7 @@
                 <a:ea typeface="Courier New" pitchFamily="34" charset="-122"/>
                 <a:cs typeface="Courier New" pitchFamily="34" charset="-120"/>
               </a:rPr>
-              <a:t>uv run python pipeline.py --region CKY      </a:t>
+              <a:t>uv run python pipeline.py --region BIS      </a:t>
             </a:r>
             <a:pPr indent="0" marL="0">
               <a:lnSpc>
@@ -5117,7 +5233,7 @@
         <p:spPr>
           <a:xfrm>
             <a:off x="548640" y="384048"/>
-            <a:ext cx="10972800" cy="320040"/>
+            <a:ext cx="9601200" cy="320040"/>
           </a:xfrm>
           <a:prstGeom prst="rect">
             <a:avLst/>
@@ -5135,7 +5251,7 @@
             <a:r>
               <a:rPr lang="en-US" sz="1300" b="1" spc="200" kern="0" dirty="0">
                 <a:solidFill>
-                  <a:srgbClr val="C9A227"/>
+                  <a:srgbClr val="C79100"/>
                 </a:solidFill>
                 <a:latin typeface="Calibri" pitchFamily="34" charset="0"/>
                 <a:ea typeface="Calibri" pitchFamily="34" charset="-122"/>
@@ -5156,7 +5272,7 @@
         <p:spPr>
           <a:xfrm>
             <a:off x="548640" y="658368"/>
-            <a:ext cx="11064240" cy="731520"/>
+            <a:ext cx="9966960" cy="731520"/>
           </a:xfrm>
           <a:prstGeom prst="rect">
             <a:avLst/>
@@ -5174,7 +5290,7 @@
             <a:r>
               <a:rPr lang="en-US" sz="3400" b="1" dirty="0">
                 <a:solidFill>
-                  <a:srgbClr val="14563C"/>
+                  <a:srgbClr val="0E7A3D"/>
                 </a:solidFill>
                 <a:latin typeface="Cambria" pitchFamily="34" charset="0"/>
                 <a:ea typeface="Cambria" pitchFamily="34" charset="-122"/>
@@ -5186,29 +5302,9 @@
           </a:p>
         </p:txBody>
       </p:sp>
-      <p:sp>
-        <p:nvSpPr>
-          <p:cNvPr id="4" name="Shape 2"/>
-          <p:cNvSpPr/>
-          <p:nvPr/>
-        </p:nvSpPr>
-        <p:spPr>
-          <a:xfrm>
-            <a:off x="640080" y="1874520"/>
-            <a:ext cx="411480" cy="411480"/>
-          </a:xfrm>
-          <a:prstGeom prst="ellipse">
-            <a:avLst/>
-          </a:prstGeom>
-          <a:solidFill>
-            <a:srgbClr val="1E7A50"/>
-          </a:solidFill>
-          <a:ln/>
-        </p:spPr>
-      </p:sp>
       <p:pic>
         <p:nvPicPr>
-          <p:cNvPr id="5" name="Image 0" descr="icons/check.png">    </p:cNvPr>
+          <p:cNvPr id="4" name="Image 0" descr="logo-dgi.png">    </p:cNvPr>
           <p:cNvPicPr>
             <a:picLocks noChangeAspect="1"/>
           </p:cNvPicPr>
@@ -5222,8 +5318,8 @@
         </p:blipFill>
         <p:spPr>
           <a:xfrm>
-            <a:off x="747065" y="1981505"/>
-            <a:ext cx="197510" cy="197510"/>
+            <a:off x="10744200" y="384048"/>
+            <a:ext cx="1051560" cy="795528"/>
           </a:xfrm>
           <a:prstGeom prst="rect">
             <a:avLst/>
@@ -5232,89 +5328,27 @@
       </p:pic>
       <p:sp>
         <p:nvSpPr>
-          <p:cNvPr id="6" name="Text 3"/>
-          <p:cNvSpPr/>
-          <p:nvPr/>
-        </p:nvSpPr>
-        <p:spPr>
-          <a:xfrm>
-            <a:off x="1234440" y="1801368"/>
-            <a:ext cx="4800600" cy="960120"/>
-          </a:xfrm>
-          <a:prstGeom prst="rect">
-            <a:avLst/>
-          </a:prstGeom>
-          <a:noFill/>
-          <a:ln/>
-        </p:spPr>
-        <p:txBody>
-          <a:bodyPr wrap="square" lIns="0" tIns="0" rIns="0" bIns="0" rtlCol="0" anchor="ctr"/>
-          <a:lstStyle/>
-          <a:p>
-            <a:pPr indent="0" marL="0">
-              <a:lnSpc>
-                <a:spcPct val="105000"/>
-              </a:lnSpc>
-              <a:buNone/>
-            </a:pPr>
-            <a:r>
-              <a:rPr lang="en-US" sz="1450" b="1" dirty="0">
-                <a:solidFill>
-                  <a:srgbClr val="1C2A24"/>
-                </a:solidFill>
-                <a:latin typeface="Calibri" pitchFamily="34" charset="0"/>
-                <a:ea typeface="Calibri" pitchFamily="34" charset="-122"/>
-                <a:cs typeface="Calibri" pitchFamily="34" charset="-120"/>
-              </a:rPr>
-              <a:t>Des options nommées</a:t>
-            </a:r>
-            <a:endParaRPr lang="en-US" sz="1450" dirty="0"/>
-          </a:p>
-          <a:p>
-            <a:pPr indent="0" marL="0">
-              <a:lnSpc>
-                <a:spcPct val="105000"/>
-              </a:lnSpc>
-              <a:buNone/>
-            </a:pPr>
-            <a:r>
-              <a:rPr lang="en-US" sz="1250" dirty="0">
-                <a:solidFill>
-                  <a:srgbClr val="5C6B63"/>
-                </a:solidFill>
-                <a:latin typeface="Calibri" pitchFamily="34" charset="0"/>
-                <a:ea typeface="Calibri" pitchFamily="34" charset="-122"/>
-                <a:cs typeface="Calibri" pitchFamily="34" charset="-120"/>
-              </a:rPr>
-              <a:t>--region CKY, --toutes : lisible six mois plus tard.</a:t>
-            </a:r>
-            <a:endParaRPr lang="en-US" sz="1450" dirty="0"/>
-          </a:p>
-        </p:txBody>
-      </p:sp>
-      <p:sp>
-        <p:nvSpPr>
-          <p:cNvPr id="7" name="Shape 4"/>
-          <p:cNvSpPr/>
-          <p:nvPr/>
-        </p:nvSpPr>
-        <p:spPr>
-          <a:xfrm>
-            <a:off x="640080" y="2926080"/>
+          <p:cNvPr id="5" name="Shape 2"/>
+          <p:cNvSpPr/>
+          <p:nvPr/>
+        </p:nvSpPr>
+        <p:spPr>
+          <a:xfrm>
+            <a:off x="640080" y="1874520"/>
             <a:ext cx="411480" cy="411480"/>
           </a:xfrm>
           <a:prstGeom prst="ellipse">
             <a:avLst/>
           </a:prstGeom>
           <a:solidFill>
-            <a:srgbClr val="1E7A50"/>
+            <a:srgbClr val="2E9E4F"/>
           </a:solidFill>
           <a:ln/>
         </p:spPr>
       </p:sp>
       <p:pic>
         <p:nvPicPr>
-          <p:cNvPr id="8" name="Image 1" descr="icons/check.png">    </p:cNvPr>
+          <p:cNvPr id="6" name="Image 1" descr="icons/check.png">    </p:cNvPr>
           <p:cNvPicPr>
             <a:picLocks noChangeAspect="1"/>
           </p:cNvPicPr>
@@ -5328,7 +5362,7 @@
         </p:blipFill>
         <p:spPr>
           <a:xfrm>
-            <a:off x="747065" y="3033065"/>
+            <a:off x="747065" y="1981505"/>
             <a:ext cx="197510" cy="197510"/>
           </a:xfrm>
           <a:prstGeom prst="rect">
@@ -5338,13 +5372,13 @@
       </p:pic>
       <p:sp>
         <p:nvSpPr>
-          <p:cNvPr id="9" name="Text 5"/>
-          <p:cNvSpPr/>
-          <p:nvPr/>
-        </p:nvSpPr>
-        <p:spPr>
-          <a:xfrm>
-            <a:off x="1234440" y="2852928"/>
+          <p:cNvPr id="7" name="Text 3"/>
+          <p:cNvSpPr/>
+          <p:nvPr/>
+        </p:nvSpPr>
+        <p:spPr>
+          <a:xfrm>
+            <a:off x="1234440" y="1801368"/>
             <a:ext cx="4800600" cy="960120"/>
           </a:xfrm>
           <a:prstGeom prst="rect">
@@ -5372,7 +5406,7 @@
                 <a:ea typeface="Calibri" pitchFamily="34" charset="-122"/>
                 <a:cs typeface="Calibri" pitchFamily="34" charset="-120"/>
               </a:rPr>
-              <a:t>--help gratuit</a:t>
+              <a:t>Des options nommées</a:t>
             </a:r>
             <a:endParaRPr lang="en-US" sz="1450" dirty="0"/>
           </a:p>
@@ -5392,7 +5426,7 @@
                 <a:ea typeface="Calibri" pitchFamily="34" charset="-122"/>
                 <a:cs typeface="Calibri" pitchFamily="34" charset="-120"/>
               </a:rPr>
-              <a:t>argparse documente l’outil tout seul.</a:t>
+              <a:t>--region BIS, --toutes : lisible six mois plus tard.</a:t>
             </a:r>
             <a:endParaRPr lang="en-US" sz="1450" dirty="0"/>
           </a:p>
@@ -5400,27 +5434,27 @@
       </p:sp>
       <p:sp>
         <p:nvSpPr>
-          <p:cNvPr id="10" name="Shape 6"/>
-          <p:cNvSpPr/>
-          <p:nvPr/>
-        </p:nvSpPr>
-        <p:spPr>
-          <a:xfrm>
-            <a:off x="640080" y="3977640"/>
+          <p:cNvPr id="8" name="Shape 4"/>
+          <p:cNvSpPr/>
+          <p:nvPr/>
+        </p:nvSpPr>
+        <p:spPr>
+          <a:xfrm>
+            <a:off x="640080" y="2926080"/>
             <a:ext cx="411480" cy="411480"/>
           </a:xfrm>
           <a:prstGeom prst="ellipse">
             <a:avLst/>
           </a:prstGeom>
           <a:solidFill>
-            <a:srgbClr val="1E7A50"/>
+            <a:srgbClr val="2E9E4F"/>
           </a:solidFill>
           <a:ln/>
         </p:spPr>
       </p:sp>
       <p:pic>
         <p:nvPicPr>
-          <p:cNvPr id="11" name="Image 2" descr="icons/check.png">    </p:cNvPr>
+          <p:cNvPr id="9" name="Image 2" descr="icons/check.png">    </p:cNvPr>
           <p:cNvPicPr>
             <a:picLocks noChangeAspect="1"/>
           </p:cNvPicPr>
@@ -5434,7 +5468,7 @@
         </p:blipFill>
         <p:spPr>
           <a:xfrm>
-            <a:off x="747065" y="4084625"/>
+            <a:off x="747065" y="3033065"/>
             <a:ext cx="197510" cy="197510"/>
           </a:xfrm>
           <a:prstGeom prst="rect">
@@ -5444,13 +5478,13 @@
       </p:pic>
       <p:sp>
         <p:nvSpPr>
-          <p:cNvPr id="12" name="Text 7"/>
-          <p:cNvSpPr/>
-          <p:nvPr/>
-        </p:nvSpPr>
-        <p:spPr>
-          <a:xfrm>
-            <a:off x="1234440" y="3904488"/>
+          <p:cNvPr id="10" name="Text 5"/>
+          <p:cNvSpPr/>
+          <p:nvPr/>
+        </p:nvSpPr>
+        <p:spPr>
+          <a:xfrm>
+            <a:off x="1234440" y="2852928"/>
             <a:ext cx="4800600" cy="960120"/>
           </a:xfrm>
           <a:prstGeom prst="rect">
@@ -5478,7 +5512,7 @@
                 <a:ea typeface="Calibri" pitchFamily="34" charset="-122"/>
                 <a:cs typeface="Calibri" pitchFamily="34" charset="-120"/>
               </a:rPr>
-              <a:t>Groupe mutuellement exclusif</a:t>
+              <a:t>--help gratuit</a:t>
             </a:r>
             <a:endParaRPr lang="en-US" sz="1450" dirty="0"/>
           </a:p>
@@ -5498,7 +5532,7 @@
                 <a:ea typeface="Calibri" pitchFamily="34" charset="-122"/>
                 <a:cs typeface="Calibri" pitchFamily="34" charset="-120"/>
               </a:rPr>
-              <a:t>--region OU --toutes, pas les deux : le module refuse.</a:t>
+              <a:t>argparse documente l’outil tout seul.</a:t>
             </a:r>
             <a:endParaRPr lang="en-US" sz="1450" dirty="0"/>
           </a:p>
@@ -5506,27 +5540,27 @@
       </p:sp>
       <p:sp>
         <p:nvSpPr>
-          <p:cNvPr id="13" name="Shape 8"/>
-          <p:cNvSpPr/>
-          <p:nvPr/>
-        </p:nvSpPr>
-        <p:spPr>
-          <a:xfrm>
-            <a:off x="640080" y="5029200"/>
+          <p:cNvPr id="11" name="Shape 6"/>
+          <p:cNvSpPr/>
+          <p:nvPr/>
+        </p:nvSpPr>
+        <p:spPr>
+          <a:xfrm>
+            <a:off x="640080" y="3977640"/>
             <a:ext cx="411480" cy="411480"/>
           </a:xfrm>
           <a:prstGeom prst="ellipse">
             <a:avLst/>
           </a:prstGeom>
           <a:solidFill>
-            <a:srgbClr val="1E7A50"/>
+            <a:srgbClr val="2E9E4F"/>
           </a:solidFill>
           <a:ln/>
         </p:spPr>
       </p:sp>
       <p:pic>
         <p:nvPicPr>
-          <p:cNvPr id="14" name="Image 3" descr="icons/check.png">    </p:cNvPr>
+          <p:cNvPr id="12" name="Image 3" descr="icons/check.png">    </p:cNvPr>
           <p:cNvPicPr>
             <a:picLocks noChangeAspect="1"/>
           </p:cNvPicPr>
@@ -5540,7 +5574,7 @@
         </p:blipFill>
         <p:spPr>
           <a:xfrm>
-            <a:off x="747065" y="5136185"/>
+            <a:off x="747065" y="4084625"/>
             <a:ext cx="197510" cy="197510"/>
           </a:xfrm>
           <a:prstGeom prst="rect">
@@ -5550,13 +5584,13 @@
       </p:pic>
       <p:sp>
         <p:nvSpPr>
-          <p:cNvPr id="15" name="Text 9"/>
-          <p:cNvSpPr/>
-          <p:nvPr/>
-        </p:nvSpPr>
-        <p:spPr>
-          <a:xfrm>
-            <a:off x="1234440" y="4956048"/>
+          <p:cNvPr id="13" name="Text 7"/>
+          <p:cNvSpPr/>
+          <p:nvPr/>
+        </p:nvSpPr>
+        <p:spPr>
+          <a:xfrm>
+            <a:off x="1234440" y="3904488"/>
             <a:ext cx="4800600" cy="960120"/>
           </a:xfrm>
           <a:prstGeom prst="rect">
@@ -5584,7 +5618,7 @@
                 <a:ea typeface="Calibri" pitchFamily="34" charset="-122"/>
                 <a:cs typeface="Calibri" pitchFamily="34" charset="-120"/>
               </a:rPr>
-              <a:t>main() raconte l’histoire</a:t>
+              <a:t>Groupe mutuellement exclusif</a:t>
             </a:r>
             <a:endParaRPr lang="en-US" sz="1450" dirty="0"/>
           </a:p>
@@ -5604,6 +5638,112 @@
                 <a:ea typeface="Calibri" pitchFamily="34" charset="-122"/>
                 <a:cs typeface="Calibri" pitchFamily="34" charset="-120"/>
               </a:rPr>
+              <a:t>--region OU --toutes, pas les deux : le module refuse.</a:t>
+            </a:r>
+            <a:endParaRPr lang="en-US" sz="1450" dirty="0"/>
+          </a:p>
+        </p:txBody>
+      </p:sp>
+      <p:sp>
+        <p:nvSpPr>
+          <p:cNvPr id="14" name="Shape 8"/>
+          <p:cNvSpPr/>
+          <p:nvPr/>
+        </p:nvSpPr>
+        <p:spPr>
+          <a:xfrm>
+            <a:off x="640080" y="5029200"/>
+            <a:ext cx="411480" cy="411480"/>
+          </a:xfrm>
+          <a:prstGeom prst="ellipse">
+            <a:avLst/>
+          </a:prstGeom>
+          <a:solidFill>
+            <a:srgbClr val="2E9E4F"/>
+          </a:solidFill>
+          <a:ln/>
+        </p:spPr>
+      </p:sp>
+      <p:pic>
+        <p:nvPicPr>
+          <p:cNvPr id="15" name="Image 4" descr="icons/check.png">    </p:cNvPr>
+          <p:cNvPicPr>
+            <a:picLocks noChangeAspect="1"/>
+          </p:cNvPicPr>
+          <p:nvPr/>
+        </p:nvPicPr>
+        <p:blipFill>
+          <a:blip r:embed="rId5"/>
+          <a:stretch>
+            <a:fillRect/>
+          </a:stretch>
+        </p:blipFill>
+        <p:spPr>
+          <a:xfrm>
+            <a:off x="747065" y="5136185"/>
+            <a:ext cx="197510" cy="197510"/>
+          </a:xfrm>
+          <a:prstGeom prst="rect">
+            <a:avLst/>
+          </a:prstGeom>
+        </p:spPr>
+      </p:pic>
+      <p:sp>
+        <p:nvSpPr>
+          <p:cNvPr id="16" name="Text 9"/>
+          <p:cNvSpPr/>
+          <p:nvPr/>
+        </p:nvSpPr>
+        <p:spPr>
+          <a:xfrm>
+            <a:off x="1234440" y="4956048"/>
+            <a:ext cx="4800600" cy="960120"/>
+          </a:xfrm>
+          <a:prstGeom prst="rect">
+            <a:avLst/>
+          </a:prstGeom>
+          <a:noFill/>
+          <a:ln/>
+        </p:spPr>
+        <p:txBody>
+          <a:bodyPr wrap="square" lIns="0" tIns="0" rIns="0" bIns="0" rtlCol="0" anchor="ctr"/>
+          <a:lstStyle/>
+          <a:p>
+            <a:pPr indent="0" marL="0">
+              <a:lnSpc>
+                <a:spcPct val="105000"/>
+              </a:lnSpc>
+              <a:buNone/>
+            </a:pPr>
+            <a:r>
+              <a:rPr lang="en-US" sz="1450" b="1" dirty="0">
+                <a:solidFill>
+                  <a:srgbClr val="1C2A24"/>
+                </a:solidFill>
+                <a:latin typeface="Calibri" pitchFamily="34" charset="0"/>
+                <a:ea typeface="Calibri" pitchFamily="34" charset="-122"/>
+                <a:cs typeface="Calibri" pitchFamily="34" charset="-120"/>
+              </a:rPr>
+              <a:t>main() raconte l’histoire</a:t>
+            </a:r>
+            <a:endParaRPr lang="en-US" sz="1450" dirty="0"/>
+          </a:p>
+          <a:p>
+            <a:pPr indent="0" marL="0">
+              <a:lnSpc>
+                <a:spcPct val="105000"/>
+              </a:lnSpc>
+              <a:buNone/>
+            </a:pPr>
+            <a:r>
+              <a:rPr lang="en-US" sz="1250" dirty="0">
+                <a:solidFill>
+                  <a:srgbClr val="5C6B63"/>
+                </a:solidFill>
+                <a:latin typeface="Calibri" pitchFamily="34" charset="0"/>
+                <a:ea typeface="Calibri" pitchFamily="34" charset="-122"/>
+                <a:cs typeface="Calibri" pitchFamily="34" charset="-120"/>
+              </a:rPr>
               <a:t>Quatre appels, quatre print numérotés — on suit l’exécution.</a:t>
             </a:r>
             <a:endParaRPr lang="en-US" sz="1450" dirty="0"/>
@@ -5612,7 +5752,7 @@
       </p:sp>
       <p:sp>
         <p:nvSpPr>
-          <p:cNvPr id="16" name="Shape 10"/>
+          <p:cNvPr id="17" name="Shape 10"/>
           <p:cNvSpPr/>
           <p:nvPr/>
         </p:nvSpPr>
@@ -5627,14 +5767,14 @@
             </a:avLst>
           </a:prstGeom>
           <a:solidFill>
-            <a:srgbClr val="10241B"/>
+            <a:srgbClr val="0F2418"/>
           </a:solidFill>
           <a:ln/>
         </p:spPr>
       </p:sp>
       <p:sp>
         <p:nvSpPr>
-          <p:cNvPr id="17" name="Shape 11"/>
+          <p:cNvPr id="18" name="Shape 11"/>
           <p:cNvSpPr/>
           <p:nvPr/>
         </p:nvSpPr>
@@ -5654,7 +5794,7 @@
       </p:sp>
       <p:sp>
         <p:nvSpPr>
-          <p:cNvPr id="18" name="Shape 12"/>
+          <p:cNvPr id="19" name="Shape 12"/>
           <p:cNvSpPr/>
           <p:nvPr/>
         </p:nvSpPr>
@@ -5667,14 +5807,14 @@
             <a:avLst/>
           </a:prstGeom>
           <a:solidFill>
-            <a:srgbClr val="C9A227"/>
+            <a:srgbClr val="C79100"/>
           </a:solidFill>
           <a:ln/>
         </p:spPr>
       </p:sp>
       <p:sp>
         <p:nvSpPr>
-          <p:cNvPr id="19" name="Shape 13"/>
+          <p:cNvPr id="20" name="Shape 13"/>
           <p:cNvSpPr/>
           <p:nvPr/>
         </p:nvSpPr>
@@ -5694,7 +5834,7 @@
       </p:sp>
       <p:sp>
         <p:nvSpPr>
-          <p:cNvPr id="20" name="Text 14"/>
+          <p:cNvPr id="21" name="Text 14"/>
           <p:cNvSpPr/>
           <p:nvPr/>
         </p:nvSpPr>
@@ -5733,7 +5873,7 @@
       </p:sp>
       <p:sp>
         <p:nvSpPr>
-          <p:cNvPr id="21" name="Text 15"/>
+          <p:cNvPr id="22" name="Text 15"/>
           <p:cNvSpPr/>
           <p:nvPr/>
         </p:nvSpPr>
@@ -6235,7 +6375,7 @@
         <p:spPr>
           <a:xfrm>
             <a:off x="548640" y="384048"/>
-            <a:ext cx="10972800" cy="320040"/>
+            <a:ext cx="9601200" cy="320040"/>
           </a:xfrm>
           <a:prstGeom prst="rect">
             <a:avLst/>
@@ -6253,7 +6393,7 @@
             <a:r>
               <a:rPr lang="en-US" sz="1300" b="1" spc="200" kern="0" dirty="0">
                 <a:solidFill>
-                  <a:srgbClr val="C9A227"/>
+                  <a:srgbClr val="C79100"/>
                 </a:solidFill>
                 <a:latin typeface="Calibri" pitchFamily="34" charset="0"/>
                 <a:ea typeface="Calibri" pitchFamily="34" charset="-122"/>
@@ -6274,7 +6414,7 @@
         <p:spPr>
           <a:xfrm>
             <a:off x="548640" y="658368"/>
-            <a:ext cx="11064240" cy="731520"/>
+            <a:ext cx="9966960" cy="731520"/>
           </a:xfrm>
           <a:prstGeom prst="rect">
             <a:avLst/>
@@ -6292,7 +6432,7 @@
             <a:r>
               <a:rPr lang="en-US" sz="3400" b="1" dirty="0">
                 <a:solidFill>
-                  <a:srgbClr val="14563C"/>
+                  <a:srgbClr val="0E7A3D"/>
                 </a:solidFill>
                 <a:latin typeface="Cambria" pitchFamily="34" charset="0"/>
                 <a:ea typeface="Cambria" pitchFamily="34" charset="-122"/>
@@ -6304,29 +6444,9 @@
           </a:p>
         </p:txBody>
       </p:sp>
-      <p:sp>
-        <p:nvSpPr>
-          <p:cNvPr id="4" name="Shape 2"/>
-          <p:cNvSpPr/>
-          <p:nvPr/>
-        </p:nvSpPr>
-        <p:spPr>
-          <a:xfrm>
-            <a:off x="640080" y="1874520"/>
-            <a:ext cx="411480" cy="411480"/>
-          </a:xfrm>
-          <a:prstGeom prst="ellipse">
-            <a:avLst/>
-          </a:prstGeom>
-          <a:solidFill>
-            <a:srgbClr val="1E7A50"/>
-          </a:solidFill>
-          <a:ln/>
-        </p:spPr>
-      </p:sp>
       <p:pic>
         <p:nvPicPr>
-          <p:cNvPr id="5" name="Image 0" descr="icons/check.png">    </p:cNvPr>
+          <p:cNvPr id="4" name="Image 0" descr="logo-dgi.png">    </p:cNvPr>
           <p:cNvPicPr>
             <a:picLocks noChangeAspect="1"/>
           </p:cNvPicPr>
@@ -6340,8 +6460,8 @@
         </p:blipFill>
         <p:spPr>
           <a:xfrm>
-            <a:off x="747065" y="1981505"/>
-            <a:ext cx="197510" cy="197510"/>
+            <a:off x="10744200" y="384048"/>
+            <a:ext cx="1051560" cy="795528"/>
           </a:xfrm>
           <a:prstGeom prst="rect">
             <a:avLst/>
@@ -6350,89 +6470,27 @@
       </p:pic>
       <p:sp>
         <p:nvSpPr>
-          <p:cNvPr id="6" name="Text 3"/>
-          <p:cNvSpPr/>
-          <p:nvPr/>
-        </p:nvSpPr>
-        <p:spPr>
-          <a:xfrm>
-            <a:off x="1234440" y="1801368"/>
-            <a:ext cx="4800600" cy="1143000"/>
-          </a:xfrm>
-          <a:prstGeom prst="rect">
-            <a:avLst/>
-          </a:prstGeom>
-          <a:noFill/>
-          <a:ln/>
-        </p:spPr>
-        <p:txBody>
-          <a:bodyPr wrap="square" lIns="0" tIns="0" rIns="0" bIns="0" rtlCol="0" anchor="ctr"/>
-          <a:lstStyle/>
-          <a:p>
-            <a:pPr indent="0" marL="0">
-              <a:lnSpc>
-                <a:spcPct val="105000"/>
-              </a:lnSpc>
-              <a:buNone/>
-            </a:pPr>
-            <a:r>
-              <a:rPr lang="en-US" sz="1450" b="1" dirty="0">
-                <a:solidFill>
-                  <a:srgbClr val="1C2A24"/>
-                </a:solidFill>
-                <a:latin typeface="Calibri" pitchFamily="34" charset="0"/>
-                <a:ea typeface="Calibri" pitchFamily="34" charset="-122"/>
-                <a:cs typeface="Calibri" pitchFamily="34" charset="-120"/>
-              </a:rPr>
-              <a:t>Jamais de traceback brut</a:t>
-            </a:r>
-            <a:endParaRPr lang="en-US" sz="1450" dirty="0"/>
-          </a:p>
-          <a:p>
-            <a:pPr indent="0" marL="0">
-              <a:lnSpc>
-                <a:spcPct val="105000"/>
-              </a:lnSpc>
-              <a:buNone/>
-            </a:pPr>
-            <a:r>
-              <a:rPr lang="en-US" sz="1250" dirty="0">
-                <a:solidFill>
-                  <a:srgbClr val="5C6B63"/>
-                </a:solidFill>
-                <a:latin typeface="Calibri" pitchFamily="34" charset="0"/>
-                <a:ea typeface="Calibri" pitchFamily="34" charset="-122"/>
-                <a:cs typeface="Calibri" pitchFamily="34" charset="-120"/>
-              </a:rPr>
-              <a:t>sys.exit("message + remède") : l’utilisateur sait quoi faire.</a:t>
-            </a:r>
-            <a:endParaRPr lang="en-US" sz="1450" dirty="0"/>
-          </a:p>
-        </p:txBody>
-      </p:sp>
-      <p:sp>
-        <p:nvSpPr>
-          <p:cNvPr id="7" name="Shape 4"/>
-          <p:cNvSpPr/>
-          <p:nvPr/>
-        </p:nvSpPr>
-        <p:spPr>
-          <a:xfrm>
-            <a:off x="640080" y="3108960"/>
+          <p:cNvPr id="5" name="Shape 2"/>
+          <p:cNvSpPr/>
+          <p:nvPr/>
+        </p:nvSpPr>
+        <p:spPr>
+          <a:xfrm>
+            <a:off x="640080" y="1874520"/>
             <a:ext cx="411480" cy="411480"/>
           </a:xfrm>
           <a:prstGeom prst="ellipse">
             <a:avLst/>
           </a:prstGeom>
           <a:solidFill>
-            <a:srgbClr val="1E7A50"/>
+            <a:srgbClr val="2E9E4F"/>
           </a:solidFill>
           <a:ln/>
         </p:spPr>
       </p:sp>
       <p:pic>
         <p:nvPicPr>
-          <p:cNvPr id="8" name="Image 1" descr="icons/check.png">    </p:cNvPr>
+          <p:cNvPr id="6" name="Image 1" descr="icons/check.png">    </p:cNvPr>
           <p:cNvPicPr>
             <a:picLocks noChangeAspect="1"/>
           </p:cNvPicPr>
@@ -6446,7 +6504,7 @@
         </p:blipFill>
         <p:spPr>
           <a:xfrm>
-            <a:off x="747065" y="3215945"/>
+            <a:off x="747065" y="1981505"/>
             <a:ext cx="197510" cy="197510"/>
           </a:xfrm>
           <a:prstGeom prst="rect">
@@ -6456,13 +6514,13 @@
       </p:pic>
       <p:sp>
         <p:nvSpPr>
-          <p:cNvPr id="9" name="Text 5"/>
-          <p:cNvSpPr/>
-          <p:nvPr/>
-        </p:nvSpPr>
-        <p:spPr>
-          <a:xfrm>
-            <a:off x="1234440" y="3035808"/>
+          <p:cNvPr id="7" name="Text 3"/>
+          <p:cNvSpPr/>
+          <p:nvPr/>
+        </p:nvSpPr>
+        <p:spPr>
+          <a:xfrm>
+            <a:off x="1234440" y="1801368"/>
             <a:ext cx="4800600" cy="1143000"/>
           </a:xfrm>
           <a:prstGeom prst="rect">
@@ -6490,7 +6548,7 @@
                 <a:ea typeface="Calibri" pitchFamily="34" charset="-122"/>
                 <a:cs typeface="Calibri" pitchFamily="34" charset="-120"/>
               </a:rPr>
-              <a:t>Chaque filtre annonce son bilan</a:t>
+              <a:t>Jamais de traceback brut</a:t>
             </a:r>
             <a:endParaRPr lang="en-US" sz="1450" dirty="0"/>
           </a:p>
@@ -6510,7 +6568,7 @@
                 <a:ea typeface="Calibri" pitchFamily="34" charset="-122"/>
                 <a:cs typeface="Calibri" pitchFamily="34" charset="-120"/>
               </a:rPr>
-              <a:t>« CA invalides écartés : 26 » — la donnée perdue est visible.</a:t>
+              <a:t>sys.exit("message + remède") : l’utilisateur sait quoi faire.</a:t>
             </a:r>
             <a:endParaRPr lang="en-US" sz="1450" dirty="0"/>
           </a:p>
@@ -6518,27 +6576,27 @@
       </p:sp>
       <p:sp>
         <p:nvSpPr>
-          <p:cNvPr id="10" name="Shape 6"/>
-          <p:cNvSpPr/>
-          <p:nvPr/>
-        </p:nvSpPr>
-        <p:spPr>
-          <a:xfrm>
-            <a:off x="640080" y="4343400"/>
+          <p:cNvPr id="8" name="Shape 4"/>
+          <p:cNvSpPr/>
+          <p:nvPr/>
+        </p:nvSpPr>
+        <p:spPr>
+          <a:xfrm>
+            <a:off x="640080" y="3108960"/>
             <a:ext cx="411480" cy="411480"/>
           </a:xfrm>
           <a:prstGeom prst="ellipse">
             <a:avLst/>
           </a:prstGeom>
           <a:solidFill>
-            <a:srgbClr val="1E7A50"/>
+            <a:srgbClr val="2E9E4F"/>
           </a:solidFill>
           <a:ln/>
         </p:spPr>
       </p:sp>
       <p:pic>
         <p:nvPicPr>
-          <p:cNvPr id="11" name="Image 2" descr="icons/check.png">    </p:cNvPr>
+          <p:cNvPr id="9" name="Image 2" descr="icons/check.png">    </p:cNvPr>
           <p:cNvPicPr>
             <a:picLocks noChangeAspect="1"/>
           </p:cNvPicPr>
@@ -6552,7 +6610,7 @@
         </p:blipFill>
         <p:spPr>
           <a:xfrm>
-            <a:off x="747065" y="4450385"/>
+            <a:off x="747065" y="3215945"/>
             <a:ext cx="197510" cy="197510"/>
           </a:xfrm>
           <a:prstGeom prst="rect">
@@ -6562,13 +6620,13 @@
       </p:pic>
       <p:sp>
         <p:nvSpPr>
-          <p:cNvPr id="12" name="Text 7"/>
-          <p:cNvSpPr/>
-          <p:nvPr/>
-        </p:nvSpPr>
-        <p:spPr>
-          <a:xfrm>
-            <a:off x="1234440" y="4270248"/>
+          <p:cNvPr id="10" name="Text 5"/>
+          <p:cNvSpPr/>
+          <p:nvPr/>
+        </p:nvSpPr>
+        <p:spPr>
+          <a:xfrm>
+            <a:off x="1234440" y="3035808"/>
             <a:ext cx="4800600" cy="1143000"/>
           </a:xfrm>
           <a:prstGeom prst="rect">
@@ -6596,7 +6654,7 @@
                 <a:ea typeface="Calibri" pitchFamily="34" charset="-122"/>
                 <a:cs typeface="Calibri" pitchFamily="34" charset="-120"/>
               </a:rPr>
-              <a:t>C’est un critère de la grille</a:t>
+              <a:t>Chaque filtre annonce son bilan</a:t>
             </a:r>
             <a:endParaRPr lang="en-US" sz="1450" dirty="0"/>
           </a:p>
@@ -6616,6 +6674,112 @@
                 <a:ea typeface="Calibri" pitchFamily="34" charset="-122"/>
                 <a:cs typeface="Calibri" pitchFamily="34" charset="-120"/>
               </a:rPr>
+              <a:t>« CA invalides écartés : 26 » — la donnée perdue est visible.</a:t>
+            </a:r>
+            <a:endParaRPr lang="en-US" sz="1450" dirty="0"/>
+          </a:p>
+        </p:txBody>
+      </p:sp>
+      <p:sp>
+        <p:nvSpPr>
+          <p:cNvPr id="11" name="Shape 6"/>
+          <p:cNvSpPr/>
+          <p:nvPr/>
+        </p:nvSpPr>
+        <p:spPr>
+          <a:xfrm>
+            <a:off x="640080" y="4343400"/>
+            <a:ext cx="411480" cy="411480"/>
+          </a:xfrm>
+          <a:prstGeom prst="ellipse">
+            <a:avLst/>
+          </a:prstGeom>
+          <a:solidFill>
+            <a:srgbClr val="2E9E4F"/>
+          </a:solidFill>
+          <a:ln/>
+        </p:spPr>
+      </p:sp>
+      <p:pic>
+        <p:nvPicPr>
+          <p:cNvPr id="12" name="Image 3" descr="icons/check.png">    </p:cNvPr>
+          <p:cNvPicPr>
+            <a:picLocks noChangeAspect="1"/>
+          </p:cNvPicPr>
+          <p:nvPr/>
+        </p:nvPicPr>
+        <p:blipFill>
+          <a:blip r:embed="rId4"/>
+          <a:stretch>
+            <a:fillRect/>
+          </a:stretch>
+        </p:blipFill>
+        <p:spPr>
+          <a:xfrm>
+            <a:off x="747065" y="4450385"/>
+            <a:ext cx="197510" cy="197510"/>
+          </a:xfrm>
+          <a:prstGeom prst="rect">
+            <a:avLst/>
+          </a:prstGeom>
+        </p:spPr>
+      </p:pic>
+      <p:sp>
+        <p:nvSpPr>
+          <p:cNvPr id="13" name="Text 7"/>
+          <p:cNvSpPr/>
+          <p:nvPr/>
+        </p:nvSpPr>
+        <p:spPr>
+          <a:xfrm>
+            <a:off x="1234440" y="4270248"/>
+            <a:ext cx="4800600" cy="1143000"/>
+          </a:xfrm>
+          <a:prstGeom prst="rect">
+            <a:avLst/>
+          </a:prstGeom>
+          <a:noFill/>
+          <a:ln/>
+        </p:spPr>
+        <p:txBody>
+          <a:bodyPr wrap="square" lIns="0" tIns="0" rIns="0" bIns="0" rtlCol="0" anchor="ctr"/>
+          <a:lstStyle/>
+          <a:p>
+            <a:pPr indent="0" marL="0">
+              <a:lnSpc>
+                <a:spcPct val="105000"/>
+              </a:lnSpc>
+              <a:buNone/>
+            </a:pPr>
+            <a:r>
+              <a:rPr lang="en-US" sz="1450" b="1" dirty="0">
+                <a:solidFill>
+                  <a:srgbClr val="1C2A24"/>
+                </a:solidFill>
+                <a:latin typeface="Calibri" pitchFamily="34" charset="0"/>
+                <a:ea typeface="Calibri" pitchFamily="34" charset="-122"/>
+                <a:cs typeface="Calibri" pitchFamily="34" charset="-120"/>
+              </a:rPr>
+              <a:t>C’est un critère de la grille</a:t>
+            </a:r>
+            <a:endParaRPr lang="en-US" sz="1450" dirty="0"/>
+          </a:p>
+          <a:p>
+            <a:pPr indent="0" marL="0">
+              <a:lnSpc>
+                <a:spcPct val="105000"/>
+              </a:lnSpc>
+              <a:buNone/>
+            </a:pPr>
+            <a:r>
+              <a:rPr lang="en-US" sz="1250" dirty="0">
+                <a:solidFill>
+                  <a:srgbClr val="5C6B63"/>
+                </a:solidFill>
+                <a:latin typeface="Calibri" pitchFamily="34" charset="0"/>
+                <a:ea typeface="Calibri" pitchFamily="34" charset="-122"/>
+                <a:cs typeface="Calibri" pitchFamily="34" charset="-120"/>
+              </a:rPr>
               <a:t>Robustesse : 3 points sur 20. Vérifié en soutenance.</a:t>
             </a:r>
             <a:endParaRPr lang="en-US" sz="1450" dirty="0"/>
@@ -6624,7 +6788,7 @@
       </p:sp>
       <p:sp>
         <p:nvSpPr>
-          <p:cNvPr id="13" name="Shape 8"/>
+          <p:cNvPr id="14" name="Shape 8"/>
           <p:cNvSpPr/>
           <p:nvPr/>
         </p:nvSpPr>
@@ -6639,14 +6803,14 @@
             </a:avLst>
           </a:prstGeom>
           <a:solidFill>
-            <a:srgbClr val="10241B"/>
+            <a:srgbClr val="0F2418"/>
           </a:solidFill>
           <a:ln/>
         </p:spPr>
       </p:sp>
       <p:sp>
         <p:nvSpPr>
-          <p:cNvPr id="14" name="Shape 9"/>
+          <p:cNvPr id="15" name="Shape 9"/>
           <p:cNvSpPr/>
           <p:nvPr/>
         </p:nvSpPr>
@@ -6666,7 +6830,7 @@
       </p:sp>
       <p:sp>
         <p:nvSpPr>
-          <p:cNvPr id="15" name="Shape 10"/>
+          <p:cNvPr id="16" name="Shape 10"/>
           <p:cNvSpPr/>
           <p:nvPr/>
         </p:nvSpPr>
@@ -6679,14 +6843,14 @@
             <a:avLst/>
           </a:prstGeom>
           <a:solidFill>
-            <a:srgbClr val="C9A227"/>
+            <a:srgbClr val="C79100"/>
           </a:solidFill>
           <a:ln/>
         </p:spPr>
       </p:sp>
       <p:sp>
         <p:nvSpPr>
-          <p:cNvPr id="16" name="Shape 11"/>
+          <p:cNvPr id="17" name="Shape 11"/>
           <p:cNvSpPr/>
           <p:nvPr/>
         </p:nvSpPr>
@@ -6706,7 +6870,7 @@
       </p:sp>
       <p:sp>
         <p:nvSpPr>
-          <p:cNvPr id="17" name="Text 12"/>
+          <p:cNvPr id="18" name="Text 12"/>
           <p:cNvSpPr/>
           <p:nvPr/>
         </p:nvSpPr>
@@ -6745,7 +6909,7 @@
       </p:sp>
       <p:sp>
         <p:nvSpPr>
-          <p:cNvPr id="18" name="Text 13"/>
+          <p:cNvPr id="19" name="Text 13"/>
           <p:cNvSpPr/>
           <p:nvPr/>
         </p:nvSpPr>
@@ -7145,7 +7309,7 @@
         <p:spPr>
           <a:xfrm>
             <a:off x="548640" y="384048"/>
-            <a:ext cx="10972800" cy="320040"/>
+            <a:ext cx="9601200" cy="320040"/>
           </a:xfrm>
           <a:prstGeom prst="rect">
             <a:avLst/>
@@ -7163,7 +7327,7 @@
             <a:r>
               <a:rPr lang="en-US" sz="1300" b="1" spc="200" kern="0" dirty="0">
                 <a:solidFill>
-                  <a:srgbClr val="C9A227"/>
+                  <a:srgbClr val="C79100"/>
                 </a:solidFill>
                 <a:latin typeface="Calibri" pitchFamily="34" charset="0"/>
                 <a:ea typeface="Calibri" pitchFamily="34" charset="-122"/>
@@ -7184,7 +7348,7 @@
         <p:spPr>
           <a:xfrm>
             <a:off x="548640" y="658368"/>
-            <a:ext cx="11064240" cy="731520"/>
+            <a:ext cx="9966960" cy="731520"/>
           </a:xfrm>
           <a:prstGeom prst="rect">
             <a:avLst/>
@@ -7202,7 +7366,7 @@
             <a:r>
               <a:rPr lang="en-US" sz="3400" b="1" dirty="0">
                 <a:solidFill>
-                  <a:srgbClr val="14563C"/>
+                  <a:srgbClr val="0E7A3D"/>
                 </a:solidFill>
                 <a:latin typeface="Cambria" pitchFamily="34" charset="0"/>
                 <a:ea typeface="Cambria" pitchFamily="34" charset="-122"/>
@@ -7214,482 +7378,9 @@
           </a:p>
         </p:txBody>
       </p:sp>
-      <p:sp>
-        <p:nvSpPr>
-          <p:cNvPr id="4" name="Shape 2"/>
-          <p:cNvSpPr/>
-          <p:nvPr/>
-        </p:nvSpPr>
-        <p:spPr>
-          <a:xfrm>
-            <a:off x="640080" y="1783080"/>
-            <a:ext cx="5120640" cy="3291840"/>
-          </a:xfrm>
-          <a:prstGeom prst="roundRect">
-            <a:avLst>
-              <a:gd name="adj" fmla="val 2222"/>
-            </a:avLst>
-          </a:prstGeom>
-          <a:solidFill>
-            <a:srgbClr val="10241B"/>
-          </a:solidFill>
-          <a:ln/>
-        </p:spPr>
-      </p:sp>
-      <p:sp>
-        <p:nvSpPr>
-          <p:cNvPr id="5" name="Shape 3"/>
-          <p:cNvSpPr/>
-          <p:nvPr/>
-        </p:nvSpPr>
-        <p:spPr>
-          <a:xfrm>
-            <a:off x="841248" y="1947672"/>
-            <a:ext cx="109728" cy="109728"/>
-          </a:xfrm>
-          <a:prstGeom prst="ellipse">
-            <a:avLst/>
-          </a:prstGeom>
-          <a:solidFill>
-            <a:srgbClr val="E06C60"/>
-          </a:solidFill>
-          <a:ln/>
-        </p:spPr>
-      </p:sp>
-      <p:sp>
-        <p:nvSpPr>
-          <p:cNvPr id="6" name="Shape 4"/>
-          <p:cNvSpPr/>
-          <p:nvPr/>
-        </p:nvSpPr>
-        <p:spPr>
-          <a:xfrm>
-            <a:off x="1024128" y="1947672"/>
-            <a:ext cx="109728" cy="109728"/>
-          </a:xfrm>
-          <a:prstGeom prst="ellipse">
-            <a:avLst/>
-          </a:prstGeom>
-          <a:solidFill>
-            <a:srgbClr val="C9A227"/>
-          </a:solidFill>
-          <a:ln/>
-        </p:spPr>
-      </p:sp>
-      <p:sp>
-        <p:nvSpPr>
-          <p:cNvPr id="7" name="Shape 5"/>
-          <p:cNvSpPr/>
-          <p:nvPr/>
-        </p:nvSpPr>
-        <p:spPr>
-          <a:xfrm>
-            <a:off x="1207008" y="1947672"/>
-            <a:ext cx="109728" cy="109728"/>
-          </a:xfrm>
-          <a:prstGeom prst="ellipse">
-            <a:avLst/>
-          </a:prstGeom>
-          <a:solidFill>
-            <a:srgbClr val="61B888"/>
-          </a:solidFill>
-          <a:ln/>
-        </p:spPr>
-      </p:sp>
-      <p:sp>
-        <p:nvSpPr>
-          <p:cNvPr id="8" name="Text 6"/>
-          <p:cNvSpPr/>
-          <p:nvPr/>
-        </p:nvSpPr>
-        <p:spPr>
-          <a:xfrm>
-            <a:off x="1417320" y="1874520"/>
-            <a:ext cx="4206240" cy="274320"/>
-          </a:xfrm>
-          <a:prstGeom prst="rect">
-            <a:avLst/>
-          </a:prstGeom>
-          <a:noFill/>
-          <a:ln/>
-        </p:spPr>
-        <p:txBody>
-          <a:bodyPr wrap="square" lIns="0" tIns="0" rIns="0" bIns="0" rtlCol="0" anchor="ctr"/>
-          <a:lstStyle/>
-          <a:p>
-            <a:pPr algn="r" indent="0" marL="0">
-              <a:buNone/>
-            </a:pPr>
-            <a:r>
-              <a:rPr lang="en-US" sz="1050" dirty="0">
-                <a:solidFill>
-                  <a:srgbClr val="9FBFAF"/>
-                </a:solidFill>
-                <a:latin typeface="Courier New" pitchFamily="34" charset="0"/>
-                <a:ea typeface="Courier New" pitchFamily="34" charset="-122"/>
-                <a:cs typeface="Courier New" pitchFamily="34" charset="-120"/>
-              </a:rPr>
-              <a:t>le squelette</a:t>
-            </a:r>
-            <a:endParaRPr lang="en-US" sz="1050" dirty="0"/>
-          </a:p>
-        </p:txBody>
-      </p:sp>
-      <p:sp>
-        <p:nvSpPr>
-          <p:cNvPr id="9" name="Text 7"/>
-          <p:cNvSpPr/>
-          <p:nvPr/>
-        </p:nvSpPr>
-        <p:spPr>
-          <a:xfrm>
-            <a:off x="914400" y="2167128"/>
-            <a:ext cx="4572000" cy="2743200"/>
-          </a:xfrm>
-          <a:prstGeom prst="rect">
-            <a:avLst/>
-          </a:prstGeom>
-          <a:noFill/>
-          <a:ln/>
-        </p:spPr>
-        <p:txBody>
-          <a:bodyPr wrap="square" lIns="0" tIns="0" rIns="0" bIns="0" rtlCol="0" anchor="t"/>
-          <a:lstStyle/>
-          <a:p>
-            <a:pPr indent="0" marL="0">
-              <a:lnSpc>
-                <a:spcPct val="116000"/>
-              </a:lnSpc>
-              <a:buNone/>
-            </a:pPr>
-            <a:r>
-              <a:rPr lang="en-US" sz="1200" dirty="0">
-                <a:solidFill>
-                  <a:srgbClr val="E8F0EA"/>
-                </a:solidFill>
-                <a:latin typeface="Courier New" pitchFamily="34" charset="0"/>
-                <a:ea typeface="Courier New" pitchFamily="34" charset="-122"/>
-                <a:cs typeface="Courier New" pitchFamily="34" charset="-120"/>
-              </a:rPr>
-              <a:t>projet-final/socle/projet.py</a:t>
-            </a:r>
-            <a:endParaRPr lang="en-US" sz="1200" dirty="0"/>
-          </a:p>
-          <a:p>
-            <a:pPr indent="0" marL="0">
-              <a:lnSpc>
-                <a:spcPct val="116000"/>
-              </a:lnSpc>
-              <a:buNone/>
-            </a:pPr>
-            <a:r>
-              <a:rPr lang="en-US" sz="1200" dirty="0">
-                <a:solidFill>
-                  <a:srgbClr val="000000"/>
-                </a:solidFill>
-                <a:latin typeface="Courier New" pitchFamily="34" charset="0"/>
-                <a:ea typeface="Courier New" pitchFamily="34" charset="-122"/>
-                <a:cs typeface="Courier New" pitchFamily="34" charset="-120"/>
-              </a:rPr>
-              <a:t> </a:t>
-            </a:r>
-            <a:endParaRPr lang="en-US" sz="1200" dirty="0"/>
-          </a:p>
-          <a:p>
-            <a:pPr indent="0" marL="0">
-              <a:lnSpc>
-                <a:spcPct val="116000"/>
-              </a:lnSpc>
-              <a:buNone/>
-            </a:pPr>
-            <a:r>
-              <a:rPr lang="en-US" sz="1200" b="1" dirty="0">
-                <a:solidFill>
-                  <a:srgbClr val="F2C46D"/>
-                </a:solidFill>
-                <a:latin typeface="Courier New" pitchFamily="34" charset="0"/>
-                <a:ea typeface="Courier New" pitchFamily="34" charset="-122"/>
-                <a:cs typeface="Courier New" pitchFamily="34" charset="-120"/>
-              </a:rPr>
-              <a:t>def</a:t>
-            </a:r>
-            <a:pPr indent="0" marL="0">
-              <a:lnSpc>
-                <a:spcPct val="116000"/>
-              </a:lnSpc>
-              <a:buNone/>
-            </a:pPr>
-            <a:r>
-              <a:rPr lang="en-US" sz="1200" dirty="0">
-                <a:solidFill>
-                  <a:srgbClr val="E8F0EA"/>
-                </a:solidFill>
-                <a:latin typeface="Courier New" pitchFamily="34" charset="0"/>
-                <a:ea typeface="Courier New" pitchFamily="34" charset="-122"/>
-                <a:cs typeface="Courier New" pitchFamily="34" charset="-120"/>
-              </a:rPr>
-              <a:t> charger():</a:t>
-            </a:r>
-            <a:pPr indent="0" marL="0">
-              <a:lnSpc>
-                <a:spcPct val="116000"/>
-              </a:lnSpc>
-              <a:buNone/>
-            </a:pPr>
-            <a:r>
-              <a:rPr lang="en-US" sz="1200" dirty="0">
-                <a:solidFill>
-                  <a:srgbClr val="7C9488"/>
-                </a:solidFill>
-                <a:latin typeface="Courier New" pitchFamily="34" charset="0"/>
-                <a:ea typeface="Courier New" pitchFamily="34" charset="-122"/>
-                <a:cs typeface="Courier New" pitchFamily="34" charset="-120"/>
-              </a:rPr>
-              <a:t>    # FOURNI</a:t>
-            </a:r>
-            <a:endParaRPr lang="en-US" sz="1200" dirty="0"/>
-          </a:p>
-          <a:p>
-            <a:pPr indent="0" marL="0">
-              <a:lnSpc>
-                <a:spcPct val="116000"/>
-              </a:lnSpc>
-              <a:buNone/>
-            </a:pPr>
-            <a:r>
-              <a:rPr lang="en-US" sz="1200" b="1" dirty="0">
-                <a:solidFill>
-                  <a:srgbClr val="F2C46D"/>
-                </a:solidFill>
-                <a:latin typeface="Courier New" pitchFamily="34" charset="0"/>
-                <a:ea typeface="Courier New" pitchFamily="34" charset="-122"/>
-                <a:cs typeface="Courier New" pitchFamily="34" charset="-120"/>
-              </a:rPr>
-              <a:t>def</a:t>
-            </a:r>
-            <a:pPr indent="0" marL="0">
-              <a:lnSpc>
-                <a:spcPct val="116000"/>
-              </a:lnSpc>
-              <a:buNone/>
-            </a:pPr>
-            <a:r>
-              <a:rPr lang="en-US" sz="1200" dirty="0">
-                <a:solidFill>
-                  <a:srgbClr val="E8F0EA"/>
-                </a:solidFill>
-                <a:latin typeface="Courier New" pitchFamily="34" charset="0"/>
-                <a:ea typeface="Courier New" pitchFamily="34" charset="-122"/>
-                <a:cs typeface="Courier New" pitchFamily="34" charset="-120"/>
-              </a:rPr>
-              <a:t> valider():</a:t>
-            </a:r>
-            <a:pPr indent="0" marL="0">
-              <a:lnSpc>
-                <a:spcPct val="116000"/>
-              </a:lnSpc>
-              <a:buNone/>
-            </a:pPr>
-            <a:r>
-              <a:rPr lang="en-US" sz="1200" dirty="0">
-                <a:solidFill>
-                  <a:srgbClr val="7C9488"/>
-                </a:solidFill>
-                <a:latin typeface="Courier New" pitchFamily="34" charset="0"/>
-                <a:ea typeface="Courier New" pitchFamily="34" charset="-122"/>
-                <a:cs typeface="Courier New" pitchFamily="34" charset="-120"/>
-              </a:rPr>
-              <a:t>    # À VOUS DE JOUER</a:t>
-            </a:r>
-            <a:endParaRPr lang="en-US" sz="1200" dirty="0"/>
-          </a:p>
-          <a:p>
-            <a:pPr indent="0" marL="0">
-              <a:lnSpc>
-                <a:spcPct val="116000"/>
-              </a:lnSpc>
-              <a:buNone/>
-            </a:pPr>
-            <a:r>
-              <a:rPr lang="en-US" sz="1200" b="1" dirty="0">
-                <a:solidFill>
-                  <a:srgbClr val="F2C46D"/>
-                </a:solidFill>
-                <a:latin typeface="Courier New" pitchFamily="34" charset="0"/>
-                <a:ea typeface="Courier New" pitchFamily="34" charset="-122"/>
-                <a:cs typeface="Courier New" pitchFamily="34" charset="-120"/>
-              </a:rPr>
-              <a:t>def</a:t>
-            </a:r>
-            <a:pPr indent="0" marL="0">
-              <a:lnSpc>
-                <a:spcPct val="116000"/>
-              </a:lnSpc>
-              <a:buNone/>
-            </a:pPr>
-            <a:r>
-              <a:rPr lang="en-US" sz="1200" dirty="0">
-                <a:solidFill>
-                  <a:srgbClr val="E8F0EA"/>
-                </a:solidFill>
-                <a:latin typeface="Courier New" pitchFamily="34" charset="0"/>
-                <a:ea typeface="Courier New" pitchFamily="34" charset="-122"/>
-                <a:cs typeface="Courier New" pitchFamily="34" charset="-120"/>
-              </a:rPr>
-              <a:t> traiter():</a:t>
-            </a:r>
-            <a:pPr indent="0" marL="0">
-              <a:lnSpc>
-                <a:spcPct val="116000"/>
-              </a:lnSpc>
-              <a:buNone/>
-            </a:pPr>
-            <a:r>
-              <a:rPr lang="en-US" sz="1200" dirty="0">
-                <a:solidFill>
-                  <a:srgbClr val="7C9488"/>
-                </a:solidFill>
-                <a:latin typeface="Courier New" pitchFamily="34" charset="0"/>
-                <a:ea typeface="Courier New" pitchFamily="34" charset="-122"/>
-                <a:cs typeface="Courier New" pitchFamily="34" charset="-120"/>
-              </a:rPr>
-              <a:t>    # À VOUS DE JOUER</a:t>
-            </a:r>
-            <a:endParaRPr lang="en-US" sz="1200" dirty="0"/>
-          </a:p>
-          <a:p>
-            <a:pPr indent="0" marL="0">
-              <a:lnSpc>
-                <a:spcPct val="116000"/>
-              </a:lnSpc>
-              <a:buNone/>
-            </a:pPr>
-            <a:r>
-              <a:rPr lang="en-US" sz="1200" b="1" dirty="0">
-                <a:solidFill>
-                  <a:srgbClr val="F2C46D"/>
-                </a:solidFill>
-                <a:latin typeface="Courier New" pitchFamily="34" charset="0"/>
-                <a:ea typeface="Courier New" pitchFamily="34" charset="-122"/>
-                <a:cs typeface="Courier New" pitchFamily="34" charset="-120"/>
-              </a:rPr>
-              <a:t>def</a:t>
-            </a:r>
-            <a:pPr indent="0" marL="0">
-              <a:lnSpc>
-                <a:spcPct val="116000"/>
-              </a:lnSpc>
-              <a:buNone/>
-            </a:pPr>
-            <a:r>
-              <a:rPr lang="en-US" sz="1200" dirty="0">
-                <a:solidFill>
-                  <a:srgbClr val="E8F0EA"/>
-                </a:solidFill>
-                <a:latin typeface="Courier New" pitchFamily="34" charset="0"/>
-                <a:ea typeface="Courier New" pitchFamily="34" charset="-122"/>
-                <a:cs typeface="Courier New" pitchFamily="34" charset="-120"/>
-              </a:rPr>
-              <a:t> restituer():</a:t>
-            </a:r>
-            <a:pPr indent="0" marL="0">
-              <a:lnSpc>
-                <a:spcPct val="116000"/>
-              </a:lnSpc>
-              <a:buNone/>
-            </a:pPr>
-            <a:r>
-              <a:rPr lang="en-US" sz="1200" dirty="0">
-                <a:solidFill>
-                  <a:srgbClr val="7C9488"/>
-                </a:solidFill>
-                <a:latin typeface="Courier New" pitchFamily="34" charset="0"/>
-                <a:ea typeface="Courier New" pitchFamily="34" charset="-122"/>
-                <a:cs typeface="Courier New" pitchFamily="34" charset="-120"/>
-              </a:rPr>
-              <a:t>  # À VOUS DE JOUER</a:t>
-            </a:r>
-            <a:endParaRPr lang="en-US" sz="1200" dirty="0"/>
-          </a:p>
-          <a:p>
-            <a:pPr indent="0" marL="0">
-              <a:lnSpc>
-                <a:spcPct val="116000"/>
-              </a:lnSpc>
-              <a:buNone/>
-            </a:pPr>
-            <a:r>
-              <a:rPr lang="en-US" sz="1200" b="1" dirty="0">
-                <a:solidFill>
-                  <a:srgbClr val="F2C46D"/>
-                </a:solidFill>
-                <a:latin typeface="Courier New" pitchFamily="34" charset="0"/>
-                <a:ea typeface="Courier New" pitchFamily="34" charset="-122"/>
-                <a:cs typeface="Courier New" pitchFamily="34" charset="-120"/>
-              </a:rPr>
-              <a:t>def</a:t>
-            </a:r>
-            <a:pPr indent="0" marL="0">
-              <a:lnSpc>
-                <a:spcPct val="116000"/>
-              </a:lnSpc>
-              <a:buNone/>
-            </a:pPr>
-            <a:r>
-              <a:rPr lang="en-US" sz="1200" dirty="0">
-                <a:solidFill>
-                  <a:srgbClr val="E8F0EA"/>
-                </a:solidFill>
-                <a:latin typeface="Courier New" pitchFamily="34" charset="0"/>
-                <a:ea typeface="Courier New" pitchFamily="34" charset="-122"/>
-                <a:cs typeface="Courier New" pitchFamily="34" charset="-120"/>
-              </a:rPr>
-              <a:t> main():</a:t>
-            </a:r>
-            <a:pPr indent="0" marL="0">
-              <a:lnSpc>
-                <a:spcPct val="116000"/>
-              </a:lnSpc>
-              <a:buNone/>
-            </a:pPr>
-            <a:r>
-              <a:rPr lang="en-US" sz="1200" dirty="0">
-                <a:solidFill>
-                  <a:srgbClr val="7C9488"/>
-                </a:solidFill>
-                <a:latin typeface="Courier New" pitchFamily="34" charset="0"/>
-                <a:ea typeface="Courier New" pitchFamily="34" charset="-122"/>
-                <a:cs typeface="Courier New" pitchFamily="34" charset="-120"/>
-              </a:rPr>
-              <a:t>       # FOURNI</a:t>
-            </a:r>
-            <a:endParaRPr lang="en-US" sz="1200" dirty="0"/>
-          </a:p>
-        </p:txBody>
-      </p:sp>
-      <p:sp>
-        <p:nvSpPr>
-          <p:cNvPr id="10" name="Shape 8"/>
-          <p:cNvSpPr/>
-          <p:nvPr/>
-        </p:nvSpPr>
-        <p:spPr>
-          <a:xfrm>
-            <a:off x="6309360" y="1874520"/>
-            <a:ext cx="411480" cy="411480"/>
-          </a:xfrm>
-          <a:prstGeom prst="ellipse">
-            <a:avLst/>
-          </a:prstGeom>
-          <a:solidFill>
-            <a:srgbClr val="1E7A50"/>
-          </a:solidFill>
-          <a:ln/>
-        </p:spPr>
-      </p:sp>
       <p:pic>
         <p:nvPicPr>
-          <p:cNvPr id="11" name="Image 0" descr="icons/check.png">    </p:cNvPr>
+          <p:cNvPr id="4" name="Image 0" descr="logo-dgi.png">    </p:cNvPr>
           <p:cNvPicPr>
             <a:picLocks noChangeAspect="1"/>
           </p:cNvPicPr>
@@ -7703,8 +7394,8 @@
         </p:blipFill>
         <p:spPr>
           <a:xfrm>
-            <a:off x="6416345" y="1981505"/>
-            <a:ext cx="197510" cy="197510"/>
+            <a:off x="10744200" y="384048"/>
+            <a:ext cx="1051560" cy="795528"/>
           </a:xfrm>
           <a:prstGeom prst="rect">
             <a:avLst/>
@@ -7713,14 +7404,96 @@
       </p:pic>
       <p:sp>
         <p:nvSpPr>
-          <p:cNvPr id="12" name="Text 9"/>
-          <p:cNvSpPr/>
-          <p:nvPr/>
-        </p:nvSpPr>
-        <p:spPr>
-          <a:xfrm>
-            <a:off x="6903720" y="1801368"/>
-            <a:ext cx="4800600" cy="960120"/>
+          <p:cNvPr id="5" name="Shape 2"/>
+          <p:cNvSpPr/>
+          <p:nvPr/>
+        </p:nvSpPr>
+        <p:spPr>
+          <a:xfrm>
+            <a:off x="640080" y="1783080"/>
+            <a:ext cx="5120640" cy="3291840"/>
+          </a:xfrm>
+          <a:prstGeom prst="roundRect">
+            <a:avLst>
+              <a:gd name="adj" fmla="val 2222"/>
+            </a:avLst>
+          </a:prstGeom>
+          <a:solidFill>
+            <a:srgbClr val="0F2418"/>
+          </a:solidFill>
+          <a:ln/>
+        </p:spPr>
+      </p:sp>
+      <p:sp>
+        <p:nvSpPr>
+          <p:cNvPr id="6" name="Shape 3"/>
+          <p:cNvSpPr/>
+          <p:nvPr/>
+        </p:nvSpPr>
+        <p:spPr>
+          <a:xfrm>
+            <a:off x="841248" y="1947672"/>
+            <a:ext cx="109728" cy="109728"/>
+          </a:xfrm>
+          <a:prstGeom prst="ellipse">
+            <a:avLst/>
+          </a:prstGeom>
+          <a:solidFill>
+            <a:srgbClr val="E06C60"/>
+          </a:solidFill>
+          <a:ln/>
+        </p:spPr>
+      </p:sp>
+      <p:sp>
+        <p:nvSpPr>
+          <p:cNvPr id="7" name="Shape 4"/>
+          <p:cNvSpPr/>
+          <p:nvPr/>
+        </p:nvSpPr>
+        <p:spPr>
+          <a:xfrm>
+            <a:off x="1024128" y="1947672"/>
+            <a:ext cx="109728" cy="109728"/>
+          </a:xfrm>
+          <a:prstGeom prst="ellipse">
+            <a:avLst/>
+          </a:prstGeom>
+          <a:solidFill>
+            <a:srgbClr val="C79100"/>
+          </a:solidFill>
+          <a:ln/>
+        </p:spPr>
+      </p:sp>
+      <p:sp>
+        <p:nvSpPr>
+          <p:cNvPr id="8" name="Shape 5"/>
+          <p:cNvSpPr/>
+          <p:nvPr/>
+        </p:nvSpPr>
+        <p:spPr>
+          <a:xfrm>
+            <a:off x="1207008" y="1947672"/>
+            <a:ext cx="109728" cy="109728"/>
+          </a:xfrm>
+          <a:prstGeom prst="ellipse">
+            <a:avLst/>
+          </a:prstGeom>
+          <a:solidFill>
+            <a:srgbClr val="61B888"/>
+          </a:solidFill>
+          <a:ln/>
+        </p:spPr>
+      </p:sp>
+      <p:sp>
+        <p:nvSpPr>
+          <p:cNvPr id="9" name="Text 6"/>
+          <p:cNvSpPr/>
+          <p:nvPr/>
+        </p:nvSpPr>
+        <p:spPr>
+          <a:xfrm>
+            <a:off x="1417320" y="1874520"/>
+            <a:ext cx="4206240" cy="274320"/>
           </a:xfrm>
           <a:prstGeom prst="rect">
             <a:avLst/>
@@ -7732,70 +7505,379 @@
           <a:bodyPr wrap="square" lIns="0" tIns="0" rIns="0" bIns="0" rtlCol="0" anchor="ctr"/>
           <a:lstStyle/>
           <a:p>
+            <a:pPr algn="r" indent="0" marL="0">
+              <a:buNone/>
+            </a:pPr>
+            <a:r>
+              <a:rPr lang="en-US" sz="1050" dirty="0">
+                <a:solidFill>
+                  <a:srgbClr val="9FBFAF"/>
+                </a:solidFill>
+                <a:latin typeface="Courier New" pitchFamily="34" charset="0"/>
+                <a:ea typeface="Courier New" pitchFamily="34" charset="-122"/>
+                <a:cs typeface="Courier New" pitchFamily="34" charset="-120"/>
+              </a:rPr>
+              <a:t>le squelette</a:t>
+            </a:r>
+            <a:endParaRPr lang="en-US" sz="1050" dirty="0"/>
+          </a:p>
+        </p:txBody>
+      </p:sp>
+      <p:sp>
+        <p:nvSpPr>
+          <p:cNvPr id="10" name="Text 7"/>
+          <p:cNvSpPr/>
+          <p:nvPr/>
+        </p:nvSpPr>
+        <p:spPr>
+          <a:xfrm>
+            <a:off x="914400" y="2167128"/>
+            <a:ext cx="4572000" cy="2743200"/>
+          </a:xfrm>
+          <a:prstGeom prst="rect">
+            <a:avLst/>
+          </a:prstGeom>
+          <a:noFill/>
+          <a:ln/>
+        </p:spPr>
+        <p:txBody>
+          <a:bodyPr wrap="square" lIns="0" tIns="0" rIns="0" bIns="0" rtlCol="0" anchor="t"/>
+          <a:lstStyle/>
+          <a:p>
             <a:pPr indent="0" marL="0">
               <a:lnSpc>
-                <a:spcPct val="105000"/>
+                <a:spcPct val="116000"/>
               </a:lnSpc>
               <a:buNone/>
             </a:pPr>
             <a:r>
-              <a:rPr lang="en-US" sz="1450" b="1" dirty="0">
-                <a:solidFill>
-                  <a:srgbClr val="1C2A24"/>
-                </a:solidFill>
-                <a:latin typeface="Calibri" pitchFamily="34" charset="0"/>
-                <a:ea typeface="Calibri" pitchFamily="34" charset="-122"/>
-                <a:cs typeface="Calibri" pitchFamily="34" charset="-120"/>
-              </a:rPr>
-              <a:t>La structure est imposée</a:t>
-            </a:r>
-            <a:endParaRPr lang="en-US" sz="1450" dirty="0"/>
+              <a:rPr lang="en-US" sz="1200" dirty="0">
+                <a:solidFill>
+                  <a:srgbClr val="E8F0EA"/>
+                </a:solidFill>
+                <a:latin typeface="Courier New" pitchFamily="34" charset="0"/>
+                <a:ea typeface="Courier New" pitchFamily="34" charset="-122"/>
+                <a:cs typeface="Courier New" pitchFamily="34" charset="-120"/>
+              </a:rPr>
+              <a:t>projet-final/socle/projet.py</a:t>
+            </a:r>
+            <a:endParaRPr lang="en-US" sz="1200" dirty="0"/>
           </a:p>
           <a:p>
             <a:pPr indent="0" marL="0">
               <a:lnSpc>
-                <a:spcPct val="105000"/>
+                <a:spcPct val="116000"/>
               </a:lnSpc>
               <a:buNone/>
             </a:pPr>
             <a:r>
-              <a:rPr lang="en-US" sz="1250" dirty="0">
-                <a:solidFill>
-                  <a:srgbClr val="5C6B63"/>
-                </a:solidFill>
-                <a:latin typeface="Calibri" pitchFamily="34" charset="0"/>
-                <a:ea typeface="Calibri" pitchFamily="34" charset="-122"/>
-                <a:cs typeface="Calibri" pitchFamily="34" charset="-120"/>
-              </a:rPr>
-              <a:t>Quatre fonctions, un main : comme pipeline.py.</a:t>
-            </a:r>
-            <a:endParaRPr lang="en-US" sz="1450" dirty="0"/>
-          </a:p>
-        </p:txBody>
-      </p:sp>
-      <p:sp>
-        <p:nvSpPr>
-          <p:cNvPr id="13" name="Shape 10"/>
-          <p:cNvSpPr/>
-          <p:nvPr/>
-        </p:nvSpPr>
-        <p:spPr>
-          <a:xfrm>
-            <a:off x="6309360" y="2926080"/>
+              <a:rPr lang="en-US" sz="1200" dirty="0">
+                <a:solidFill>
+                  <a:srgbClr val="000000"/>
+                </a:solidFill>
+                <a:latin typeface="Courier New" pitchFamily="34" charset="0"/>
+                <a:ea typeface="Courier New" pitchFamily="34" charset="-122"/>
+                <a:cs typeface="Courier New" pitchFamily="34" charset="-120"/>
+              </a:rPr>
+              <a:t> </a:t>
+            </a:r>
+            <a:endParaRPr lang="en-US" sz="1200" dirty="0"/>
+          </a:p>
+          <a:p>
+            <a:pPr indent="0" marL="0">
+              <a:lnSpc>
+                <a:spcPct val="116000"/>
+              </a:lnSpc>
+              <a:buNone/>
+            </a:pPr>
+            <a:r>
+              <a:rPr lang="en-US" sz="1200" b="1" dirty="0">
+                <a:solidFill>
+                  <a:srgbClr val="F2C46D"/>
+                </a:solidFill>
+                <a:latin typeface="Courier New" pitchFamily="34" charset="0"/>
+                <a:ea typeface="Courier New" pitchFamily="34" charset="-122"/>
+                <a:cs typeface="Courier New" pitchFamily="34" charset="-120"/>
+              </a:rPr>
+              <a:t>def</a:t>
+            </a:r>
+            <a:pPr indent="0" marL="0">
+              <a:lnSpc>
+                <a:spcPct val="116000"/>
+              </a:lnSpc>
+              <a:buNone/>
+            </a:pPr>
+            <a:r>
+              <a:rPr lang="en-US" sz="1200" dirty="0">
+                <a:solidFill>
+                  <a:srgbClr val="E8F0EA"/>
+                </a:solidFill>
+                <a:latin typeface="Courier New" pitchFamily="34" charset="0"/>
+                <a:ea typeface="Courier New" pitchFamily="34" charset="-122"/>
+                <a:cs typeface="Courier New" pitchFamily="34" charset="-120"/>
+              </a:rPr>
+              <a:t> charger():</a:t>
+            </a:r>
+            <a:pPr indent="0" marL="0">
+              <a:lnSpc>
+                <a:spcPct val="116000"/>
+              </a:lnSpc>
+              <a:buNone/>
+            </a:pPr>
+            <a:r>
+              <a:rPr lang="en-US" sz="1200" dirty="0">
+                <a:solidFill>
+                  <a:srgbClr val="7C9488"/>
+                </a:solidFill>
+                <a:latin typeface="Courier New" pitchFamily="34" charset="0"/>
+                <a:ea typeface="Courier New" pitchFamily="34" charset="-122"/>
+                <a:cs typeface="Courier New" pitchFamily="34" charset="-120"/>
+              </a:rPr>
+              <a:t>    # FOURNI</a:t>
+            </a:r>
+            <a:endParaRPr lang="en-US" sz="1200" dirty="0"/>
+          </a:p>
+          <a:p>
+            <a:pPr indent="0" marL="0">
+              <a:lnSpc>
+                <a:spcPct val="116000"/>
+              </a:lnSpc>
+              <a:buNone/>
+            </a:pPr>
+            <a:r>
+              <a:rPr lang="en-US" sz="1200" b="1" dirty="0">
+                <a:solidFill>
+                  <a:srgbClr val="F2C46D"/>
+                </a:solidFill>
+                <a:latin typeface="Courier New" pitchFamily="34" charset="0"/>
+                <a:ea typeface="Courier New" pitchFamily="34" charset="-122"/>
+                <a:cs typeface="Courier New" pitchFamily="34" charset="-120"/>
+              </a:rPr>
+              <a:t>def</a:t>
+            </a:r>
+            <a:pPr indent="0" marL="0">
+              <a:lnSpc>
+                <a:spcPct val="116000"/>
+              </a:lnSpc>
+              <a:buNone/>
+            </a:pPr>
+            <a:r>
+              <a:rPr lang="en-US" sz="1200" dirty="0">
+                <a:solidFill>
+                  <a:srgbClr val="E8F0EA"/>
+                </a:solidFill>
+                <a:latin typeface="Courier New" pitchFamily="34" charset="0"/>
+                <a:ea typeface="Courier New" pitchFamily="34" charset="-122"/>
+                <a:cs typeface="Courier New" pitchFamily="34" charset="-120"/>
+              </a:rPr>
+              <a:t> valider():</a:t>
+            </a:r>
+            <a:pPr indent="0" marL="0">
+              <a:lnSpc>
+                <a:spcPct val="116000"/>
+              </a:lnSpc>
+              <a:buNone/>
+            </a:pPr>
+            <a:r>
+              <a:rPr lang="en-US" sz="1200" dirty="0">
+                <a:solidFill>
+                  <a:srgbClr val="7C9488"/>
+                </a:solidFill>
+                <a:latin typeface="Courier New" pitchFamily="34" charset="0"/>
+                <a:ea typeface="Courier New" pitchFamily="34" charset="-122"/>
+                <a:cs typeface="Courier New" pitchFamily="34" charset="-120"/>
+              </a:rPr>
+              <a:t>    # À VOUS DE JOUER</a:t>
+            </a:r>
+            <a:endParaRPr lang="en-US" sz="1200" dirty="0"/>
+          </a:p>
+          <a:p>
+            <a:pPr indent="0" marL="0">
+              <a:lnSpc>
+                <a:spcPct val="116000"/>
+              </a:lnSpc>
+              <a:buNone/>
+            </a:pPr>
+            <a:r>
+              <a:rPr lang="en-US" sz="1200" b="1" dirty="0">
+                <a:solidFill>
+                  <a:srgbClr val="F2C46D"/>
+                </a:solidFill>
+                <a:latin typeface="Courier New" pitchFamily="34" charset="0"/>
+                <a:ea typeface="Courier New" pitchFamily="34" charset="-122"/>
+                <a:cs typeface="Courier New" pitchFamily="34" charset="-120"/>
+              </a:rPr>
+              <a:t>def</a:t>
+            </a:r>
+            <a:pPr indent="0" marL="0">
+              <a:lnSpc>
+                <a:spcPct val="116000"/>
+              </a:lnSpc>
+              <a:buNone/>
+            </a:pPr>
+            <a:r>
+              <a:rPr lang="en-US" sz="1200" dirty="0">
+                <a:solidFill>
+                  <a:srgbClr val="E8F0EA"/>
+                </a:solidFill>
+                <a:latin typeface="Courier New" pitchFamily="34" charset="0"/>
+                <a:ea typeface="Courier New" pitchFamily="34" charset="-122"/>
+                <a:cs typeface="Courier New" pitchFamily="34" charset="-120"/>
+              </a:rPr>
+              <a:t> traiter():</a:t>
+            </a:r>
+            <a:pPr indent="0" marL="0">
+              <a:lnSpc>
+                <a:spcPct val="116000"/>
+              </a:lnSpc>
+              <a:buNone/>
+            </a:pPr>
+            <a:r>
+              <a:rPr lang="en-US" sz="1200" dirty="0">
+                <a:solidFill>
+                  <a:srgbClr val="7C9488"/>
+                </a:solidFill>
+                <a:latin typeface="Courier New" pitchFamily="34" charset="0"/>
+                <a:ea typeface="Courier New" pitchFamily="34" charset="-122"/>
+                <a:cs typeface="Courier New" pitchFamily="34" charset="-120"/>
+              </a:rPr>
+              <a:t>    # À VOUS DE JOUER</a:t>
+            </a:r>
+            <a:endParaRPr lang="en-US" sz="1200" dirty="0"/>
+          </a:p>
+          <a:p>
+            <a:pPr indent="0" marL="0">
+              <a:lnSpc>
+                <a:spcPct val="116000"/>
+              </a:lnSpc>
+              <a:buNone/>
+            </a:pPr>
+            <a:r>
+              <a:rPr lang="en-US" sz="1200" b="1" dirty="0">
+                <a:solidFill>
+                  <a:srgbClr val="F2C46D"/>
+                </a:solidFill>
+                <a:latin typeface="Courier New" pitchFamily="34" charset="0"/>
+                <a:ea typeface="Courier New" pitchFamily="34" charset="-122"/>
+                <a:cs typeface="Courier New" pitchFamily="34" charset="-120"/>
+              </a:rPr>
+              <a:t>def</a:t>
+            </a:r>
+            <a:pPr indent="0" marL="0">
+              <a:lnSpc>
+                <a:spcPct val="116000"/>
+              </a:lnSpc>
+              <a:buNone/>
+            </a:pPr>
+            <a:r>
+              <a:rPr lang="en-US" sz="1200" dirty="0">
+                <a:solidFill>
+                  <a:srgbClr val="E8F0EA"/>
+                </a:solidFill>
+                <a:latin typeface="Courier New" pitchFamily="34" charset="0"/>
+                <a:ea typeface="Courier New" pitchFamily="34" charset="-122"/>
+                <a:cs typeface="Courier New" pitchFamily="34" charset="-120"/>
+              </a:rPr>
+              <a:t> restituer():</a:t>
+            </a:r>
+            <a:pPr indent="0" marL="0">
+              <a:lnSpc>
+                <a:spcPct val="116000"/>
+              </a:lnSpc>
+              <a:buNone/>
+            </a:pPr>
+            <a:r>
+              <a:rPr lang="en-US" sz="1200" dirty="0">
+                <a:solidFill>
+                  <a:srgbClr val="7C9488"/>
+                </a:solidFill>
+                <a:latin typeface="Courier New" pitchFamily="34" charset="0"/>
+                <a:ea typeface="Courier New" pitchFamily="34" charset="-122"/>
+                <a:cs typeface="Courier New" pitchFamily="34" charset="-120"/>
+              </a:rPr>
+              <a:t>  # À VOUS DE JOUER</a:t>
+            </a:r>
+            <a:endParaRPr lang="en-US" sz="1200" dirty="0"/>
+          </a:p>
+          <a:p>
+            <a:pPr indent="0" marL="0">
+              <a:lnSpc>
+                <a:spcPct val="116000"/>
+              </a:lnSpc>
+              <a:buNone/>
+            </a:pPr>
+            <a:r>
+              <a:rPr lang="en-US" sz="1200" b="1" dirty="0">
+                <a:solidFill>
+                  <a:srgbClr val="F2C46D"/>
+                </a:solidFill>
+                <a:latin typeface="Courier New" pitchFamily="34" charset="0"/>
+                <a:ea typeface="Courier New" pitchFamily="34" charset="-122"/>
+                <a:cs typeface="Courier New" pitchFamily="34" charset="-120"/>
+              </a:rPr>
+              <a:t>def</a:t>
+            </a:r>
+            <a:pPr indent="0" marL="0">
+              <a:lnSpc>
+                <a:spcPct val="116000"/>
+              </a:lnSpc>
+              <a:buNone/>
+            </a:pPr>
+            <a:r>
+              <a:rPr lang="en-US" sz="1200" dirty="0">
+                <a:solidFill>
+                  <a:srgbClr val="E8F0EA"/>
+                </a:solidFill>
+                <a:latin typeface="Courier New" pitchFamily="34" charset="0"/>
+                <a:ea typeface="Courier New" pitchFamily="34" charset="-122"/>
+                <a:cs typeface="Courier New" pitchFamily="34" charset="-120"/>
+              </a:rPr>
+              <a:t> main():</a:t>
+            </a:r>
+            <a:pPr indent="0" marL="0">
+              <a:lnSpc>
+                <a:spcPct val="116000"/>
+              </a:lnSpc>
+              <a:buNone/>
+            </a:pPr>
+            <a:r>
+              <a:rPr lang="en-US" sz="1200" dirty="0">
+                <a:solidFill>
+                  <a:srgbClr val="7C9488"/>
+                </a:solidFill>
+                <a:latin typeface="Courier New" pitchFamily="34" charset="0"/>
+                <a:ea typeface="Courier New" pitchFamily="34" charset="-122"/>
+                <a:cs typeface="Courier New" pitchFamily="34" charset="-120"/>
+              </a:rPr>
+              <a:t>       # FOURNI</a:t>
+            </a:r>
+            <a:endParaRPr lang="en-US" sz="1200" dirty="0"/>
+          </a:p>
+        </p:txBody>
+      </p:sp>
+      <p:sp>
+        <p:nvSpPr>
+          <p:cNvPr id="11" name="Shape 8"/>
+          <p:cNvSpPr/>
+          <p:nvPr/>
+        </p:nvSpPr>
+        <p:spPr>
+          <a:xfrm>
+            <a:off x="6309360" y="1874520"/>
             <a:ext cx="411480" cy="411480"/>
           </a:xfrm>
           <a:prstGeom prst="ellipse">
             <a:avLst/>
           </a:prstGeom>
           <a:solidFill>
-            <a:srgbClr val="1E7A50"/>
+            <a:srgbClr val="2E9E4F"/>
           </a:solidFill>
           <a:ln/>
         </p:spPr>
       </p:sp>
       <p:pic>
         <p:nvPicPr>
-          <p:cNvPr id="14" name="Image 1" descr="icons/check.png">    </p:cNvPr>
+          <p:cNvPr id="12" name="Image 1" descr="icons/check.png">    </p:cNvPr>
           <p:cNvPicPr>
             <a:picLocks noChangeAspect="1"/>
           </p:cNvPicPr>
@@ -7809,7 +7891,7 @@
         </p:blipFill>
         <p:spPr>
           <a:xfrm>
-            <a:off x="6416345" y="3033065"/>
+            <a:off x="6416345" y="1981505"/>
             <a:ext cx="197510" cy="197510"/>
           </a:xfrm>
           <a:prstGeom prst="rect">
@@ -7819,13 +7901,13 @@
       </p:pic>
       <p:sp>
         <p:nvSpPr>
-          <p:cNvPr id="15" name="Text 11"/>
-          <p:cNvSpPr/>
-          <p:nvPr/>
-        </p:nvSpPr>
-        <p:spPr>
-          <a:xfrm>
-            <a:off x="6903720" y="2852928"/>
+          <p:cNvPr id="13" name="Text 9"/>
+          <p:cNvSpPr/>
+          <p:nvPr/>
+        </p:nvSpPr>
+        <p:spPr>
+          <a:xfrm>
+            <a:off x="6903720" y="1801368"/>
             <a:ext cx="4800600" cy="960120"/>
           </a:xfrm>
           <a:prstGeom prst="rect">
@@ -7853,7 +7935,7 @@
                 <a:ea typeface="Calibri" pitchFamily="34" charset="-122"/>
                 <a:cs typeface="Calibri" pitchFamily="34" charset="-120"/>
               </a:rPr>
-              <a:t>Remplir dans l’ordre</a:t>
+              <a:t>La structure est imposée</a:t>
             </a:r>
             <a:endParaRPr lang="en-US" sz="1450" dirty="0"/>
           </a:p>
@@ -7873,7 +7955,7 @@
                 <a:ea typeface="Calibri" pitchFamily="34" charset="-122"/>
                 <a:cs typeface="Calibri" pitchFamily="34" charset="-120"/>
               </a:rPr>
-              <a:t>valider → traiter → restituer → options argparse.</a:t>
+              <a:t>Quatre fonctions, un main : comme pipeline.py.</a:t>
             </a:r>
             <a:endParaRPr lang="en-US" sz="1450" dirty="0"/>
           </a:p>
@@ -7881,27 +7963,27 @@
       </p:sp>
       <p:sp>
         <p:nvSpPr>
-          <p:cNvPr id="16" name="Shape 12"/>
-          <p:cNvSpPr/>
-          <p:nvPr/>
-        </p:nvSpPr>
-        <p:spPr>
-          <a:xfrm>
-            <a:off x="6309360" y="3977640"/>
+          <p:cNvPr id="14" name="Shape 10"/>
+          <p:cNvSpPr/>
+          <p:nvPr/>
+        </p:nvSpPr>
+        <p:spPr>
+          <a:xfrm>
+            <a:off x="6309360" y="2926080"/>
             <a:ext cx="411480" cy="411480"/>
           </a:xfrm>
           <a:prstGeom prst="ellipse">
             <a:avLst/>
           </a:prstGeom>
           <a:solidFill>
-            <a:srgbClr val="1E7A50"/>
+            <a:srgbClr val="2E9E4F"/>
           </a:solidFill>
           <a:ln/>
         </p:spPr>
       </p:sp>
       <p:pic>
         <p:nvPicPr>
-          <p:cNvPr id="17" name="Image 2" descr="icons/check.png">    </p:cNvPr>
+          <p:cNvPr id="15" name="Image 2" descr="icons/check.png">    </p:cNvPr>
           <p:cNvPicPr>
             <a:picLocks noChangeAspect="1"/>
           </p:cNvPicPr>
@@ -7915,7 +7997,7 @@
         </p:blipFill>
         <p:spPr>
           <a:xfrm>
-            <a:off x="6416345" y="4084625"/>
+            <a:off x="6416345" y="3033065"/>
             <a:ext cx="197510" cy="197510"/>
           </a:xfrm>
           <a:prstGeom prst="rect">
@@ -7925,13 +8007,13 @@
       </p:pic>
       <p:sp>
         <p:nvSpPr>
-          <p:cNvPr id="18" name="Text 13"/>
-          <p:cNvSpPr/>
-          <p:nvPr/>
-        </p:nvSpPr>
-        <p:spPr>
-          <a:xfrm>
-            <a:off x="6903720" y="3904488"/>
+          <p:cNvPr id="16" name="Text 11"/>
+          <p:cNvSpPr/>
+          <p:nvPr/>
+        </p:nvSpPr>
+        <p:spPr>
+          <a:xfrm>
+            <a:off x="6903720" y="2852928"/>
             <a:ext cx="4800600" cy="960120"/>
           </a:xfrm>
           <a:prstGeom prst="rect">
@@ -7959,7 +8041,7 @@
                 <a:ea typeface="Calibri" pitchFamily="34" charset="-122"/>
                 <a:cs typeface="Calibri" pitchFamily="34" charset="-120"/>
               </a:rPr>
-              <a:t>Interdits</a:t>
+              <a:t>Remplir dans l’ordre</a:t>
             </a:r>
             <a:endParaRPr lang="en-US" sz="1450" dirty="0"/>
           </a:p>
@@ -7979,7 +8061,7 @@
                 <a:ea typeface="Calibri" pitchFamily="34" charset="-122"/>
                 <a:cs typeface="Calibri" pitchFamily="34" charset="-120"/>
               </a:rPr>
-              <a:t>versionner les données produites ; le copier-coller non compris.</a:t>
+              <a:t>valider → traiter → restituer → options argparse.</a:t>
             </a:r>
             <a:endParaRPr lang="en-US" sz="1450" dirty="0"/>
           </a:p>
@@ -7987,27 +8069,27 @@
       </p:sp>
       <p:sp>
         <p:nvSpPr>
-          <p:cNvPr id="19" name="Shape 14"/>
-          <p:cNvSpPr/>
-          <p:nvPr/>
-        </p:nvSpPr>
-        <p:spPr>
-          <a:xfrm>
-            <a:off x="6309360" y="5029200"/>
+          <p:cNvPr id="17" name="Shape 12"/>
+          <p:cNvSpPr/>
+          <p:nvPr/>
+        </p:nvSpPr>
+        <p:spPr>
+          <a:xfrm>
+            <a:off x="6309360" y="3977640"/>
             <a:ext cx="411480" cy="411480"/>
           </a:xfrm>
           <a:prstGeom prst="ellipse">
             <a:avLst/>
           </a:prstGeom>
           <a:solidFill>
-            <a:srgbClr val="1E7A50"/>
+            <a:srgbClr val="2E9E4F"/>
           </a:solidFill>
           <a:ln/>
         </p:spPr>
       </p:sp>
       <p:pic>
         <p:nvPicPr>
-          <p:cNvPr id="20" name="Image 3" descr="icons/check.png">    </p:cNvPr>
+          <p:cNvPr id="18" name="Image 3" descr="icons/check.png">    </p:cNvPr>
           <p:cNvPicPr>
             <a:picLocks noChangeAspect="1"/>
           </p:cNvPicPr>
@@ -8021,7 +8103,7 @@
         </p:blipFill>
         <p:spPr>
           <a:xfrm>
-            <a:off x="6416345" y="5136185"/>
+            <a:off x="6416345" y="4084625"/>
             <a:ext cx="197510" cy="197510"/>
           </a:xfrm>
           <a:prstGeom prst="rect">
@@ -8031,13 +8113,13 @@
       </p:pic>
       <p:sp>
         <p:nvSpPr>
-          <p:cNvPr id="21" name="Text 15"/>
-          <p:cNvSpPr/>
-          <p:nvPr/>
-        </p:nvSpPr>
-        <p:spPr>
-          <a:xfrm>
-            <a:off x="6903720" y="4956048"/>
+          <p:cNvPr id="19" name="Text 13"/>
+          <p:cNvSpPr/>
+          <p:nvPr/>
+        </p:nvSpPr>
+        <p:spPr>
+          <a:xfrm>
+            <a:off x="6903720" y="3904488"/>
             <a:ext cx="4800600" cy="960120"/>
           </a:xfrm>
           <a:prstGeom prst="rect">
@@ -8065,7 +8147,7 @@
                 <a:ea typeface="Calibri" pitchFamily="34" charset="-122"/>
                 <a:cs typeface="Calibri" pitchFamily="34" charset="-120"/>
               </a:rPr>
-              <a:t>README de groupe</a:t>
+              <a:t>Interdits</a:t>
             </a:r>
             <a:endParaRPr lang="en-US" sz="1450" dirty="0"/>
           </a:p>
@@ -8085,6 +8167,112 @@
                 <a:ea typeface="Calibri" pitchFamily="34" charset="-122"/>
                 <a:cs typeface="Calibri" pitchFamily="34" charset="-120"/>
               </a:rPr>
+              <a:t>versionner les données produites ; le copier-coller non compris.</a:t>
+            </a:r>
+            <a:endParaRPr lang="en-US" sz="1450" dirty="0"/>
+          </a:p>
+        </p:txBody>
+      </p:sp>
+      <p:sp>
+        <p:nvSpPr>
+          <p:cNvPr id="20" name="Shape 14"/>
+          <p:cNvSpPr/>
+          <p:nvPr/>
+        </p:nvSpPr>
+        <p:spPr>
+          <a:xfrm>
+            <a:off x="6309360" y="5029200"/>
+            <a:ext cx="411480" cy="411480"/>
+          </a:xfrm>
+          <a:prstGeom prst="ellipse">
+            <a:avLst/>
+          </a:prstGeom>
+          <a:solidFill>
+            <a:srgbClr val="2E9E4F"/>
+          </a:solidFill>
+          <a:ln/>
+        </p:spPr>
+      </p:sp>
+      <p:pic>
+        <p:nvPicPr>
+          <p:cNvPr id="21" name="Image 4" descr="icons/check.png">    </p:cNvPr>
+          <p:cNvPicPr>
+            <a:picLocks noChangeAspect="1"/>
+          </p:cNvPicPr>
+          <p:nvPr/>
+        </p:nvPicPr>
+        <p:blipFill>
+          <a:blip r:embed="rId5"/>
+          <a:stretch>
+            <a:fillRect/>
+          </a:stretch>
+        </p:blipFill>
+        <p:spPr>
+          <a:xfrm>
+            <a:off x="6416345" y="5136185"/>
+            <a:ext cx="197510" cy="197510"/>
+          </a:xfrm>
+          <a:prstGeom prst="rect">
+            <a:avLst/>
+          </a:prstGeom>
+        </p:spPr>
+      </p:pic>
+      <p:sp>
+        <p:nvSpPr>
+          <p:cNvPr id="22" name="Text 15"/>
+          <p:cNvSpPr/>
+          <p:nvPr/>
+        </p:nvSpPr>
+        <p:spPr>
+          <a:xfrm>
+            <a:off x="6903720" y="4956048"/>
+            <a:ext cx="4800600" cy="960120"/>
+          </a:xfrm>
+          <a:prstGeom prst="rect">
+            <a:avLst/>
+          </a:prstGeom>
+          <a:noFill/>
+          <a:ln/>
+        </p:spPr>
+        <p:txBody>
+          <a:bodyPr wrap="square" lIns="0" tIns="0" rIns="0" bIns="0" rtlCol="0" anchor="ctr"/>
+          <a:lstStyle/>
+          <a:p>
+            <a:pPr indent="0" marL="0">
+              <a:lnSpc>
+                <a:spcPct val="105000"/>
+              </a:lnSpc>
+              <a:buNone/>
+            </a:pPr>
+            <a:r>
+              <a:rPr lang="en-US" sz="1450" b="1" dirty="0">
+                <a:solidFill>
+                  <a:srgbClr val="1C2A24"/>
+                </a:solidFill>
+                <a:latin typeface="Calibri" pitchFamily="34" charset="0"/>
+                <a:ea typeface="Calibri" pitchFamily="34" charset="-122"/>
+                <a:cs typeface="Calibri" pitchFamily="34" charset="-120"/>
+              </a:rPr>
+              <a:t>README de groupe</a:t>
+            </a:r>
+            <a:endParaRPr lang="en-US" sz="1450" dirty="0"/>
+          </a:p>
+          <a:p>
+            <a:pPr indent="0" marL="0">
+              <a:lnSpc>
+                <a:spcPct val="105000"/>
+              </a:lnSpc>
+              <a:buNone/>
+            </a:pPr>
+            <a:r>
+              <a:rPr lang="en-US" sz="1250" dirty="0">
+                <a:solidFill>
+                  <a:srgbClr val="5C6B63"/>
+                </a:solidFill>
+                <a:latin typeface="Calibri" pitchFamily="34" charset="0"/>
+                <a:ea typeface="Calibri" pitchFamily="34" charset="-122"/>
+                <a:cs typeface="Calibri" pitchFamily="34" charset="-120"/>
+              </a:rPr>
               <a:t>quoi, comment lancer, qui a fait quoi.</a:t>
             </a:r>
             <a:endParaRPr lang="en-US" sz="1450" dirty="0"/>
@@ -8093,7 +8281,7 @@
       </p:sp>
       <p:sp>
         <p:nvSpPr>
-          <p:cNvPr id="22" name="Text 16"/>
+          <p:cNvPr id="23" name="Text 16"/>
           <p:cNvSpPr/>
           <p:nvPr/>
         </p:nvSpPr>
@@ -8121,7 +8309,7 @@
             <a:r>
               <a:rPr lang="en-US" sz="1250" i="1" dirty="0">
                 <a:solidFill>
-                  <a:srgbClr val="14563C"/>
+                  <a:srgbClr val="0E7A3D"/>
                 </a:solidFill>
                 <a:latin typeface="Calibri" pitchFamily="34" charset="0"/>
                 <a:ea typeface="Calibri" pitchFamily="34" charset="-122"/>
@@ -8174,7 +8362,7 @@
         <p:spPr>
           <a:xfrm>
             <a:off x="548640" y="384048"/>
-            <a:ext cx="10972800" cy="320040"/>
+            <a:ext cx="9601200" cy="320040"/>
           </a:xfrm>
           <a:prstGeom prst="rect">
             <a:avLst/>
@@ -8192,7 +8380,7 @@
             <a:r>
               <a:rPr lang="en-US" sz="1300" b="1" spc="200" kern="0" dirty="0">
                 <a:solidFill>
-                  <a:srgbClr val="C9A227"/>
+                  <a:srgbClr val="C79100"/>
                 </a:solidFill>
                 <a:latin typeface="Calibri" pitchFamily="34" charset="0"/>
                 <a:ea typeface="Calibri" pitchFamily="34" charset="-122"/>
@@ -8213,7 +8401,7 @@
         <p:spPr>
           <a:xfrm>
             <a:off x="548640" y="658368"/>
-            <a:ext cx="11064240" cy="731520"/>
+            <a:ext cx="9966960" cy="731520"/>
           </a:xfrm>
           <a:prstGeom prst="rect">
             <a:avLst/>
@@ -8231,7 +8419,7 @@
             <a:r>
               <a:rPr lang="en-US" sz="3400" b="1" dirty="0">
                 <a:solidFill>
-                  <a:srgbClr val="14563C"/>
+                  <a:srgbClr val="0E7A3D"/>
                 </a:solidFill>
                 <a:latin typeface="Cambria" pitchFamily="34" charset="0"/>
                 <a:ea typeface="Cambria" pitchFamily="34" charset="-122"/>
@@ -8243,6 +8431,30 @@
           </a:p>
         </p:txBody>
       </p:sp>
+      <p:pic>
+        <p:nvPicPr>
+          <p:cNvPr id="4" name="Image 0" descr="logo-dgi.png">    </p:cNvPr>
+          <p:cNvPicPr>
+            <a:picLocks noChangeAspect="1"/>
+          </p:cNvPicPr>
+          <p:nvPr/>
+        </p:nvPicPr>
+        <p:blipFill>
+          <a:blip r:embed="rId1"/>
+          <a:stretch>
+            <a:fillRect/>
+          </a:stretch>
+        </p:blipFill>
+        <p:spPr>
+          <a:xfrm>
+            <a:off x="10744200" y="384048"/>
+            <a:ext cx="1051560" cy="795528"/>
+          </a:xfrm>
+          <a:prstGeom prst="rect">
+            <a:avLst/>
+          </a:prstGeom>
+        </p:spPr>
+      </p:pic>
       <p:graphicFrame>
         <p:nvGraphicFramePr>
           <p:cNvPr id="8" name="Table 0"/>
@@ -8334,7 +8546,7 @@
                       <a:tailEnd type="none" w="med" len="med"/>
                     </a:lnB>
                     <a:solidFill>
-                      <a:srgbClr val="14563C"/>
+                      <a:srgbClr val="0E7A3D"/>
                     </a:solidFill>
                   </a:tcPr>
                 </a:tc>
@@ -8402,7 +8614,7 @@
                       <a:tailEnd type="none" w="med" len="med"/>
                     </a:lnB>
                     <a:solidFill>
-                      <a:srgbClr val="14563C"/>
+                      <a:srgbClr val="0E7A3D"/>
                     </a:solidFill>
                   </a:tcPr>
                 </a:tc>
@@ -8487,7 +8699,7 @@
                       <a:r>
                         <a:rPr lang="en-US" sz="1600" b="1" dirty="0">
                           <a:solidFill>
-                            <a:srgbClr val="14563C"/>
+                            <a:srgbClr val="0E7A3D"/>
                           </a:solidFill>
                           <a:latin typeface="Calibri" pitchFamily="34" charset="0"/>
                           <a:ea typeface="Calibri" pitchFamily="34" charset="-122"/>
@@ -8610,7 +8822,7 @@
                       <a:tailEnd type="none" w="med" len="med"/>
                     </a:lnB>
                     <a:solidFill>
-                      <a:srgbClr val="EEF4F0"/>
+                      <a:srgbClr val="EEF5EF"/>
                     </a:solidFill>
                   </a:tcPr>
                 </a:tc>
@@ -8625,7 +8837,7 @@
                       <a:r>
                         <a:rPr lang="en-US" sz="1600" b="1" dirty="0">
                           <a:solidFill>
-                            <a:srgbClr val="14563C"/>
+                            <a:srgbClr val="0E7A3D"/>
                           </a:solidFill>
                           <a:latin typeface="Calibri" pitchFamily="34" charset="0"/>
                           <a:ea typeface="Calibri" pitchFamily="34" charset="-122"/>
@@ -8678,7 +8890,7 @@
                       <a:tailEnd type="none" w="med" len="med"/>
                     </a:lnB>
                     <a:solidFill>
-                      <a:srgbClr val="EEF4F0"/>
+                      <a:srgbClr val="EEF5EF"/>
                     </a:solidFill>
                   </a:tcPr>
                 </a:tc>
@@ -8763,7 +8975,7 @@
                       <a:r>
                         <a:rPr lang="en-US" sz="1600" b="1" dirty="0">
                           <a:solidFill>
-                            <a:srgbClr val="14563C"/>
+                            <a:srgbClr val="0E7A3D"/>
                           </a:solidFill>
                           <a:latin typeface="Calibri" pitchFamily="34" charset="0"/>
                           <a:ea typeface="Calibri" pitchFamily="34" charset="-122"/>
@@ -8886,7 +9098,7 @@
                       <a:tailEnd type="none" w="med" len="med"/>
                     </a:lnB>
                     <a:solidFill>
-                      <a:srgbClr val="EEF4F0"/>
+                      <a:srgbClr val="EEF5EF"/>
                     </a:solidFill>
                   </a:tcPr>
                 </a:tc>
@@ -8901,7 +9113,7 @@
                       <a:r>
                         <a:rPr lang="en-US" sz="1600" b="1" dirty="0">
                           <a:solidFill>
-                            <a:srgbClr val="14563C"/>
+                            <a:srgbClr val="0E7A3D"/>
                           </a:solidFill>
                           <a:latin typeface="Calibri" pitchFamily="34" charset="0"/>
                           <a:ea typeface="Calibri" pitchFamily="34" charset="-122"/>
@@ -8954,7 +9166,7 @@
                       <a:tailEnd type="none" w="med" len="med"/>
                     </a:lnB>
                     <a:solidFill>
-                      <a:srgbClr val="EEF4F0"/>
+                      <a:srgbClr val="EEF5EF"/>
                     </a:solidFill>
                   </a:tcPr>
                 </a:tc>
@@ -9039,7 +9251,7 @@
                       <a:r>
                         <a:rPr lang="en-US" sz="1600" b="1" dirty="0">
                           <a:solidFill>
-                            <a:srgbClr val="14563C"/>
+                            <a:srgbClr val="0E7A3D"/>
                           </a:solidFill>
                           <a:latin typeface="Calibri" pitchFamily="34" charset="0"/>
                           <a:ea typeface="Calibri" pitchFamily="34" charset="-122"/>
@@ -9103,7 +9315,7 @@
       </p:graphicFrame>
       <p:sp>
         <p:nvSpPr>
-          <p:cNvPr id="5" name="Shape 2"/>
+          <p:cNvPr id="6" name="Shape 2"/>
           <p:cNvSpPr/>
           <p:nvPr/>
         </p:nvSpPr>
@@ -9118,14 +9330,14 @@
             </a:avLst>
           </a:prstGeom>
           <a:solidFill>
-            <a:srgbClr val="0D3325"/>
+            <a:srgbClr val="0A2E1A"/>
           </a:solidFill>
           <a:ln/>
         </p:spPr>
       </p:sp>
       <p:sp>
         <p:nvSpPr>
-          <p:cNvPr id="6" name="Shape 3"/>
+          <p:cNvPr id="7" name="Shape 3"/>
           <p:cNvSpPr/>
           <p:nvPr/>
         </p:nvSpPr>
@@ -9138,21 +9350,21 @@
             <a:avLst/>
           </a:prstGeom>
           <a:solidFill>
-            <a:srgbClr val="C9A227"/>
+            <a:srgbClr val="C79100"/>
           </a:solidFill>
           <a:ln/>
         </p:spPr>
       </p:sp>
       <p:pic>
         <p:nvPicPr>
-          <p:cNvPr id="7" name="Image 0" descr="icons/award.png">    </p:cNvPr>
+          <p:cNvPr id="8" name="Image 1" descr="icons/award.png">    </p:cNvPr>
           <p:cNvPicPr>
             <a:picLocks noChangeAspect="1"/>
           </p:cNvPicPr>
           <p:nvPr/>
         </p:nvPicPr>
         <p:blipFill>
-          <a:blip r:embed="rId1"/>
+          <a:blip r:embed="rId2"/>
           <a:stretch>
             <a:fillRect/>
           </a:stretch>
@@ -9169,7 +9381,7 @@
       </p:pic>
       <p:sp>
         <p:nvSpPr>
-          <p:cNvPr id="8" name="Text 4"/>
+          <p:cNvPr id="9" name="Text 4"/>
           <p:cNvSpPr/>
           <p:nvPr/>
         </p:nvSpPr>
@@ -9194,7 +9406,7 @@
             <a:r>
               <a:rPr lang="en-US" sz="1300" b="1" dirty="0">
                 <a:solidFill>
-                  <a:srgbClr val="C9A227"/>
+                  <a:srgbClr val="C79100"/>
                 </a:solidFill>
                 <a:latin typeface="Calibri" pitchFamily="34" charset="0"/>
                 <a:ea typeface="Calibri" pitchFamily="34" charset="-122"/>
@@ -9208,7 +9420,7 @@
       </p:sp>
       <p:sp>
         <p:nvSpPr>
-          <p:cNvPr id="9" name="Text 5"/>
+          <p:cNvPr id="10" name="Text 5"/>
           <p:cNvSpPr/>
           <p:nvPr/>
         </p:nvSpPr>
@@ -9247,7 +9459,7 @@
       </p:sp>
       <p:sp>
         <p:nvSpPr>
-          <p:cNvPr id="10" name="Text 6"/>
+          <p:cNvPr id="11" name="Text 6"/>
           <p:cNvSpPr/>
           <p:nvPr/>
         </p:nvSpPr>
@@ -9272,7 +9484,7 @@
             <a:r>
               <a:rPr lang="en-US" sz="1350" i="1" dirty="0">
                 <a:solidFill>
-                  <a:srgbClr val="14563C"/>
+                  <a:srgbClr val="0E7A3D"/>
                 </a:solidFill>
                 <a:latin typeface="Calibri" pitchFamily="34" charset="0"/>
                 <a:ea typeface="Calibri" pitchFamily="34" charset="-122"/>
@@ -9325,7 +9537,7 @@
         <p:spPr>
           <a:xfrm>
             <a:off x="548640" y="384048"/>
-            <a:ext cx="10972800" cy="320040"/>
+            <a:ext cx="9601200" cy="320040"/>
           </a:xfrm>
           <a:prstGeom prst="rect">
             <a:avLst/>
@@ -9343,7 +9555,7 @@
             <a:r>
               <a:rPr lang="en-US" sz="1300" b="1" spc="200" kern="0" dirty="0">
                 <a:solidFill>
-                  <a:srgbClr val="C9A227"/>
+                  <a:srgbClr val="C79100"/>
                 </a:solidFill>
                 <a:latin typeface="Calibri" pitchFamily="34" charset="0"/>
                 <a:ea typeface="Calibri" pitchFamily="34" charset="-122"/>
@@ -9364,7 +9576,7 @@
         <p:spPr>
           <a:xfrm>
             <a:off x="548640" y="658368"/>
-            <a:ext cx="11064240" cy="731520"/>
+            <a:ext cx="9966960" cy="731520"/>
           </a:xfrm>
           <a:prstGeom prst="rect">
             <a:avLst/>
@@ -9382,7 +9594,7 @@
             <a:r>
               <a:rPr lang="en-US" sz="3400" b="1" dirty="0">
                 <a:solidFill>
-                  <a:srgbClr val="14563C"/>
+                  <a:srgbClr val="0E7A3D"/>
                 </a:solidFill>
                 <a:latin typeface="Cambria" pitchFamily="34" charset="0"/>
                 <a:ea typeface="Cambria" pitchFamily="34" charset="-122"/>
@@ -9394,29 +9606,9 @@
           </a:p>
         </p:txBody>
       </p:sp>
-      <p:sp>
-        <p:nvSpPr>
-          <p:cNvPr id="4" name="Shape 2"/>
-          <p:cNvSpPr/>
-          <p:nvPr/>
-        </p:nvSpPr>
-        <p:spPr>
-          <a:xfrm>
-            <a:off x="640080" y="1828800"/>
-            <a:ext cx="502920" cy="502920"/>
-          </a:xfrm>
-          <a:prstGeom prst="ellipse">
-            <a:avLst/>
-          </a:prstGeom>
-          <a:solidFill>
-            <a:srgbClr val="14563C"/>
-          </a:solidFill>
-          <a:ln/>
-        </p:spPr>
-      </p:sp>
       <p:pic>
         <p:nvPicPr>
-          <p:cNvPr id="5" name="Image 0" descr="icons/book.png">    </p:cNvPr>
+          <p:cNvPr id="4" name="Image 0" descr="logo-dgi.png">    </p:cNvPr>
           <p:cNvPicPr>
             <a:picLocks noChangeAspect="1"/>
           </p:cNvPicPr>
@@ -9430,8 +9622,8 @@
         </p:blipFill>
         <p:spPr>
           <a:xfrm>
-            <a:off x="770839" y="1959559"/>
-            <a:ext cx="241402" cy="241402"/>
+            <a:off x="10744200" y="384048"/>
+            <a:ext cx="1051560" cy="795528"/>
           </a:xfrm>
           <a:prstGeom prst="rect">
             <a:avLst/>
@@ -9440,119 +9632,27 @@
       </p:pic>
       <p:sp>
         <p:nvSpPr>
-          <p:cNvPr id="6" name="Text 3"/>
-          <p:cNvSpPr/>
-          <p:nvPr/>
-        </p:nvSpPr>
-        <p:spPr>
-          <a:xfrm>
-            <a:off x="1371600" y="1783080"/>
-            <a:ext cx="1051560" cy="594360"/>
-          </a:xfrm>
-          <a:prstGeom prst="rect">
-            <a:avLst/>
-          </a:prstGeom>
-          <a:noFill/>
-          <a:ln/>
-        </p:spPr>
-        <p:txBody>
-          <a:bodyPr wrap="square" lIns="0" tIns="0" rIns="0" bIns="0" rtlCol="0" anchor="ctr"/>
-          <a:lstStyle/>
-          <a:p>
-            <a:pPr indent="0" marL="0">
-              <a:buNone/>
-            </a:pPr>
-            <a:r>
-              <a:rPr lang="en-US" sz="1900" b="1" dirty="0">
-                <a:solidFill>
-                  <a:srgbClr val="14563C"/>
-                </a:solidFill>
-                <a:latin typeface="Cambria" pitchFamily="34" charset="0"/>
-                <a:ea typeface="Cambria" pitchFamily="34" charset="-122"/>
-                <a:cs typeface="Cambria" pitchFamily="34" charset="-120"/>
-              </a:rPr>
-              <a:t>2 min</a:t>
-            </a:r>
-            <a:endParaRPr lang="en-US" sz="1900" dirty="0"/>
-          </a:p>
-        </p:txBody>
-      </p:sp>
-      <p:sp>
-        <p:nvSpPr>
-          <p:cNvPr id="7" name="Text 4"/>
-          <p:cNvSpPr/>
-          <p:nvPr/>
-        </p:nvSpPr>
-        <p:spPr>
-          <a:xfrm>
-            <a:off x="2514600" y="1783080"/>
-            <a:ext cx="9052560" cy="594360"/>
-          </a:xfrm>
-          <a:prstGeom prst="rect">
-            <a:avLst/>
-          </a:prstGeom>
-          <a:noFill/>
-          <a:ln/>
-        </p:spPr>
-        <p:txBody>
-          <a:bodyPr wrap="square" lIns="0" tIns="0" rIns="0" bIns="0" rtlCol="0" anchor="ctr"/>
-          <a:lstStyle/>
-          <a:p>
-            <a:pPr indent="0" marL="0">
-              <a:buNone/>
-            </a:pPr>
-            <a:r>
-              <a:rPr lang="en-US" sz="1450" b="1" dirty="0">
-                <a:solidFill>
-                  <a:srgbClr val="1C2A24"/>
-                </a:solidFill>
-                <a:latin typeface="Calibri" pitchFamily="34" charset="0"/>
-                <a:ea typeface="Calibri" pitchFamily="34" charset="-122"/>
-                <a:cs typeface="Calibri" pitchFamily="34" charset="-120"/>
-              </a:rPr>
-              <a:t>Le sujet  —  </a:t>
-            </a:r>
-            <a:pPr indent="0" marL="0">
-              <a:buNone/>
-            </a:pPr>
-            <a:r>
-              <a:rPr lang="en-US" sz="1450" dirty="0">
-                <a:solidFill>
-                  <a:srgbClr val="5C6B63"/>
-                </a:solidFill>
-                <a:latin typeface="Calibri" pitchFamily="34" charset="0"/>
-                <a:ea typeface="Calibri" pitchFamily="34" charset="-122"/>
-                <a:cs typeface="Calibri" pitchFamily="34" charset="-120"/>
-              </a:rPr>
-              <a:t>La question métier, avec vos mots — pas de jargon.</a:t>
-            </a:r>
-            <a:endParaRPr lang="en-US" sz="1450" dirty="0"/>
-          </a:p>
-        </p:txBody>
-      </p:sp>
-      <p:sp>
-        <p:nvSpPr>
-          <p:cNvPr id="8" name="Shape 5"/>
-          <p:cNvSpPr/>
-          <p:nvPr/>
-        </p:nvSpPr>
-        <p:spPr>
-          <a:xfrm>
-            <a:off x="640080" y="2670048"/>
+          <p:cNvPr id="5" name="Shape 2"/>
+          <p:cNvSpPr/>
+          <p:nvPr/>
+        </p:nvSpPr>
+        <p:spPr>
+          <a:xfrm>
+            <a:off x="640080" y="1828800"/>
             <a:ext cx="502920" cy="502920"/>
           </a:xfrm>
           <a:prstGeom prst="ellipse">
             <a:avLst/>
           </a:prstGeom>
           <a:solidFill>
-            <a:srgbClr val="C9A227"/>
+            <a:srgbClr val="0E7A3D"/>
           </a:solidFill>
           <a:ln/>
         </p:spPr>
       </p:sp>
       <p:pic>
         <p:nvPicPr>
-          <p:cNvPr id="9" name="Image 1" descr="icons/terminal.png">    </p:cNvPr>
+          <p:cNvPr id="6" name="Image 1" descr="icons/book.png">    </p:cNvPr>
           <p:cNvPicPr>
             <a:picLocks noChangeAspect="1"/>
           </p:cNvPicPr>
@@ -9566,7 +9666,7 @@
         </p:blipFill>
         <p:spPr>
           <a:xfrm>
-            <a:off x="770839" y="2800807"/>
+            <a:off x="770839" y="1959559"/>
             <a:ext cx="241402" cy="241402"/>
           </a:xfrm>
           <a:prstGeom prst="rect">
@@ -9576,13 +9676,13 @@
       </p:pic>
       <p:sp>
         <p:nvSpPr>
-          <p:cNvPr id="10" name="Text 6"/>
-          <p:cNvSpPr/>
-          <p:nvPr/>
-        </p:nvSpPr>
-        <p:spPr>
-          <a:xfrm>
-            <a:off x="1371600" y="2624328"/>
+          <p:cNvPr id="7" name="Text 3"/>
+          <p:cNvSpPr/>
+          <p:nvPr/>
+        </p:nvSpPr>
+        <p:spPr>
+          <a:xfrm>
+            <a:off x="1371600" y="1783080"/>
             <a:ext cx="1051560" cy="594360"/>
           </a:xfrm>
           <a:prstGeom prst="rect">
@@ -9601,13 +9701,13 @@
             <a:r>
               <a:rPr lang="en-US" sz="1900" b="1" dirty="0">
                 <a:solidFill>
-                  <a:srgbClr val="14563C"/>
+                  <a:srgbClr val="0E7A3D"/>
                 </a:solidFill>
                 <a:latin typeface="Cambria" pitchFamily="34" charset="0"/>
                 <a:ea typeface="Cambria" pitchFamily="34" charset="-122"/>
                 <a:cs typeface="Cambria" pitchFamily="34" charset="-120"/>
               </a:rPr>
-              <a:t>5 min</a:t>
+              <a:t>2 min</a:t>
             </a:r>
             <a:endParaRPr lang="en-US" sz="1900" dirty="0"/>
           </a:p>
@@ -9615,13 +9715,13 @@
       </p:sp>
       <p:sp>
         <p:nvSpPr>
-          <p:cNvPr id="11" name="Text 7"/>
-          <p:cNvSpPr/>
-          <p:nvPr/>
-        </p:nvSpPr>
-        <p:spPr>
-          <a:xfrm>
-            <a:off x="2514600" y="2624328"/>
+          <p:cNvPr id="8" name="Text 4"/>
+          <p:cNvSpPr/>
+          <p:nvPr/>
+        </p:nvSpPr>
+        <p:spPr>
+          <a:xfrm>
+            <a:off x="2514600" y="1783080"/>
             <a:ext cx="9052560" cy="594360"/>
           </a:xfrm>
           <a:prstGeom prst="rect">
@@ -9646,7 +9746,7 @@
                 <a:ea typeface="Calibri" pitchFamily="34" charset="-122"/>
                 <a:cs typeface="Calibri" pitchFamily="34" charset="-120"/>
               </a:rPr>
-              <a:t>La démonstration  —  </a:t>
+              <a:t>Le sujet  —  </a:t>
             </a:r>
             <a:pPr indent="0" marL="0">
               <a:buNone/>
@@ -9660,7 +9760,7 @@
                 <a:ea typeface="Calibri" pitchFamily="34" charset="-122"/>
                 <a:cs typeface="Calibri" pitchFamily="34" charset="-120"/>
               </a:rPr>
-              <a:t>UNE commande, en direct. Le bilan des lignes écartées commenté.</a:t>
+              <a:t>La question métier, avec vos mots — pas de jargon.</a:t>
             </a:r>
             <a:endParaRPr lang="en-US" sz="1450" dirty="0"/>
           </a:p>
@@ -9668,27 +9768,27 @@
       </p:sp>
       <p:sp>
         <p:nvSpPr>
-          <p:cNvPr id="12" name="Shape 8"/>
-          <p:cNvSpPr/>
-          <p:nvPr/>
-        </p:nvSpPr>
-        <p:spPr>
-          <a:xfrm>
-            <a:off x="640080" y="3511296"/>
+          <p:cNvPr id="9" name="Shape 5"/>
+          <p:cNvSpPr/>
+          <p:nvPr/>
+        </p:nvSpPr>
+        <p:spPr>
+          <a:xfrm>
+            <a:off x="640080" y="2670048"/>
             <a:ext cx="502920" cy="502920"/>
           </a:xfrm>
           <a:prstGeom prst="ellipse">
             <a:avLst/>
           </a:prstGeom>
           <a:solidFill>
-            <a:srgbClr val="1E7A50"/>
+            <a:srgbClr val="C79100"/>
           </a:solidFill>
           <a:ln/>
         </p:spPr>
       </p:sp>
       <p:pic>
         <p:nvPicPr>
-          <p:cNvPr id="13" name="Image 2" descr="icons/bulb.png">    </p:cNvPr>
+          <p:cNvPr id="10" name="Image 2" descr="icons/terminal.png">    </p:cNvPr>
           <p:cNvPicPr>
             <a:picLocks noChangeAspect="1"/>
           </p:cNvPicPr>
@@ -9702,7 +9802,7 @@
         </p:blipFill>
         <p:spPr>
           <a:xfrm>
-            <a:off x="770839" y="3642055"/>
+            <a:off x="770839" y="2800807"/>
             <a:ext cx="241402" cy="241402"/>
           </a:xfrm>
           <a:prstGeom prst="rect">
@@ -9712,13 +9812,13 @@
       </p:pic>
       <p:sp>
         <p:nvSpPr>
-          <p:cNvPr id="14" name="Text 9"/>
-          <p:cNvSpPr/>
-          <p:nvPr/>
-        </p:nvSpPr>
-        <p:spPr>
-          <a:xfrm>
-            <a:off x="1371600" y="3465576"/>
+          <p:cNvPr id="11" name="Text 6"/>
+          <p:cNvSpPr/>
+          <p:nvPr/>
+        </p:nvSpPr>
+        <p:spPr>
+          <a:xfrm>
+            <a:off x="1371600" y="2624328"/>
             <a:ext cx="1051560" cy="594360"/>
           </a:xfrm>
           <a:prstGeom prst="rect">
@@ -9737,13 +9837,13 @@
             <a:r>
               <a:rPr lang="en-US" sz="1900" b="1" dirty="0">
                 <a:solidFill>
-                  <a:srgbClr val="14563C"/>
+                  <a:srgbClr val="0E7A3D"/>
                 </a:solidFill>
                 <a:latin typeface="Cambria" pitchFamily="34" charset="0"/>
                 <a:ea typeface="Cambria" pitchFamily="34" charset="-122"/>
                 <a:cs typeface="Cambria" pitchFamily="34" charset="-120"/>
               </a:rPr>
-              <a:t>3 min</a:t>
+              <a:t>5 min</a:t>
             </a:r>
             <a:endParaRPr lang="en-US" sz="1900" dirty="0"/>
           </a:p>
@@ -9751,13 +9851,13 @@
       </p:sp>
       <p:sp>
         <p:nvSpPr>
-          <p:cNvPr id="15" name="Text 10"/>
-          <p:cNvSpPr/>
-          <p:nvPr/>
-        </p:nvSpPr>
-        <p:spPr>
-          <a:xfrm>
-            <a:off x="2514600" y="3465576"/>
+          <p:cNvPr id="12" name="Text 7"/>
+          <p:cNvSpPr/>
+          <p:nvPr/>
+        </p:nvSpPr>
+        <p:spPr>
+          <a:xfrm>
+            <a:off x="2514600" y="2624328"/>
             <a:ext cx="9052560" cy="594360"/>
           </a:xfrm>
           <a:prstGeom prst="rect">
@@ -9782,7 +9882,7 @@
                 <a:ea typeface="Calibri" pitchFamily="34" charset="-122"/>
                 <a:cs typeface="Calibri" pitchFamily="34" charset="-120"/>
               </a:rPr>
-              <a:t>Un choix technique  —  </a:t>
+              <a:t>La démonstration  —  </a:t>
             </a:r>
             <a:pPr indent="0" marL="0">
               <a:buNone/>
@@ -9796,7 +9896,7 @@
                 <a:ea typeface="Calibri" pitchFamily="34" charset="-122"/>
                 <a:cs typeface="Calibri" pitchFamily="34" charset="-120"/>
               </a:rPr>
-              <a:t>Une difficulté rencontrée et comment vous l’avez tranchée.</a:t>
+              <a:t>UNE commande, en direct. Le bilan des lignes écartées commenté.</a:t>
             </a:r>
             <a:endParaRPr lang="en-US" sz="1450" dirty="0"/>
           </a:p>
@@ -9804,27 +9904,27 @@
       </p:sp>
       <p:sp>
         <p:nvSpPr>
-          <p:cNvPr id="16" name="Shape 11"/>
-          <p:cNvSpPr/>
-          <p:nvPr/>
-        </p:nvSpPr>
-        <p:spPr>
-          <a:xfrm>
-            <a:off x="640080" y="4352544"/>
+          <p:cNvPr id="13" name="Shape 8"/>
+          <p:cNvSpPr/>
+          <p:nvPr/>
+        </p:nvSpPr>
+        <p:spPr>
+          <a:xfrm>
+            <a:off x="640080" y="3511296"/>
             <a:ext cx="502920" cy="502920"/>
           </a:xfrm>
           <a:prstGeom prst="ellipse">
             <a:avLst/>
           </a:prstGeom>
           <a:solidFill>
-            <a:srgbClr val="0D3325"/>
+            <a:srgbClr val="2E9E4F"/>
           </a:solidFill>
           <a:ln/>
         </p:spPr>
       </p:sp>
       <p:pic>
         <p:nvPicPr>
-          <p:cNvPr id="17" name="Image 3" descr="icons/comments.png">    </p:cNvPr>
+          <p:cNvPr id="14" name="Image 3" descr="icons/bulb.png">    </p:cNvPr>
           <p:cNvPicPr>
             <a:picLocks noChangeAspect="1"/>
           </p:cNvPicPr>
@@ -9838,7 +9938,7 @@
         </p:blipFill>
         <p:spPr>
           <a:xfrm>
-            <a:off x="770839" y="4483303"/>
+            <a:off x="770839" y="3642055"/>
             <a:ext cx="241402" cy="241402"/>
           </a:xfrm>
           <a:prstGeom prst="rect">
@@ -9848,13 +9948,13 @@
       </p:pic>
       <p:sp>
         <p:nvSpPr>
-          <p:cNvPr id="18" name="Text 12"/>
-          <p:cNvSpPr/>
-          <p:nvPr/>
-        </p:nvSpPr>
-        <p:spPr>
-          <a:xfrm>
-            <a:off x="1371600" y="4306824"/>
+          <p:cNvPr id="15" name="Text 9"/>
+          <p:cNvSpPr/>
+          <p:nvPr/>
+        </p:nvSpPr>
+        <p:spPr>
+          <a:xfrm>
+            <a:off x="1371600" y="3465576"/>
             <a:ext cx="1051560" cy="594360"/>
           </a:xfrm>
           <a:prstGeom prst="rect">
@@ -9873,13 +9973,13 @@
             <a:r>
               <a:rPr lang="en-US" sz="1900" b="1" dirty="0">
                 <a:solidFill>
-                  <a:srgbClr val="14563C"/>
+                  <a:srgbClr val="0E7A3D"/>
                 </a:solidFill>
                 <a:latin typeface="Cambria" pitchFamily="34" charset="0"/>
                 <a:ea typeface="Cambria" pitchFamily="34" charset="-122"/>
                 <a:cs typeface="Cambria" pitchFamily="34" charset="-120"/>
               </a:rPr>
-              <a:t>5 min</a:t>
+              <a:t>3 min</a:t>
             </a:r>
             <a:endParaRPr lang="en-US" sz="1900" dirty="0"/>
           </a:p>
@@ -9887,13 +9987,13 @@
       </p:sp>
       <p:sp>
         <p:nvSpPr>
-          <p:cNvPr id="19" name="Text 13"/>
-          <p:cNvSpPr/>
-          <p:nvPr/>
-        </p:nvSpPr>
-        <p:spPr>
-          <a:xfrm>
-            <a:off x="2514600" y="4306824"/>
+          <p:cNvPr id="16" name="Text 10"/>
+          <p:cNvSpPr/>
+          <p:nvPr/>
+        </p:nvSpPr>
+        <p:spPr>
+          <a:xfrm>
+            <a:off x="2514600" y="3465576"/>
             <a:ext cx="9052560" cy="594360"/>
           </a:xfrm>
           <a:prstGeom prst="rect">
@@ -9918,7 +10018,7 @@
                 <a:ea typeface="Calibri" pitchFamily="34" charset="-122"/>
                 <a:cs typeface="Calibri" pitchFamily="34" charset="-120"/>
               </a:rPr>
-              <a:t>Questions  —  </a:t>
+              <a:t>Un choix technique  —  </a:t>
             </a:r>
             <a:pPr indent="0" marL="0">
               <a:buNone/>
@@ -9932,6 +10032,142 @@
                 <a:ea typeface="Calibri" pitchFamily="34" charset="-122"/>
                 <a:cs typeface="Calibri" pitchFamily="34" charset="-120"/>
               </a:rPr>
+              <a:t>Une difficulté rencontrée et comment vous l’avez tranchée.</a:t>
+            </a:r>
+            <a:endParaRPr lang="en-US" sz="1450" dirty="0"/>
+          </a:p>
+        </p:txBody>
+      </p:sp>
+      <p:sp>
+        <p:nvSpPr>
+          <p:cNvPr id="17" name="Shape 11"/>
+          <p:cNvSpPr/>
+          <p:nvPr/>
+        </p:nvSpPr>
+        <p:spPr>
+          <a:xfrm>
+            <a:off x="640080" y="4352544"/>
+            <a:ext cx="502920" cy="502920"/>
+          </a:xfrm>
+          <a:prstGeom prst="ellipse">
+            <a:avLst/>
+          </a:prstGeom>
+          <a:solidFill>
+            <a:srgbClr val="0A2E1A"/>
+          </a:solidFill>
+          <a:ln/>
+        </p:spPr>
+      </p:sp>
+      <p:pic>
+        <p:nvPicPr>
+          <p:cNvPr id="18" name="Image 4" descr="icons/comments.png">    </p:cNvPr>
+          <p:cNvPicPr>
+            <a:picLocks noChangeAspect="1"/>
+          </p:cNvPicPr>
+          <p:nvPr/>
+        </p:nvPicPr>
+        <p:blipFill>
+          <a:blip r:embed="rId5"/>
+          <a:stretch>
+            <a:fillRect/>
+          </a:stretch>
+        </p:blipFill>
+        <p:spPr>
+          <a:xfrm>
+            <a:off x="770839" y="4483303"/>
+            <a:ext cx="241402" cy="241402"/>
+          </a:xfrm>
+          <a:prstGeom prst="rect">
+            <a:avLst/>
+          </a:prstGeom>
+        </p:spPr>
+      </p:pic>
+      <p:sp>
+        <p:nvSpPr>
+          <p:cNvPr id="19" name="Text 12"/>
+          <p:cNvSpPr/>
+          <p:nvPr/>
+        </p:nvSpPr>
+        <p:spPr>
+          <a:xfrm>
+            <a:off x="1371600" y="4306824"/>
+            <a:ext cx="1051560" cy="594360"/>
+          </a:xfrm>
+          <a:prstGeom prst="rect">
+            <a:avLst/>
+          </a:prstGeom>
+          <a:noFill/>
+          <a:ln/>
+        </p:spPr>
+        <p:txBody>
+          <a:bodyPr wrap="square" lIns="0" tIns="0" rIns="0" bIns="0" rtlCol="0" anchor="ctr"/>
+          <a:lstStyle/>
+          <a:p>
+            <a:pPr indent="0" marL="0">
+              <a:buNone/>
+            </a:pPr>
+            <a:r>
+              <a:rPr lang="en-US" sz="1900" b="1" dirty="0">
+                <a:solidFill>
+                  <a:srgbClr val="0E7A3D"/>
+                </a:solidFill>
+                <a:latin typeface="Cambria" pitchFamily="34" charset="0"/>
+                <a:ea typeface="Cambria" pitchFamily="34" charset="-122"/>
+                <a:cs typeface="Cambria" pitchFamily="34" charset="-120"/>
+              </a:rPr>
+              <a:t>5 min</a:t>
+            </a:r>
+            <a:endParaRPr lang="en-US" sz="1900" dirty="0"/>
+          </a:p>
+        </p:txBody>
+      </p:sp>
+      <p:sp>
+        <p:nvSpPr>
+          <p:cNvPr id="20" name="Text 13"/>
+          <p:cNvSpPr/>
+          <p:nvPr/>
+        </p:nvSpPr>
+        <p:spPr>
+          <a:xfrm>
+            <a:off x="2514600" y="4306824"/>
+            <a:ext cx="9052560" cy="594360"/>
+          </a:xfrm>
+          <a:prstGeom prst="rect">
+            <a:avLst/>
+          </a:prstGeom>
+          <a:noFill/>
+          <a:ln/>
+        </p:spPr>
+        <p:txBody>
+          <a:bodyPr wrap="square" lIns="0" tIns="0" rIns="0" bIns="0" rtlCol="0" anchor="ctr"/>
+          <a:lstStyle/>
+          <a:p>
+            <a:pPr indent="0" marL="0">
+              <a:buNone/>
+            </a:pPr>
+            <a:r>
+              <a:rPr lang="en-US" sz="1450" b="1" dirty="0">
+                <a:solidFill>
+                  <a:srgbClr val="1C2A24"/>
+                </a:solidFill>
+                <a:latin typeface="Calibri" pitchFamily="34" charset="0"/>
+                <a:ea typeface="Calibri" pitchFamily="34" charset="-122"/>
+                <a:cs typeface="Calibri" pitchFamily="34" charset="-120"/>
+              </a:rPr>
+              <a:t>Questions  —  </a:t>
+            </a:r>
+            <a:pPr indent="0" marL="0">
+              <a:buNone/>
+            </a:pPr>
+            <a:r>
+              <a:rPr lang="en-US" sz="1450" dirty="0">
+                <a:solidFill>
+                  <a:srgbClr val="5C6B63"/>
+                </a:solidFill>
+                <a:latin typeface="Calibri" pitchFamily="34" charset="0"/>
+                <a:ea typeface="Calibri" pitchFamily="34" charset="-122"/>
+                <a:cs typeface="Calibri" pitchFamily="34" charset="-120"/>
+              </a:rPr>
               <a:t>Chacun répond sur SA partie — d’où le « qui a fait quoi » du README.</a:t>
             </a:r>
             <a:endParaRPr lang="en-US" sz="1450" dirty="0"/>
@@ -9940,7 +10176,7 @@
       </p:sp>
       <p:sp>
         <p:nvSpPr>
-          <p:cNvPr id="20" name="Shape 14"/>
+          <p:cNvPr id="21" name="Shape 14"/>
           <p:cNvSpPr/>
           <p:nvPr/>
         </p:nvSpPr>
@@ -9955,14 +10191,14 @@
             </a:avLst>
           </a:prstGeom>
           <a:solidFill>
-            <a:srgbClr val="EEF4F0"/>
+            <a:srgbClr val="EEF5EF"/>
           </a:solidFill>
           <a:ln/>
         </p:spPr>
       </p:sp>
       <p:sp>
         <p:nvSpPr>
-          <p:cNvPr id="21" name="Text 15"/>
+          <p:cNvPr id="22" name="Text 15"/>
           <p:cNvSpPr/>
           <p:nvPr/>
         </p:nvSpPr>
@@ -9987,7 +10223,7 @@
             <a:r>
               <a:rPr lang="en-US" sz="1350" b="1" dirty="0">
                 <a:solidFill>
-                  <a:srgbClr val="14563C"/>
+                  <a:srgbClr val="0E7A3D"/>
                 </a:solidFill>
                 <a:latin typeface="Calibri" pitchFamily="34" charset="0"/>
                 <a:ea typeface="Calibri" pitchFamily="34" charset="-122"/>
@@ -10054,7 +10290,7 @@
         <p:spPr>
           <a:xfrm>
             <a:off x="548640" y="384048"/>
-            <a:ext cx="10972800" cy="320040"/>
+            <a:ext cx="9601200" cy="320040"/>
           </a:xfrm>
           <a:prstGeom prst="rect">
             <a:avLst/>
@@ -10072,7 +10308,7 @@
             <a:r>
               <a:rPr lang="en-US" sz="1300" b="1" spc="200" kern="0" dirty="0">
                 <a:solidFill>
-                  <a:srgbClr val="C9A227"/>
+                  <a:srgbClr val="C79100"/>
                 </a:solidFill>
                 <a:latin typeface="Calibri" pitchFamily="34" charset="0"/>
                 <a:ea typeface="Calibri" pitchFamily="34" charset="-122"/>
@@ -10093,7 +10329,7 @@
         <p:spPr>
           <a:xfrm>
             <a:off x="548640" y="658368"/>
-            <a:ext cx="11064240" cy="731520"/>
+            <a:ext cx="9966960" cy="731520"/>
           </a:xfrm>
           <a:prstGeom prst="rect">
             <a:avLst/>
@@ -10111,7 +10347,7 @@
             <a:r>
               <a:rPr lang="en-US" sz="3400" b="1" dirty="0">
                 <a:solidFill>
-                  <a:srgbClr val="14563C"/>
+                  <a:srgbClr val="0E7A3D"/>
                 </a:solidFill>
                 <a:latin typeface="Cambria" pitchFamily="34" charset="0"/>
                 <a:ea typeface="Cambria" pitchFamily="34" charset="-122"/>
@@ -10123,51 +10359,9 @@
           </a:p>
         </p:txBody>
       </p:sp>
-      <p:sp>
-        <p:nvSpPr>
-          <p:cNvPr id="4" name="Shape 2"/>
-          <p:cNvSpPr/>
-          <p:nvPr/>
-        </p:nvSpPr>
-        <p:spPr>
-          <a:xfrm>
-            <a:off x="640080" y="1783080"/>
-            <a:ext cx="3520440" cy="3108960"/>
-          </a:xfrm>
-          <a:prstGeom prst="roundRect">
-            <a:avLst>
-              <a:gd name="adj" fmla="val 2647"/>
-            </a:avLst>
-          </a:prstGeom>
-          <a:solidFill>
-            <a:srgbClr val="EEF4F0"/>
-          </a:solidFill>
-          <a:ln/>
-        </p:spPr>
-      </p:sp>
-      <p:sp>
-        <p:nvSpPr>
-          <p:cNvPr id="5" name="Shape 3"/>
-          <p:cNvSpPr/>
-          <p:nvPr/>
-        </p:nvSpPr>
-        <p:spPr>
-          <a:xfrm>
-            <a:off x="896112" y="2039112"/>
-            <a:ext cx="512064" cy="512064"/>
-          </a:xfrm>
-          <a:prstGeom prst="ellipse">
-            <a:avLst/>
-          </a:prstGeom>
-          <a:solidFill>
-            <a:srgbClr val="14563C"/>
-          </a:solidFill>
-          <a:ln/>
-        </p:spPr>
-      </p:sp>
       <p:pic>
         <p:nvPicPr>
-          <p:cNvPr id="6" name="Image 0" descr="icons/git.png">    </p:cNvPr>
+          <p:cNvPr id="4" name="Image 0" descr="logo-dgi.png">    </p:cNvPr>
           <p:cNvPicPr>
             <a:picLocks noChangeAspect="1"/>
           </p:cNvPicPr>
@@ -10181,8 +10375,8 @@
         </p:blipFill>
         <p:spPr>
           <a:xfrm>
-            <a:off x="1029249" y="2172249"/>
-            <a:ext cx="245791" cy="245791"/>
+            <a:off x="10744200" y="384048"/>
+            <a:ext cx="1051560" cy="795528"/>
           </a:xfrm>
           <a:prstGeom prst="rect">
             <a:avLst/>
@@ -10191,94 +10385,13 @@
       </p:pic>
       <p:sp>
         <p:nvSpPr>
-          <p:cNvPr id="7" name="Text 4"/>
-          <p:cNvSpPr/>
-          <p:nvPr/>
-        </p:nvSpPr>
-        <p:spPr>
-          <a:xfrm>
-            <a:off x="896112" y="2697480"/>
-            <a:ext cx="3008376" cy="365760"/>
-          </a:xfrm>
-          <a:prstGeom prst="rect">
-            <a:avLst/>
-          </a:prstGeom>
-          <a:noFill/>
-          <a:ln/>
-        </p:spPr>
-        <p:txBody>
-          <a:bodyPr wrap="square" lIns="0" tIns="0" rIns="0" bIns="0" rtlCol="0" anchor="ctr"/>
-          <a:lstStyle/>
-          <a:p>
-            <a:pPr indent="0" marL="0">
-              <a:buNone/>
-            </a:pPr>
-            <a:r>
-              <a:rPr lang="en-US" sz="1550" b="1" dirty="0">
-                <a:solidFill>
-                  <a:srgbClr val="14563C"/>
-                </a:solidFill>
-                <a:latin typeface="Calibri" pitchFamily="34" charset="0"/>
-                <a:ea typeface="Calibri" pitchFamily="34" charset="-122"/>
-                <a:cs typeface="Calibri" pitchFamily="34" charset="-120"/>
-              </a:rPr>
-              <a:t>Le dépôt reste</a:t>
-            </a:r>
-            <a:endParaRPr lang="en-US" sz="1550" dirty="0"/>
-          </a:p>
-        </p:txBody>
-      </p:sp>
-      <p:sp>
-        <p:nvSpPr>
-          <p:cNvPr id="8" name="Text 5"/>
-          <p:cNvSpPr/>
-          <p:nvPr/>
-        </p:nvSpPr>
-        <p:spPr>
-          <a:xfrm>
-            <a:off x="896112" y="3063240"/>
-            <a:ext cx="3008376" cy="1645920"/>
-          </a:xfrm>
-          <a:prstGeom prst="rect">
-            <a:avLst/>
-          </a:prstGeom>
-          <a:noFill/>
-          <a:ln/>
-        </p:spPr>
-        <p:txBody>
-          <a:bodyPr wrap="square" lIns="0" tIns="0" rIns="0" bIns="0" rtlCol="0" anchor="t"/>
-          <a:lstStyle/>
-          <a:p>
-            <a:pPr indent="0" marL="0">
-              <a:lnSpc>
-                <a:spcPct val="110000"/>
-              </a:lnSpc>
-              <a:buNone/>
-            </a:pPr>
-            <a:r>
-              <a:rPr lang="en-US" sz="1250" dirty="0">
-                <a:solidFill>
-                  <a:srgbClr val="5C6B63"/>
-                </a:solidFill>
-                <a:latin typeface="Calibri" pitchFamily="34" charset="0"/>
-                <a:ea typeface="Calibri" pitchFamily="34" charset="-122"/>
-                <a:cs typeface="Calibri" pitchFamily="34" charset="-120"/>
-              </a:rPr>
-              <a:t>Solutions complètes, aide-mémoire (docs/), pipeline modèle : tout reste accessible et clonable.</a:t>
-            </a:r>
-            <a:endParaRPr lang="en-US" sz="1250" dirty="0"/>
-          </a:p>
-        </p:txBody>
-      </p:sp>
-      <p:sp>
-        <p:nvSpPr>
-          <p:cNvPr id="9" name="Shape 6"/>
-          <p:cNvSpPr/>
-          <p:nvPr/>
-        </p:nvSpPr>
-        <p:spPr>
-          <a:xfrm>
-            <a:off x="4343400" y="1783080"/>
+          <p:cNvPr id="5" name="Shape 2"/>
+          <p:cNvSpPr/>
+          <p:nvPr/>
+        </p:nvSpPr>
+        <p:spPr>
+          <a:xfrm>
+            <a:off x="640080" y="1783080"/>
             <a:ext cx="3520440" cy="3108960"/>
           </a:xfrm>
           <a:prstGeom prst="roundRect">
@@ -10287,34 +10400,34 @@
             </a:avLst>
           </a:prstGeom>
           <a:solidFill>
-            <a:srgbClr val="EEF4F0"/>
+            <a:srgbClr val="EEF5EF"/>
           </a:solidFill>
           <a:ln/>
         </p:spPr>
       </p:sp>
       <p:sp>
         <p:nvSpPr>
-          <p:cNvPr id="10" name="Shape 7"/>
-          <p:cNvSpPr/>
-          <p:nvPr/>
-        </p:nvSpPr>
-        <p:spPr>
-          <a:xfrm>
-            <a:off x="4599432" y="2039112"/>
+          <p:cNvPr id="6" name="Shape 3"/>
+          <p:cNvSpPr/>
+          <p:nvPr/>
+        </p:nvSpPr>
+        <p:spPr>
+          <a:xfrm>
+            <a:off x="896112" y="2039112"/>
             <a:ext cx="512064" cy="512064"/>
           </a:xfrm>
           <a:prstGeom prst="ellipse">
             <a:avLst/>
           </a:prstGeom>
           <a:solidFill>
-            <a:srgbClr val="C9A227"/>
+            <a:srgbClr val="0E7A3D"/>
           </a:solidFill>
           <a:ln/>
         </p:spPr>
       </p:sp>
       <p:pic>
         <p:nvPicPr>
-          <p:cNvPr id="11" name="Image 1" descr="icons/rocket.png">    </p:cNvPr>
+          <p:cNvPr id="7" name="Image 1" descr="icons/git.png">    </p:cNvPr>
           <p:cNvPicPr>
             <a:picLocks noChangeAspect="1"/>
           </p:cNvPicPr>
@@ -10328,7 +10441,7 @@
         </p:blipFill>
         <p:spPr>
           <a:xfrm>
-            <a:off x="4732569" y="2172249"/>
+            <a:off x="1029249" y="2172249"/>
             <a:ext cx="245791" cy="245791"/>
           </a:xfrm>
           <a:prstGeom prst="rect">
@@ -10338,13 +10451,13 @@
       </p:pic>
       <p:sp>
         <p:nvSpPr>
-          <p:cNvPr id="12" name="Text 8"/>
-          <p:cNvSpPr/>
-          <p:nvPr/>
-        </p:nvSpPr>
-        <p:spPr>
-          <a:xfrm>
-            <a:off x="4599432" y="2697480"/>
+          <p:cNvPr id="8" name="Text 4"/>
+          <p:cNvSpPr/>
+          <p:nvPr/>
+        </p:nvSpPr>
+        <p:spPr>
+          <a:xfrm>
+            <a:off x="896112" y="2697480"/>
             <a:ext cx="3008376" cy="365760"/>
           </a:xfrm>
           <a:prstGeom prst="rect">
@@ -10363,13 +10476,13 @@
             <a:r>
               <a:rPr lang="en-US" sz="1550" b="1" dirty="0">
                 <a:solidFill>
-                  <a:srgbClr val="14563C"/>
+                  <a:srgbClr val="0E7A3D"/>
                 </a:solidFill>
                 <a:latin typeface="Calibri" pitchFamily="34" charset="0"/>
                 <a:ea typeface="Calibri" pitchFamily="34" charset="-122"/>
                 <a:cs typeface="Calibri" pitchFamily="34" charset="-120"/>
               </a:rPr>
-              <a:t>Automatiser un vrai besoin</a:t>
+              <a:t>Le dépôt reste</a:t>
             </a:r>
             <a:endParaRPr lang="en-US" sz="1550" dirty="0"/>
           </a:p>
@@ -10377,13 +10490,13 @@
       </p:sp>
       <p:sp>
         <p:nvSpPr>
-          <p:cNvPr id="13" name="Text 9"/>
-          <p:cNvSpPr/>
-          <p:nvPr/>
-        </p:nvSpPr>
-        <p:spPr>
-          <a:xfrm>
-            <a:off x="4599432" y="3063240"/>
+          <p:cNvPr id="9" name="Text 5"/>
+          <p:cNvSpPr/>
+          <p:nvPr/>
+        </p:nvSpPr>
+        <p:spPr>
+          <a:xfrm>
+            <a:off x="896112" y="3063240"/>
             <a:ext cx="3008376" cy="1645920"/>
           </a:xfrm>
           <a:prstGeom prst="rect">
@@ -10411,7 +10524,7 @@
                 <a:ea typeface="Calibri" pitchFamily="34" charset="-122"/>
                 <a:cs typeface="Calibri" pitchFamily="34" charset="-120"/>
               </a:rPr>
-              <a:t>Choisissez UNE tâche répétitive de votre service et scriptez-la : c’est ainsi qu’on ancre.</a:t>
+              <a:t>Solutions complètes, aide-mémoire (docs/), pipeline modèle : tout reste accessible et clonable.</a:t>
             </a:r>
             <a:endParaRPr lang="en-US" sz="1250" dirty="0"/>
           </a:p>
@@ -10419,13 +10532,13 @@
       </p:sp>
       <p:sp>
         <p:nvSpPr>
-          <p:cNvPr id="14" name="Shape 10"/>
-          <p:cNvSpPr/>
-          <p:nvPr/>
-        </p:nvSpPr>
-        <p:spPr>
-          <a:xfrm>
-            <a:off x="8046720" y="1783080"/>
+          <p:cNvPr id="10" name="Shape 6"/>
+          <p:cNvSpPr/>
+          <p:nvPr/>
+        </p:nvSpPr>
+        <p:spPr>
+          <a:xfrm>
+            <a:off x="4343400" y="1783080"/>
             <a:ext cx="3520440" cy="3108960"/>
           </a:xfrm>
           <a:prstGeom prst="roundRect">
@@ -10434,34 +10547,34 @@
             </a:avLst>
           </a:prstGeom>
           <a:solidFill>
-            <a:srgbClr val="EEF4F0"/>
+            <a:srgbClr val="EEF5EF"/>
           </a:solidFill>
           <a:ln/>
         </p:spPr>
       </p:sp>
       <p:sp>
         <p:nvSpPr>
-          <p:cNvPr id="15" name="Shape 11"/>
-          <p:cNvSpPr/>
-          <p:nvPr/>
-        </p:nvSpPr>
-        <p:spPr>
-          <a:xfrm>
-            <a:off x="8302752" y="2039112"/>
+          <p:cNvPr id="11" name="Shape 7"/>
+          <p:cNvSpPr/>
+          <p:nvPr/>
+        </p:nvSpPr>
+        <p:spPr>
+          <a:xfrm>
+            <a:off x="4599432" y="2039112"/>
             <a:ext cx="512064" cy="512064"/>
           </a:xfrm>
           <a:prstGeom prst="ellipse">
             <a:avLst/>
           </a:prstGeom>
           <a:solidFill>
-            <a:srgbClr val="1E7A50"/>
+            <a:srgbClr val="C79100"/>
           </a:solidFill>
           <a:ln/>
         </p:spPr>
       </p:sp>
       <p:pic>
         <p:nvPicPr>
-          <p:cNvPr id="16" name="Image 2" descr="icons/book.png">    </p:cNvPr>
+          <p:cNvPr id="12" name="Image 2" descr="icons/rocket.png">    </p:cNvPr>
           <p:cNvPicPr>
             <a:picLocks noChangeAspect="1"/>
           </p:cNvPicPr>
@@ -10475,7 +10588,7 @@
         </p:blipFill>
         <p:spPr>
           <a:xfrm>
-            <a:off x="8435889" y="2172249"/>
+            <a:off x="4732569" y="2172249"/>
             <a:ext cx="245791" cy="245791"/>
           </a:xfrm>
           <a:prstGeom prst="rect">
@@ -10485,13 +10598,13 @@
       </p:pic>
       <p:sp>
         <p:nvSpPr>
-          <p:cNvPr id="17" name="Text 12"/>
-          <p:cNvSpPr/>
-          <p:nvPr/>
-        </p:nvSpPr>
-        <p:spPr>
-          <a:xfrm>
-            <a:off x="8302752" y="2697480"/>
+          <p:cNvPr id="13" name="Text 8"/>
+          <p:cNvSpPr/>
+          <p:nvPr/>
+        </p:nvSpPr>
+        <p:spPr>
+          <a:xfrm>
+            <a:off x="4599432" y="2697480"/>
             <a:ext cx="3008376" cy="365760"/>
           </a:xfrm>
           <a:prstGeom prst="rect">
@@ -10510,13 +10623,13 @@
             <a:r>
               <a:rPr lang="en-US" sz="1550" b="1" dirty="0">
                 <a:solidFill>
-                  <a:srgbClr val="14563C"/>
+                  <a:srgbClr val="0E7A3D"/>
                 </a:solidFill>
                 <a:latin typeface="Calibri" pitchFamily="34" charset="0"/>
                 <a:ea typeface="Calibri" pitchFamily="34" charset="-122"/>
                 <a:cs typeface="Calibri" pitchFamily="34" charset="-120"/>
               </a:rPr>
-              <a:t>Approfondir</a:t>
+              <a:t>Automatiser un vrai besoin</a:t>
             </a:r>
             <a:endParaRPr lang="en-US" sz="1550" dirty="0"/>
           </a:p>
@@ -10524,13 +10637,13 @@
       </p:sp>
       <p:sp>
         <p:nvSpPr>
-          <p:cNvPr id="18" name="Text 13"/>
-          <p:cNvSpPr/>
-          <p:nvPr/>
-        </p:nvSpPr>
-        <p:spPr>
-          <a:xfrm>
-            <a:off x="8302752" y="3063240"/>
+          <p:cNvPr id="14" name="Text 9"/>
+          <p:cNvSpPr/>
+          <p:nvPr/>
+        </p:nvSpPr>
+        <p:spPr>
+          <a:xfrm>
+            <a:off x="4599432" y="3063240"/>
             <a:ext cx="3008376" cy="1645920"/>
           </a:xfrm>
           <a:prstGeom prst="rect">
@@ -10558,6 +10671,153 @@
                 <a:ea typeface="Calibri" pitchFamily="34" charset="-122"/>
                 <a:cs typeface="Calibri" pitchFamily="34" charset="-120"/>
               </a:rPr>
+              <a:t>Choisissez UNE tâche répétitive de votre service et scriptez-la : c’est ainsi qu’on ancre.</a:t>
+            </a:r>
+            <a:endParaRPr lang="en-US" sz="1250" dirty="0"/>
+          </a:p>
+        </p:txBody>
+      </p:sp>
+      <p:sp>
+        <p:nvSpPr>
+          <p:cNvPr id="15" name="Shape 10"/>
+          <p:cNvSpPr/>
+          <p:nvPr/>
+        </p:nvSpPr>
+        <p:spPr>
+          <a:xfrm>
+            <a:off x="8046720" y="1783080"/>
+            <a:ext cx="3520440" cy="3108960"/>
+          </a:xfrm>
+          <a:prstGeom prst="roundRect">
+            <a:avLst>
+              <a:gd name="adj" fmla="val 2647"/>
+            </a:avLst>
+          </a:prstGeom>
+          <a:solidFill>
+            <a:srgbClr val="EEF5EF"/>
+          </a:solidFill>
+          <a:ln/>
+        </p:spPr>
+      </p:sp>
+      <p:sp>
+        <p:nvSpPr>
+          <p:cNvPr id="16" name="Shape 11"/>
+          <p:cNvSpPr/>
+          <p:nvPr/>
+        </p:nvSpPr>
+        <p:spPr>
+          <a:xfrm>
+            <a:off x="8302752" y="2039112"/>
+            <a:ext cx="512064" cy="512064"/>
+          </a:xfrm>
+          <a:prstGeom prst="ellipse">
+            <a:avLst/>
+          </a:prstGeom>
+          <a:solidFill>
+            <a:srgbClr val="2E9E4F"/>
+          </a:solidFill>
+          <a:ln/>
+        </p:spPr>
+      </p:sp>
+      <p:pic>
+        <p:nvPicPr>
+          <p:cNvPr id="17" name="Image 3" descr="icons/book.png">    </p:cNvPr>
+          <p:cNvPicPr>
+            <a:picLocks noChangeAspect="1"/>
+          </p:cNvPicPr>
+          <p:nvPr/>
+        </p:nvPicPr>
+        <p:blipFill>
+          <a:blip r:embed="rId4"/>
+          <a:stretch>
+            <a:fillRect/>
+          </a:stretch>
+        </p:blipFill>
+        <p:spPr>
+          <a:xfrm>
+            <a:off x="8435889" y="2172249"/>
+            <a:ext cx="245791" cy="245791"/>
+          </a:xfrm>
+          <a:prstGeom prst="rect">
+            <a:avLst/>
+          </a:prstGeom>
+        </p:spPr>
+      </p:pic>
+      <p:sp>
+        <p:nvSpPr>
+          <p:cNvPr id="18" name="Text 12"/>
+          <p:cNvSpPr/>
+          <p:nvPr/>
+        </p:nvSpPr>
+        <p:spPr>
+          <a:xfrm>
+            <a:off x="8302752" y="2697480"/>
+            <a:ext cx="3008376" cy="365760"/>
+          </a:xfrm>
+          <a:prstGeom prst="rect">
+            <a:avLst/>
+          </a:prstGeom>
+          <a:noFill/>
+          <a:ln/>
+        </p:spPr>
+        <p:txBody>
+          <a:bodyPr wrap="square" lIns="0" tIns="0" rIns="0" bIns="0" rtlCol="0" anchor="ctr"/>
+          <a:lstStyle/>
+          <a:p>
+            <a:pPr indent="0" marL="0">
+              <a:buNone/>
+            </a:pPr>
+            <a:r>
+              <a:rPr lang="en-US" sz="1550" b="1" dirty="0">
+                <a:solidFill>
+                  <a:srgbClr val="0E7A3D"/>
+                </a:solidFill>
+                <a:latin typeface="Calibri" pitchFamily="34" charset="0"/>
+                <a:ea typeface="Calibri" pitchFamily="34" charset="-122"/>
+                <a:cs typeface="Calibri" pitchFamily="34" charset="-120"/>
+              </a:rPr>
+              <a:t>Approfondir</a:t>
+            </a:r>
+            <a:endParaRPr lang="en-US" sz="1550" dirty="0"/>
+          </a:p>
+        </p:txBody>
+      </p:sp>
+      <p:sp>
+        <p:nvSpPr>
+          <p:cNvPr id="19" name="Text 13"/>
+          <p:cNvSpPr/>
+          <p:nvPr/>
+        </p:nvSpPr>
+        <p:spPr>
+          <a:xfrm>
+            <a:off x="8302752" y="3063240"/>
+            <a:ext cx="3008376" cy="1645920"/>
+          </a:xfrm>
+          <a:prstGeom prst="rect">
+            <a:avLst/>
+          </a:prstGeom>
+          <a:noFill/>
+          <a:ln/>
+        </p:spPr>
+        <p:txBody>
+          <a:bodyPr wrap="square" lIns="0" tIns="0" rIns="0" bIns="0" rtlCol="0" anchor="t"/>
+          <a:lstStyle/>
+          <a:p>
+            <a:pPr indent="0" marL="0">
+              <a:lnSpc>
+                <a:spcPct val="110000"/>
+              </a:lnSpc>
+              <a:buNone/>
+            </a:pPr>
+            <a:r>
+              <a:rPr lang="en-US" sz="1250" dirty="0">
+                <a:solidFill>
+                  <a:srgbClr val="5C6B63"/>
+                </a:solidFill>
+                <a:latin typeface="Calibri" pitchFamily="34" charset="0"/>
+                <a:ea typeface="Calibri" pitchFamily="34" charset="-122"/>
+                <a:cs typeface="Calibri" pitchFamily="34" charset="-120"/>
+              </a:rPr>
               <a:t>docs.python.org en français, pandas.pydata.org — et les modules 06/09 à relire dans un mois.</a:t>
             </a:r>
             <a:endParaRPr lang="en-US" sz="1250" dirty="0"/>
@@ -10566,7 +10826,7 @@
       </p:sp>
       <p:sp>
         <p:nvSpPr>
-          <p:cNvPr id="19" name="Text 14"/>
+          <p:cNvPr id="20" name="Text 14"/>
           <p:cNvSpPr/>
           <p:nvPr/>
         </p:nvSpPr>

--- a/slides/sources/J5-integration-projet.pptx
+++ b/slides/sources/J5-integration-projet.pptx
@@ -1658,7 +1658,7 @@
     <p:bg>
       <p:bgPr>
         <a:solidFill>
-          <a:srgbClr val="0A2E1A"/>
+          <a:srgbClr val="FFFFFF"/>
         </a:solidFill>
       </p:bgPr>
     </p:bg>
@@ -1684,14 +1684,14 @@
         </p:nvSpPr>
         <p:spPr>
           <a:xfrm>
-            <a:off x="9692640" y="-1463040"/>
-            <a:ext cx="4206240" cy="4206240"/>
+            <a:off x="10149840" y="4846320"/>
+            <a:ext cx="3291840" cy="3291840"/>
           </a:xfrm>
           <a:prstGeom prst="ellipse">
             <a:avLst/>
           </a:prstGeom>
           <a:solidFill>
-            <a:srgbClr val="0E7A3D"/>
+            <a:srgbClr val="EEF5EF"/>
           </a:solidFill>
           <a:ln/>
         </p:spPr>
@@ -1704,67 +1704,21 @@
         </p:nvSpPr>
         <p:spPr>
           <a:xfrm>
-            <a:off x="10698480" y="4480560"/>
-            <a:ext cx="3108960" cy="3108960"/>
+            <a:off x="-1188720" y="-1371600"/>
+            <a:ext cx="2743200" cy="2743200"/>
           </a:xfrm>
           <a:prstGeom prst="ellipse">
             <a:avLst/>
           </a:prstGeom>
           <a:solidFill>
-            <a:srgbClr val="FCD116">
-              <a:alpha val="55000"/>
-            </a:srgbClr>
-          </a:solidFill>
-          <a:ln/>
-        </p:spPr>
-      </p:sp>
-      <p:sp>
-        <p:nvSpPr>
-          <p:cNvPr id="4" name="Shape 2"/>
-          <p:cNvSpPr/>
-          <p:nvPr/>
-        </p:nvSpPr>
-        <p:spPr>
-          <a:xfrm>
-            <a:off x="-1097280" y="5120640"/>
-            <a:ext cx="2743200" cy="2743200"/>
-          </a:xfrm>
-          <a:prstGeom prst="ellipse">
-            <a:avLst/>
-          </a:prstGeom>
-          <a:solidFill>
-            <a:srgbClr val="CE1126">
-              <a:alpha val="65000"/>
-            </a:srgbClr>
-          </a:solidFill>
-          <a:ln/>
-        </p:spPr>
-      </p:sp>
-      <p:sp>
-        <p:nvSpPr>
-          <p:cNvPr id="5" name="Shape 3"/>
-          <p:cNvSpPr/>
-          <p:nvPr/>
-        </p:nvSpPr>
-        <p:spPr>
-          <a:xfrm>
-            <a:off x="9464040" y="502920"/>
-            <a:ext cx="2148840" cy="1828800"/>
-          </a:xfrm>
-          <a:prstGeom prst="roundRect">
-            <a:avLst>
-              <a:gd name="adj" fmla="val 6000"/>
-            </a:avLst>
-          </a:prstGeom>
-          <a:solidFill>
-            <a:srgbClr val="FFFFFF"/>
+            <a:srgbClr val="EEF5EF"/>
           </a:solidFill>
           <a:ln/>
         </p:spPr>
       </p:sp>
       <p:pic>
         <p:nvPicPr>
-          <p:cNvPr id="6" name="Image 0" descr="logo-dgi.png">    </p:cNvPr>
+          <p:cNvPr id="4" name="Image 0" descr="logo-ministere.png">    </p:cNvPr>
           <p:cNvPicPr>
             <a:picLocks noChangeAspect="1"/>
           </p:cNvPicPr>
@@ -1778,23 +1732,47 @@
         </p:blipFill>
         <p:spPr>
           <a:xfrm>
-            <a:off x="9646920" y="740664"/>
-            <a:ext cx="1783080" cy="1353312"/>
+            <a:off x="640080" y="457200"/>
+            <a:ext cx="4206240" cy="822960"/>
           </a:xfrm>
           <a:prstGeom prst="rect">
             <a:avLst/>
           </a:prstGeom>
         </p:spPr>
       </p:pic>
-      <p:sp>
-        <p:nvSpPr>
-          <p:cNvPr id="7" name="Text 4"/>
-          <p:cNvSpPr/>
-          <p:nvPr/>
-        </p:nvSpPr>
-        <p:spPr>
-          <a:xfrm>
-            <a:off x="640080" y="777240"/>
+      <p:pic>
+        <p:nvPicPr>
+          <p:cNvPr id="5" name="Image 1" descr="logo-dgci.png">    </p:cNvPr>
+          <p:cNvPicPr>
+            <a:picLocks noChangeAspect="1"/>
+          </p:cNvPicPr>
+          <p:nvPr/>
+        </p:nvPicPr>
+        <p:blipFill>
+          <a:blip r:embed="rId2"/>
+          <a:stretch>
+            <a:fillRect/>
+          </a:stretch>
+        </p:blipFill>
+        <p:spPr>
+          <a:xfrm>
+            <a:off x="9144000" y="475488"/>
+            <a:ext cx="2468880" cy="758952"/>
+          </a:xfrm>
+          <a:prstGeom prst="rect">
+            <a:avLst/>
+          </a:prstGeom>
+        </p:spPr>
+      </p:pic>
+      <p:sp>
+        <p:nvSpPr>
+          <p:cNvPr id="6" name="Text 2"/>
+          <p:cNvSpPr/>
+          <p:nvPr/>
+        </p:nvSpPr>
+        <p:spPr>
+          <a:xfrm>
+            <a:off x="640080" y="1874520"/>
             <a:ext cx="7315200" cy="365760"/>
           </a:xfrm>
           <a:prstGeom prst="rect">
@@ -1813,7 +1791,7 @@
             <a:r>
               <a:rPr lang="en-US" sz="1500" b="1" spc="300" kern="0" dirty="0">
                 <a:solidFill>
-                  <a:srgbClr val="FCD116"/>
+                  <a:srgbClr val="C79100"/>
                 </a:solidFill>
                 <a:latin typeface="Calibri" pitchFamily="34" charset="0"/>
                 <a:ea typeface="Calibri" pitchFamily="34" charset="-122"/>
@@ -1827,13 +1805,13 @@
       </p:sp>
       <p:sp>
         <p:nvSpPr>
-          <p:cNvPr id="8" name="Text 5"/>
-          <p:cNvSpPr/>
-          <p:nvPr/>
-        </p:nvSpPr>
-        <p:spPr>
-          <a:xfrm>
-            <a:off x="640080" y="1417320"/>
+          <p:cNvPr id="7" name="Text 3"/>
+          <p:cNvSpPr/>
+          <p:nvPr/>
+        </p:nvSpPr>
+        <p:spPr>
+          <a:xfrm>
+            <a:off x="640080" y="2286000"/>
             <a:ext cx="8686800" cy="1371600"/>
           </a:xfrm>
           <a:prstGeom prst="rect">
@@ -1850,9 +1828,9 @@
               <a:buNone/>
             </a:pPr>
             <a:r>
-              <a:rPr lang="en-US" sz="8400" b="1" dirty="0">
-                <a:solidFill>
-                  <a:srgbClr val="FFFFFF"/>
+              <a:rPr lang="en-US" sz="8000" b="1" dirty="0">
+                <a:solidFill>
+                  <a:srgbClr val="0E7A3D"/>
                 </a:solidFill>
                 <a:latin typeface="Cambria" pitchFamily="34" charset="0"/>
                 <a:ea typeface="Cambria" pitchFamily="34" charset="-122"/>
@@ -1860,20 +1838,20 @@
               </a:rPr>
               <a:t>J5</a:t>
             </a:r>
-            <a:endParaRPr lang="en-US" sz="8400" dirty="0"/>
-          </a:p>
-        </p:txBody>
-      </p:sp>
-      <p:sp>
-        <p:nvSpPr>
-          <p:cNvPr id="9" name="Text 6"/>
-          <p:cNvSpPr/>
-          <p:nvPr/>
-        </p:nvSpPr>
-        <p:spPr>
-          <a:xfrm>
-            <a:off x="640080" y="2880360"/>
-            <a:ext cx="9418320" cy="914400"/>
+            <a:endParaRPr lang="en-US" sz="8000" dirty="0"/>
+          </a:p>
+        </p:txBody>
+      </p:sp>
+      <p:sp>
+        <p:nvSpPr>
+          <p:cNvPr id="8" name="Text 4"/>
+          <p:cNvSpPr/>
+          <p:nvPr/>
+        </p:nvSpPr>
+        <p:spPr>
+          <a:xfrm>
+            <a:off x="640080" y="3657600"/>
+            <a:ext cx="10058400" cy="914400"/>
           </a:xfrm>
           <a:prstGeom prst="rect">
             <a:avLst/>
@@ -1889,9 +1867,9 @@
               <a:buNone/>
             </a:pPr>
             <a:r>
-              <a:rPr lang="en-US" sz="3500" b="1" dirty="0">
-                <a:solidFill>
-                  <a:srgbClr val="FCD116"/>
+              <a:rPr lang="en-US" sz="3400" b="1" dirty="0">
+                <a:solidFill>
+                  <a:srgbClr val="1C2A24"/>
                 </a:solidFill>
                 <a:latin typeface="Cambria" pitchFamily="34" charset="0"/>
                 <a:ea typeface="Cambria" pitchFamily="34" charset="-122"/>
@@ -1899,20 +1877,20 @@
               </a:rPr>
               <a:t>Intégration et projets</a:t>
             </a:r>
-            <a:endParaRPr lang="en-US" sz="3500" dirty="0"/>
-          </a:p>
-        </p:txBody>
-      </p:sp>
-      <p:sp>
-        <p:nvSpPr>
-          <p:cNvPr id="10" name="Text 7"/>
-          <p:cNvSpPr/>
-          <p:nvPr/>
-        </p:nvSpPr>
-        <p:spPr>
-          <a:xfrm>
-            <a:off x="640080" y="3794760"/>
-            <a:ext cx="8778240" cy="822960"/>
+            <a:endParaRPr lang="en-US" sz="3400" dirty="0"/>
+          </a:p>
+        </p:txBody>
+      </p:sp>
+      <p:sp>
+        <p:nvSpPr>
+          <p:cNvPr id="9" name="Text 5"/>
+          <p:cNvSpPr/>
+          <p:nvPr/>
+        </p:nvSpPr>
+        <p:spPr>
+          <a:xfrm>
+            <a:off x="640080" y="4526280"/>
+            <a:ext cx="9326880" cy="822960"/>
           </a:xfrm>
           <a:prstGeom prst="rect">
             <a:avLst/>
@@ -1931,9 +1909,9 @@
               <a:buNone/>
             </a:pPr>
             <a:r>
-              <a:rPr lang="en-US" sz="1600" dirty="0">
-                <a:solidFill>
-                  <a:srgbClr val="CADFD2"/>
+              <a:rPr lang="en-US" sz="1550" dirty="0">
+                <a:solidFill>
+                  <a:srgbClr val="5C6B63"/>
                 </a:solidFill>
                 <a:latin typeface="Calibri" pitchFamily="34" charset="0"/>
                 <a:ea typeface="Calibri" pitchFamily="34" charset="-122"/>
@@ -1941,7 +1919,7 @@
               </a:rPr>
               <a:t>Assembler toute la semaine en une chaîne exécutable d’une seule</a:t>
             </a:r>
-            <a:endParaRPr lang="en-US" sz="1600" dirty="0"/>
+            <a:endParaRPr lang="en-US" sz="1550" dirty="0"/>
           </a:p>
           <a:p>
             <a:pPr indent="0" marL="0">
@@ -1951,9 +1929,9 @@
               <a:buNone/>
             </a:pPr>
             <a:r>
-              <a:rPr lang="en-US" sz="1600" dirty="0">
-                <a:solidFill>
-                  <a:srgbClr val="CADFD2"/>
+              <a:rPr lang="en-US" sz="1550" dirty="0">
+                <a:solidFill>
+                  <a:srgbClr val="5C6B63"/>
                 </a:solidFill>
                 <a:latin typeface="Calibri" pitchFamily="34" charset="0"/>
                 <a:ea typeface="Calibri" pitchFamily="34" charset="-122"/>
@@ -1961,19 +1939,19 @@
               </a:rPr>
               <a:t>commande — puis défendre son projet en soutenance.</a:t>
             </a:r>
-            <a:endParaRPr lang="en-US" sz="1600" dirty="0"/>
-          </a:p>
-        </p:txBody>
-      </p:sp>
-      <p:sp>
-        <p:nvSpPr>
-          <p:cNvPr id="11" name="Shape 8"/>
-          <p:cNvSpPr/>
-          <p:nvPr/>
-        </p:nvSpPr>
-        <p:spPr>
-          <a:xfrm>
-            <a:off x="640080" y="5120640"/>
+            <a:endParaRPr lang="en-US" sz="1550" dirty="0"/>
+          </a:p>
+        </p:txBody>
+      </p:sp>
+      <p:sp>
+        <p:nvSpPr>
+          <p:cNvPr id="10" name="Shape 6"/>
+          <p:cNvSpPr/>
+          <p:nvPr/>
+        </p:nvSpPr>
+        <p:spPr>
+          <a:xfrm>
+            <a:off x="640080" y="5440680"/>
             <a:ext cx="1728216" cy="475488"/>
           </a:xfrm>
           <a:prstGeom prst="roundRect">
@@ -1989,13 +1967,13 @@
       </p:sp>
       <p:sp>
         <p:nvSpPr>
-          <p:cNvPr id="12" name="Text 9"/>
-          <p:cNvSpPr/>
-          <p:nvPr/>
-        </p:nvSpPr>
-        <p:spPr>
-          <a:xfrm>
-            <a:off x="640080" y="5120640"/>
+          <p:cNvPr id="11" name="Text 7"/>
+          <p:cNvSpPr/>
+          <p:nvPr/>
+        </p:nvSpPr>
+        <p:spPr>
+          <a:xfrm>
+            <a:off x="640080" y="5440680"/>
             <a:ext cx="1728216" cy="475488"/>
           </a:xfrm>
           <a:prstGeom prst="rect">
@@ -2028,13 +2006,13 @@
       </p:sp>
       <p:sp>
         <p:nvSpPr>
-          <p:cNvPr id="13" name="Shape 10"/>
-          <p:cNvSpPr/>
-          <p:nvPr/>
-        </p:nvSpPr>
-        <p:spPr>
-          <a:xfrm>
-            <a:off x="2596896" y="5120640"/>
+          <p:cNvPr id="12" name="Shape 8"/>
+          <p:cNvSpPr/>
+          <p:nvPr/>
+        </p:nvSpPr>
+        <p:spPr>
+          <a:xfrm>
+            <a:off x="2596896" y="5440680"/>
             <a:ext cx="1536192" cy="475488"/>
           </a:xfrm>
           <a:prstGeom prst="roundRect">
@@ -2050,13 +2028,13 @@
       </p:sp>
       <p:sp>
         <p:nvSpPr>
-          <p:cNvPr id="14" name="Text 11"/>
-          <p:cNvSpPr/>
-          <p:nvPr/>
-        </p:nvSpPr>
-        <p:spPr>
-          <a:xfrm>
-            <a:off x="2596896" y="5120640"/>
+          <p:cNvPr id="13" name="Text 9"/>
+          <p:cNvSpPr/>
+          <p:nvPr/>
+        </p:nvSpPr>
+        <p:spPr>
+          <a:xfrm>
+            <a:off x="2596896" y="5440680"/>
             <a:ext cx="1536192" cy="475488"/>
           </a:xfrm>
           <a:prstGeom prst="rect">
@@ -2089,14 +2067,14 @@
       </p:sp>
       <p:sp>
         <p:nvSpPr>
-          <p:cNvPr id="15" name="Text 12"/>
-          <p:cNvSpPr/>
-          <p:nvPr/>
-        </p:nvSpPr>
-        <p:spPr>
-          <a:xfrm>
-            <a:off x="640080" y="6172200"/>
-            <a:ext cx="10058400" cy="320040"/>
+          <p:cNvPr id="14" name="Text 10"/>
+          <p:cNvSpPr/>
+          <p:nvPr/>
+        </p:nvSpPr>
+        <p:spPr>
+          <a:xfrm>
+            <a:off x="640080" y="6263640"/>
+            <a:ext cx="10972800" cy="320040"/>
           </a:xfrm>
           <a:prstGeom prst="rect">
             <a:avLst/>
@@ -2112,17 +2090,17 @@
               <a:buNone/>
             </a:pPr>
             <a:r>
-              <a:rPr lang="en-US" sz="1200" dirty="0">
-                <a:solidFill>
-                  <a:srgbClr val="8FAF9F"/>
+              <a:rPr lang="en-US" sz="1150" dirty="0">
+                <a:solidFill>
+                  <a:srgbClr val="5C6B63"/>
                 </a:solidFill>
                 <a:latin typeface="Calibri" pitchFamily="34" charset="0"/>
                 <a:ea typeface="Calibri" pitchFamily="34" charset="-122"/>
                 <a:cs typeface="Calibri" pitchFamily="34" charset="-120"/>
               </a:rPr>
-              <a:t>DGI — Direction Générale des Impôts · Guinée-Bissau · données pédagogiques fictives</a:t>
-            </a:r>
-            <a:endParaRPr lang="en-US" sz="1200" dirty="0"/>
+              <a:t>DGCI — Direção Geral das Contribuições e Impostos · Guinée-Bissau · données pédagogiques fictives</a:t>
+            </a:r>
+            <a:endParaRPr lang="en-US" sz="1150" dirty="0"/>
           </a:p>
         </p:txBody>
       </p:sp>
@@ -3019,7 +2997,7 @@
       </p:sp>
       <p:pic>
         <p:nvPicPr>
-          <p:cNvPr id="4" name="Image 0" descr="logo-dgi.png">    </p:cNvPr>
+          <p:cNvPr id="4" name="Image 0" descr="logo-dgci.png">    </p:cNvPr>
           <p:cNvPicPr>
             <a:picLocks noChangeAspect="1"/>
           </p:cNvPicPr>
@@ -3033,8 +3011,8 @@
         </p:blipFill>
         <p:spPr>
           <a:xfrm>
-            <a:off x="10744200" y="384048"/>
-            <a:ext cx="1051560" cy="795528"/>
+            <a:off x="10287000" y="475488"/>
+            <a:ext cx="1481328" cy="457200"/>
           </a:xfrm>
           <a:prstGeom prst="rect">
             <a:avLst/>
@@ -4231,7 +4209,7 @@
       </p:sp>
       <p:pic>
         <p:nvPicPr>
-          <p:cNvPr id="4" name="Image 0" descr="logo-dgi.png">    </p:cNvPr>
+          <p:cNvPr id="4" name="Image 0" descr="logo-dgci.png">    </p:cNvPr>
           <p:cNvPicPr>
             <a:picLocks noChangeAspect="1"/>
           </p:cNvPicPr>
@@ -4245,8 +4223,8 @@
         </p:blipFill>
         <p:spPr>
           <a:xfrm>
-            <a:off x="10744200" y="384048"/>
-            <a:ext cx="1051560" cy="795528"/>
+            <a:off x="10287000" y="475488"/>
+            <a:ext cx="1481328" cy="457200"/>
           </a:xfrm>
           <a:prstGeom prst="rect">
             <a:avLst/>
@@ -5304,7 +5282,7 @@
       </p:sp>
       <p:pic>
         <p:nvPicPr>
-          <p:cNvPr id="4" name="Image 0" descr="logo-dgi.png">    </p:cNvPr>
+          <p:cNvPr id="4" name="Image 0" descr="logo-dgci.png">    </p:cNvPr>
           <p:cNvPicPr>
             <a:picLocks noChangeAspect="1"/>
           </p:cNvPicPr>
@@ -5318,8 +5296,8 @@
         </p:blipFill>
         <p:spPr>
           <a:xfrm>
-            <a:off x="10744200" y="384048"/>
-            <a:ext cx="1051560" cy="795528"/>
+            <a:off x="10287000" y="475488"/>
+            <a:ext cx="1481328" cy="457200"/>
           </a:xfrm>
           <a:prstGeom prst="rect">
             <a:avLst/>
@@ -6446,7 +6424,7 @@
       </p:sp>
       <p:pic>
         <p:nvPicPr>
-          <p:cNvPr id="4" name="Image 0" descr="logo-dgi.png">    </p:cNvPr>
+          <p:cNvPr id="4" name="Image 0" descr="logo-dgci.png">    </p:cNvPr>
           <p:cNvPicPr>
             <a:picLocks noChangeAspect="1"/>
           </p:cNvPicPr>
@@ -6460,8 +6438,8 @@
         </p:blipFill>
         <p:spPr>
           <a:xfrm>
-            <a:off x="10744200" y="384048"/>
-            <a:ext cx="1051560" cy="795528"/>
+            <a:off x="10287000" y="475488"/>
+            <a:ext cx="1481328" cy="457200"/>
           </a:xfrm>
           <a:prstGeom prst="rect">
             <a:avLst/>
@@ -7380,7 +7358,7 @@
       </p:sp>
       <p:pic>
         <p:nvPicPr>
-          <p:cNvPr id="4" name="Image 0" descr="logo-dgi.png">    </p:cNvPr>
+          <p:cNvPr id="4" name="Image 0" descr="logo-dgci.png">    </p:cNvPr>
           <p:cNvPicPr>
             <a:picLocks noChangeAspect="1"/>
           </p:cNvPicPr>
@@ -7394,8 +7372,8 @@
         </p:blipFill>
         <p:spPr>
           <a:xfrm>
-            <a:off x="10744200" y="384048"/>
-            <a:ext cx="1051560" cy="795528"/>
+            <a:off x="10287000" y="475488"/>
+            <a:ext cx="1481328" cy="457200"/>
           </a:xfrm>
           <a:prstGeom prst="rect">
             <a:avLst/>
@@ -8433,7 +8411,7 @@
       </p:sp>
       <p:pic>
         <p:nvPicPr>
-          <p:cNvPr id="4" name="Image 0" descr="logo-dgi.png">    </p:cNvPr>
+          <p:cNvPr id="4" name="Image 0" descr="logo-dgci.png">    </p:cNvPr>
           <p:cNvPicPr>
             <a:picLocks noChangeAspect="1"/>
           </p:cNvPicPr>
@@ -8447,8 +8425,8 @@
         </p:blipFill>
         <p:spPr>
           <a:xfrm>
-            <a:off x="10744200" y="384048"/>
-            <a:ext cx="1051560" cy="795528"/>
+            <a:off x="10287000" y="475488"/>
+            <a:ext cx="1481328" cy="457200"/>
           </a:xfrm>
           <a:prstGeom prst="rect">
             <a:avLst/>
@@ -9608,7 +9586,7 @@
       </p:sp>
       <p:pic>
         <p:nvPicPr>
-          <p:cNvPr id="4" name="Image 0" descr="logo-dgi.png">    </p:cNvPr>
+          <p:cNvPr id="4" name="Image 0" descr="logo-dgci.png">    </p:cNvPr>
           <p:cNvPicPr>
             <a:picLocks noChangeAspect="1"/>
           </p:cNvPicPr>
@@ -9622,8 +9600,8 @@
         </p:blipFill>
         <p:spPr>
           <a:xfrm>
-            <a:off x="10744200" y="384048"/>
-            <a:ext cx="1051560" cy="795528"/>
+            <a:off x="10287000" y="475488"/>
+            <a:ext cx="1481328" cy="457200"/>
           </a:xfrm>
           <a:prstGeom prst="rect">
             <a:avLst/>
@@ -10361,7 +10339,7 @@
       </p:sp>
       <p:pic>
         <p:nvPicPr>
-          <p:cNvPr id="4" name="Image 0" descr="logo-dgi.png">    </p:cNvPr>
+          <p:cNvPr id="4" name="Image 0" descr="logo-dgci.png">    </p:cNvPr>
           <p:cNvPicPr>
             <a:picLocks noChangeAspect="1"/>
           </p:cNvPicPr>
@@ -10375,8 +10353,8 @@
         </p:blipFill>
         <p:spPr>
           <a:xfrm>
-            <a:off x="10744200" y="384048"/>
-            <a:ext cx="1051560" cy="795528"/>
+            <a:off x="10287000" y="475488"/>
+            <a:ext cx="1481328" cy="457200"/>
           </a:xfrm>
           <a:prstGeom prst="rect">
             <a:avLst/>
